--- a/docs/presentations/p2p-mesh-mentor-2026-06-15.pptx
+++ b/docs/presentations/p2p-mesh-mentor-2026-06-15.pptx
@@ -6,6 +6,17 @@
   </p:sldMasterIdLst>
   <p:sldIdLst>
     <p:sldId id="256" r:id="rId7"/>
+    <p:sldId id="257" r:id="rId8"/>
+    <p:sldId id="258" r:id="rId9"/>
+    <p:sldId id="259" r:id="rId10"/>
+    <p:sldId id="260" r:id="rId11"/>
+    <p:sldId id="261" r:id="rId12"/>
+    <p:sldId id="262" r:id="rId13"/>
+    <p:sldId id="263" r:id="rId14"/>
+    <p:sldId id="264" r:id="rId15"/>
+    <p:sldId id="265" r:id="rId16"/>
+    <p:sldId id="266" r:id="rId17"/>
+    <p:sldId id="267" r:id="rId18"/>
   </p:sldIdLst>
   <p:sldSz cx="12191695" cy="6858000" type="screen4x3"/>
   <p:notesSz cx="6858000" cy="9144000"/>
@@ -3163,7 +3174,7 @@
               </a:defRPr>
             </a:pPr>
             <a:r>
-              <a:t>PPTX generator skeleton</a:t>
+              <a:t>从飞书用户指令到 P2P 网络投递与远端可见消息</a:t>
             </a:r>
           </a:p>
         </p:txBody>
@@ -3225,14 +3236,4563 @@
       </p:sp>
       <p:sp>
         <p:nvSpPr>
+          <p:cNvPr id="5" name="Rounded Rectangle 4"/>
+          <p:cNvSpPr/>
+          <p:nvPr/>
+        </p:nvSpPr>
+        <p:spPr>
+          <a:xfrm>
+            <a:off x="731520" y="1600200"/>
+            <a:ext cx="2743200" cy="1234440"/>
+          </a:xfrm>
+          <a:prstGeom prst="roundRect">
+            <a:avLst/>
+          </a:prstGeom>
+          <a:solidFill>
+            <a:srgbClr val="FFFFFF"/>
+          </a:solidFill>
+          <a:ln w="12700">
+            <a:solidFill>
+              <a:srgbClr val="94A3B8"/>
+            </a:solidFill>
+          </a:ln>
+        </p:spPr>
+        <p:style>
+          <a:lnRef idx="1">
+            <a:schemeClr val="accent1"/>
+          </a:lnRef>
+          <a:fillRef idx="3">
+            <a:schemeClr val="accent1"/>
+          </a:fillRef>
+          <a:effectRef idx="2">
+            <a:schemeClr val="accent1"/>
+          </a:effectRef>
+          <a:fontRef idx="minor">
+            <a:schemeClr val="lt1"/>
+          </a:fontRef>
+        </p:style>
+        <p:txBody>
+          <a:bodyPr rtlCol="0" anchor="ctr"/>
+          <a:lstStyle/>
+          <a:p>
+            <a:pPr algn="ctr"/>
+          </a:p>
+        </p:txBody>
+      </p:sp>
+      <p:sp>
+        <p:nvSpPr>
+          <p:cNvPr id="6" name="Rectangle 5"/>
+          <p:cNvSpPr/>
+          <p:nvPr/>
+        </p:nvSpPr>
+        <p:spPr>
+          <a:xfrm>
+            <a:off x="731520" y="1600200"/>
+            <a:ext cx="73152" cy="1234440"/>
+          </a:xfrm>
+          <a:prstGeom prst="rect">
+            <a:avLst/>
+          </a:prstGeom>
+          <a:solidFill>
+            <a:srgbClr val="0F766E"/>
+          </a:solidFill>
+          <a:ln>
+            <a:solidFill>
+              <a:srgbClr val="0F766E"/>
+            </a:solidFill>
+          </a:ln>
+        </p:spPr>
+        <p:style>
+          <a:lnRef idx="1">
+            <a:schemeClr val="accent1"/>
+          </a:lnRef>
+          <a:fillRef idx="3">
+            <a:schemeClr val="accent1"/>
+          </a:fillRef>
+          <a:effectRef idx="2">
+            <a:schemeClr val="accent1"/>
+          </a:effectRef>
+          <a:fontRef idx="minor">
+            <a:schemeClr val="lt1"/>
+          </a:fontRef>
+        </p:style>
+        <p:txBody>
+          <a:bodyPr rtlCol="0" anchor="ctr"/>
+          <a:lstStyle/>
+          <a:p>
+            <a:pPr algn="ctr"/>
+          </a:p>
+        </p:txBody>
+      </p:sp>
+      <p:sp>
+        <p:nvSpPr>
+          <p:cNvPr id="7" name="TextBox 6"/>
+          <p:cNvSpPr txBox="1"/>
+          <p:nvPr/>
+        </p:nvSpPr>
+        <p:spPr>
+          <a:xfrm>
+            <a:off x="932688" y="1764792"/>
+            <a:ext cx="2359152" cy="274320"/>
+          </a:xfrm>
+          <a:prstGeom prst="rect">
+            <a:avLst/>
+          </a:prstGeom>
+          <a:noFill/>
+        </p:spPr>
+        <p:txBody>
+          <a:bodyPr wrap="none">
+            <a:spAutoFit/>
+          </a:bodyPr>
+          <a:lstStyle/>
+          <a:p>
+            <a:pPr>
+              <a:defRPr sz="1600" b="1">
+                <a:solidFill>
+                  <a:srgbClr val="0F172A"/>
+                </a:solidFill>
+                <a:latin typeface="Aptos"/>
+              </a:defRPr>
+            </a:pPr>
+            <a:r>
+              <a:t>用户入口</a:t>
+            </a:r>
+          </a:p>
+        </p:txBody>
+      </p:sp>
+      <p:sp>
+        <p:nvSpPr>
+          <p:cNvPr id="8" name="TextBox 7"/>
+          <p:cNvSpPr txBox="1"/>
+          <p:nvPr/>
+        </p:nvSpPr>
+        <p:spPr>
+          <a:xfrm>
+            <a:off x="932688" y="2130552"/>
+            <a:ext cx="2359152" cy="548640"/>
+          </a:xfrm>
+          <a:prstGeom prst="rect">
+            <a:avLst/>
+          </a:prstGeom>
+          <a:noFill/>
+        </p:spPr>
+        <p:txBody>
+          <a:bodyPr wrap="square">
+            <a:spAutoFit/>
+          </a:bodyPr>
+          <a:lstStyle/>
+          <a:p>
+            <a:pPr>
+              <a:spcAft>
+                <a:spcPts val="500"/>
+              </a:spcAft>
+              <a:defRPr sz="1200">
+                <a:solidFill>
+                  <a:srgbClr val="475569"/>
+                </a:solidFill>
+                <a:latin typeface="Aptos"/>
+              </a:defRPr>
+            </a:pPr>
+            <a:r>
+              <a:t>飞书中说：给某 instanceId 发消息</a:t>
+            </a:r>
+          </a:p>
+        </p:txBody>
+      </p:sp>
+      <p:sp>
+        <p:nvSpPr>
+          <p:cNvPr id="9" name="Rounded Rectangle 8"/>
+          <p:cNvSpPr/>
+          <p:nvPr/>
+        </p:nvSpPr>
+        <p:spPr>
+          <a:xfrm>
+            <a:off x="4572000" y="1600200"/>
+            <a:ext cx="2743200" cy="1234440"/>
+          </a:xfrm>
+          <a:prstGeom prst="roundRect">
+            <a:avLst/>
+          </a:prstGeom>
+          <a:solidFill>
+            <a:srgbClr val="FFFFFF"/>
+          </a:solidFill>
+          <a:ln w="12700">
+            <a:solidFill>
+              <a:srgbClr val="94A3B8"/>
+            </a:solidFill>
+          </a:ln>
+        </p:spPr>
+        <p:style>
+          <a:lnRef idx="1">
+            <a:schemeClr val="accent1"/>
+          </a:lnRef>
+          <a:fillRef idx="3">
+            <a:schemeClr val="accent1"/>
+          </a:fillRef>
+          <a:effectRef idx="2">
+            <a:schemeClr val="accent1"/>
+          </a:effectRef>
+          <a:fontRef idx="minor">
+            <a:schemeClr val="lt1"/>
+          </a:fontRef>
+        </p:style>
+        <p:txBody>
+          <a:bodyPr rtlCol="0" anchor="ctr"/>
+          <a:lstStyle/>
+          <a:p>
+            <a:pPr algn="ctr"/>
+          </a:p>
+        </p:txBody>
+      </p:sp>
+      <p:sp>
+        <p:nvSpPr>
+          <p:cNvPr id="10" name="Rectangle 9"/>
+          <p:cNvSpPr/>
+          <p:nvPr/>
+        </p:nvSpPr>
+        <p:spPr>
+          <a:xfrm>
+            <a:off x="4572000" y="1600200"/>
+            <a:ext cx="73152" cy="1234440"/>
+          </a:xfrm>
+          <a:prstGeom prst="rect">
+            <a:avLst/>
+          </a:prstGeom>
+          <a:solidFill>
+            <a:srgbClr val="0F766E"/>
+          </a:solidFill>
+          <a:ln>
+            <a:solidFill>
+              <a:srgbClr val="0F766E"/>
+            </a:solidFill>
+          </a:ln>
+        </p:spPr>
+        <p:style>
+          <a:lnRef idx="1">
+            <a:schemeClr val="accent1"/>
+          </a:lnRef>
+          <a:fillRef idx="3">
+            <a:schemeClr val="accent1"/>
+          </a:fillRef>
+          <a:effectRef idx="2">
+            <a:schemeClr val="accent1"/>
+          </a:effectRef>
+          <a:fontRef idx="minor">
+            <a:schemeClr val="lt1"/>
+          </a:fontRef>
+        </p:style>
+        <p:txBody>
+          <a:bodyPr rtlCol="0" anchor="ctr"/>
+          <a:lstStyle/>
+          <a:p>
+            <a:pPr algn="ctr"/>
+          </a:p>
+        </p:txBody>
+      </p:sp>
+      <p:sp>
+        <p:nvSpPr>
+          <p:cNvPr id="11" name="TextBox 10"/>
+          <p:cNvSpPr txBox="1"/>
+          <p:nvPr/>
+        </p:nvSpPr>
+        <p:spPr>
+          <a:xfrm>
+            <a:off x="4773168" y="1764792"/>
+            <a:ext cx="2359152" cy="274320"/>
+          </a:xfrm>
+          <a:prstGeom prst="rect">
+            <a:avLst/>
+          </a:prstGeom>
+          <a:noFill/>
+        </p:spPr>
+        <p:txBody>
+          <a:bodyPr wrap="none">
+            <a:spAutoFit/>
+          </a:bodyPr>
+          <a:lstStyle/>
+          <a:p>
+            <a:pPr>
+              <a:defRPr sz="1600" b="1">
+                <a:solidFill>
+                  <a:srgbClr val="0F172A"/>
+                </a:solidFill>
+                <a:latin typeface="Aptos"/>
+              </a:defRPr>
+            </a:pPr>
+            <a:r>
+              <a:t>P2P 网络</a:t>
+            </a:r>
+          </a:p>
+        </p:txBody>
+      </p:sp>
+      <p:sp>
+        <p:nvSpPr>
+          <p:cNvPr id="12" name="TextBox 11"/>
+          <p:cNvSpPr txBox="1"/>
+          <p:nvPr/>
+        </p:nvSpPr>
+        <p:spPr>
+          <a:xfrm>
+            <a:off x="4773168" y="2130552"/>
+            <a:ext cx="2359152" cy="548640"/>
+          </a:xfrm>
+          <a:prstGeom prst="rect">
+            <a:avLst/>
+          </a:prstGeom>
+          <a:noFill/>
+        </p:spPr>
+        <p:txBody>
+          <a:bodyPr wrap="square">
+            <a:spAutoFit/>
+          </a:bodyPr>
+          <a:lstStyle/>
+          <a:p>
+            <a:pPr>
+              <a:spcAft>
+                <a:spcPts val="500"/>
+              </a:spcAft>
+              <a:defRPr sz="1200">
+                <a:solidFill>
+                  <a:srgbClr val="475569"/>
+                </a:solidFill>
+                <a:latin typeface="Aptos"/>
+              </a:defRPr>
+            </a:pPr>
+            <a:r>
+              <a:t>libp2p 结构化消息跨实例传输</a:t>
+            </a:r>
+          </a:p>
+        </p:txBody>
+      </p:sp>
+      <p:sp>
+        <p:nvSpPr>
+          <p:cNvPr id="13" name="Rounded Rectangle 12"/>
+          <p:cNvSpPr/>
+          <p:nvPr/>
+        </p:nvSpPr>
+        <p:spPr>
+          <a:xfrm>
+            <a:off x="8412480" y="1600200"/>
+            <a:ext cx="2743200" cy="1234440"/>
+          </a:xfrm>
+          <a:prstGeom prst="roundRect">
+            <a:avLst/>
+          </a:prstGeom>
+          <a:solidFill>
+            <a:srgbClr val="FFFFFF"/>
+          </a:solidFill>
+          <a:ln w="12700">
+            <a:solidFill>
+              <a:srgbClr val="94A3B8"/>
+            </a:solidFill>
+          </a:ln>
+        </p:spPr>
+        <p:style>
+          <a:lnRef idx="1">
+            <a:schemeClr val="accent1"/>
+          </a:lnRef>
+          <a:fillRef idx="3">
+            <a:schemeClr val="accent1"/>
+          </a:fillRef>
+          <a:effectRef idx="2">
+            <a:schemeClr val="accent1"/>
+          </a:effectRef>
+          <a:fontRef idx="minor">
+            <a:schemeClr val="lt1"/>
+          </a:fontRef>
+        </p:style>
+        <p:txBody>
+          <a:bodyPr rtlCol="0" anchor="ctr"/>
+          <a:lstStyle/>
+          <a:p>
+            <a:pPr algn="ctr"/>
+          </a:p>
+        </p:txBody>
+      </p:sp>
+      <p:sp>
+        <p:nvSpPr>
+          <p:cNvPr id="14" name="Rectangle 13"/>
+          <p:cNvSpPr/>
+          <p:nvPr/>
+        </p:nvSpPr>
+        <p:spPr>
+          <a:xfrm>
+            <a:off x="8412480" y="1600200"/>
+            <a:ext cx="73152" cy="1234440"/>
+          </a:xfrm>
+          <a:prstGeom prst="rect">
+            <a:avLst/>
+          </a:prstGeom>
+          <a:solidFill>
+            <a:srgbClr val="16A34A"/>
+          </a:solidFill>
+          <a:ln>
+            <a:solidFill>
+              <a:srgbClr val="16A34A"/>
+            </a:solidFill>
+          </a:ln>
+        </p:spPr>
+        <p:style>
+          <a:lnRef idx="1">
+            <a:schemeClr val="accent1"/>
+          </a:lnRef>
+          <a:fillRef idx="3">
+            <a:schemeClr val="accent1"/>
+          </a:fillRef>
+          <a:effectRef idx="2">
+            <a:schemeClr val="accent1"/>
+          </a:effectRef>
+          <a:fontRef idx="minor">
+            <a:schemeClr val="lt1"/>
+          </a:fontRef>
+        </p:style>
+        <p:txBody>
+          <a:bodyPr rtlCol="0" anchor="ctr"/>
+          <a:lstStyle/>
+          <a:p>
+            <a:pPr algn="ctr"/>
+          </a:p>
+        </p:txBody>
+      </p:sp>
+      <p:sp>
+        <p:nvSpPr>
+          <p:cNvPr id="15" name="TextBox 14"/>
+          <p:cNvSpPr txBox="1"/>
+          <p:nvPr/>
+        </p:nvSpPr>
+        <p:spPr>
+          <a:xfrm>
+            <a:off x="8613648" y="1764792"/>
+            <a:ext cx="2359152" cy="274320"/>
+          </a:xfrm>
+          <a:prstGeom prst="rect">
+            <a:avLst/>
+          </a:prstGeom>
+          <a:noFill/>
+        </p:spPr>
+        <p:txBody>
+          <a:bodyPr wrap="none">
+            <a:spAutoFit/>
+          </a:bodyPr>
+          <a:lstStyle/>
+          <a:p>
+            <a:pPr>
+              <a:defRPr sz="1600" b="1">
+                <a:solidFill>
+                  <a:srgbClr val="0F172A"/>
+                </a:solidFill>
+                <a:latin typeface="Aptos"/>
+              </a:defRPr>
+            </a:pPr>
+            <a:r>
+              <a:t>远端可见</a:t>
+            </a:r>
+          </a:p>
+        </p:txBody>
+      </p:sp>
+      <p:sp>
+        <p:nvSpPr>
+          <p:cNvPr id="16" name="TextBox 15"/>
+          <p:cNvSpPr txBox="1"/>
+          <p:nvPr/>
+        </p:nvSpPr>
+        <p:spPr>
+          <a:xfrm>
+            <a:off x="8613648" y="2130552"/>
+            <a:ext cx="2359152" cy="548640"/>
+          </a:xfrm>
+          <a:prstGeom prst="rect">
+            <a:avLst/>
+          </a:prstGeom>
+          <a:noFill/>
+        </p:spPr>
+        <p:txBody>
+          <a:bodyPr wrap="square">
+            <a:spAutoFit/>
+          </a:bodyPr>
+          <a:lstStyle/>
+          <a:p>
+            <a:pPr>
+              <a:spcAft>
+                <a:spcPts val="500"/>
+              </a:spcAft>
+              <a:defRPr sz="1200">
+                <a:solidFill>
+                  <a:srgbClr val="475569"/>
+                </a:solidFill>
+                <a:latin typeface="Aptos"/>
+              </a:defRPr>
+            </a:pPr>
+            <a:r>
+              <a:t>投递到远端 Feishu channel</a:t>
+            </a:r>
+          </a:p>
+        </p:txBody>
+      </p:sp>
+      <p:cxnSp>
+        <p:nvCxnSpPr>
+          <p:cNvPr id="17" name="Connector 16"/>
+          <p:cNvCxnSpPr/>
+          <p:nvPr/>
+        </p:nvCxnSpPr>
+        <p:spPr>
+          <a:xfrm>
+            <a:off x="3566160" y="2212848"/>
+            <a:ext cx="868680" cy="0"/>
+          </a:xfrm>
+          <a:prstGeom prst="line">
+            <a:avLst/>
+          </a:prstGeom>
+          <a:ln w="25400">
+            <a:solidFill>
+              <a:srgbClr val="94A3B8"/>
+            </a:solidFill>
+          </a:ln>
+        </p:spPr>
+        <p:style>
+          <a:lnRef idx="2">
+            <a:schemeClr val="accent1"/>
+          </a:lnRef>
+          <a:fillRef idx="0">
+            <a:schemeClr val="accent1"/>
+          </a:fillRef>
+          <a:effectRef idx="1">
+            <a:schemeClr val="accent1"/>
+          </a:effectRef>
+          <a:fontRef idx="minor">
+            <a:schemeClr val="tx1"/>
+          </a:fontRef>
+        </p:style>
+      </p:cxnSp>
+      <p:cxnSp>
+        <p:nvCxnSpPr>
+          <p:cNvPr id="18" name="Connector 17"/>
+          <p:cNvCxnSpPr/>
+          <p:nvPr/>
+        </p:nvCxnSpPr>
+        <p:spPr>
+          <a:xfrm>
+            <a:off x="7406640" y="2212848"/>
+            <a:ext cx="868680" cy="0"/>
+          </a:xfrm>
+          <a:prstGeom prst="line">
+            <a:avLst/>
+          </a:prstGeom>
+          <a:ln w="25400">
+            <a:solidFill>
+              <a:srgbClr val="94A3B8"/>
+            </a:solidFill>
+          </a:ln>
+        </p:spPr>
+        <p:style>
+          <a:lnRef idx="2">
+            <a:schemeClr val="accent1"/>
+          </a:lnRef>
+          <a:fillRef idx="0">
+            <a:schemeClr val="accent1"/>
+          </a:fillRef>
+          <a:effectRef idx="1">
+            <a:schemeClr val="accent1"/>
+          </a:effectRef>
+          <a:fontRef idx="minor">
+            <a:schemeClr val="tx1"/>
+          </a:fontRef>
+        </p:style>
+      </p:cxnSp>
+      <p:sp>
+        <p:nvSpPr>
+          <p:cNvPr id="19" name="TextBox 18"/>
+          <p:cNvSpPr txBox="1"/>
+          <p:nvPr/>
+        </p:nvSpPr>
+        <p:spPr>
+          <a:xfrm>
+            <a:off x="914400" y="3657600"/>
+            <a:ext cx="9875520" cy="1097280"/>
+          </a:xfrm>
+          <a:prstGeom prst="rect">
+            <a:avLst/>
+          </a:prstGeom>
+          <a:noFill/>
+        </p:spPr>
+        <p:txBody>
+          <a:bodyPr wrap="none">
+            <a:spAutoFit/>
+          </a:bodyPr>
+          <a:lstStyle/>
+          <a:p>
+            <a:pPr>
+              <a:spcAft>
+                <a:spcPts val="800"/>
+              </a:spcAft>
+              <a:defRPr sz="1900">
+                <a:solidFill>
+                  <a:srgbClr val="0F172A"/>
+                </a:solidFill>
+                <a:latin typeface="Aptos"/>
+              </a:defRPr>
+            </a:pPr>
+            <a:r>
+              <a:t>核心问题：用户指令如何触发 P2P？P2P 消息如何被远端用户看见？</a:t>
+            </a:r>
+          </a:p>
+          <a:p>
+            <a:pPr>
+              <a:spcAft>
+                <a:spcPts val="800"/>
+              </a:spcAft>
+              <a:defRPr sz="1900">
+                <a:solidFill>
+                  <a:srgbClr val="0F172A"/>
+                </a:solidFill>
+                <a:latin typeface="Aptos"/>
+              </a:defRPr>
+            </a:pPr>
+            <a:r>
+              <a:t>关键机制：instanceId 路由、结构化消息、远端 channel 投递、delivery ACK。</a:t>
+            </a:r>
+          </a:p>
+        </p:txBody>
+      </p:sp>
+      <p:sp>
+        <p:nvSpPr>
+          <p:cNvPr id="20" name="TextBox 19"/>
+          <p:cNvSpPr txBox="1"/>
+          <p:nvPr/>
+        </p:nvSpPr>
+        <p:spPr>
+          <a:xfrm>
+            <a:off x="502920" y="6473952"/>
+            <a:ext cx="7315200" cy="228600"/>
+          </a:xfrm>
+          <a:prstGeom prst="rect">
+            <a:avLst/>
+          </a:prstGeom>
+          <a:noFill/>
+        </p:spPr>
+        <p:txBody>
+          <a:bodyPr wrap="none">
+            <a:spAutoFit/>
+          </a:bodyPr>
+          <a:lstStyle/>
+          <a:p>
+            <a:pPr>
+              <a:defRPr sz="900">
+                <a:solidFill>
+                  <a:srgbClr val="475569"/>
+                </a:solidFill>
+                <a:latin typeface="Aptos"/>
+              </a:defRPr>
+            </a:pPr>
+            <a:r>
+              <a:t>概览 / 01</a:t>
+            </a:r>
+          </a:p>
+        </p:txBody>
+      </p:sp>
+    </p:spTree>
+  </p:cSld>
+  <p:clrMapOvr>
+    <a:masterClrMapping/>
+  </p:clrMapOvr>
+</p:sld>
+</file>
+
+<file path=ppt/slides/slide10.xml><?xml version="1.0" encoding="utf-8"?>
+<p:sld xmlns:a="http://schemas.openxmlformats.org/drawingml/2006/main" xmlns:p="http://schemas.openxmlformats.org/presentationml/2006/main" xmlns:r="http://schemas.openxmlformats.org/officeDocument/2006/relationships">
+  <p:cSld>
+    <p:bg>
+      <p:bgPr>
+        <a:solidFill>
+          <a:srgbClr val="F8FAFC"/>
+        </a:solidFill>
+        <a:effectLst/>
+      </p:bgPr>
+    </p:bg>
+    <p:spTree>
+      <p:nvGrpSpPr>
+        <p:cNvPr id="1" name=""/>
+        <p:cNvGrpSpPr/>
+        <p:nvPr/>
+      </p:nvGrpSpPr>
+      <p:grpSpPr/>
+      <p:sp>
+        <p:nvSpPr>
+          <p:cNvPr id="2" name="TextBox 1"/>
+          <p:cNvSpPr txBox="1"/>
+          <p:nvPr/>
+        </p:nvSpPr>
+        <p:spPr>
+          <a:xfrm>
+            <a:off x="502920" y="292608"/>
+            <a:ext cx="7772400" cy="502920"/>
+          </a:xfrm>
+          <a:prstGeom prst="rect">
+            <a:avLst/>
+          </a:prstGeom>
+          <a:noFill/>
+        </p:spPr>
+        <p:txBody>
+          <a:bodyPr wrap="none">
+            <a:spAutoFit/>
+          </a:bodyPr>
+          <a:lstStyle/>
+          <a:p>
+            <a:pPr>
+              <a:defRPr sz="3000" b="1">
+                <a:solidFill>
+                  <a:srgbClr val="0F172A"/>
+                </a:solidFill>
+                <a:latin typeface="Aptos"/>
+              </a:defRPr>
+            </a:pPr>
+            <a:r>
+              <a:t>网络可达性增强</a:t>
+            </a:r>
+          </a:p>
+        </p:txBody>
+      </p:sp>
+      <p:sp>
+        <p:nvSpPr>
+          <p:cNvPr id="3" name="Rounded Rectangle 2"/>
+          <p:cNvSpPr/>
+          <p:nvPr/>
+        </p:nvSpPr>
+        <p:spPr>
+          <a:xfrm>
+            <a:off x="9326880" y="384048"/>
+            <a:ext cx="2240280" cy="310896"/>
+          </a:xfrm>
+          <a:prstGeom prst="roundRect">
+            <a:avLst/>
+          </a:prstGeom>
+          <a:solidFill>
+            <a:srgbClr val="CCFBF1"/>
+          </a:solidFill>
+          <a:ln>
+            <a:solidFill>
+              <a:srgbClr val="CCFBF1"/>
+            </a:solidFill>
+          </a:ln>
+        </p:spPr>
+        <p:style>
+          <a:lnRef idx="1">
+            <a:schemeClr val="accent1"/>
+          </a:lnRef>
+          <a:fillRef idx="3">
+            <a:schemeClr val="accent1"/>
+          </a:fillRef>
+          <a:effectRef idx="2">
+            <a:schemeClr val="accent1"/>
+          </a:effectRef>
+          <a:fontRef idx="minor">
+            <a:schemeClr val="lt1"/>
+          </a:fontRef>
+        </p:style>
+        <p:txBody>
+          <a:bodyPr rtlCol="0" anchor="ctr"/>
+          <a:lstStyle/>
+          <a:p>
+            <a:pPr algn="ctr">
+              <a:defRPr sz="1000" b="1">
+                <a:solidFill>
+                  <a:srgbClr val="0F766E"/>
+                </a:solidFill>
+                <a:latin typeface="Aptos"/>
+              </a:defRPr>
+            </a:pPr>
+            <a:r>
+              <a:t>网络</a:t>
+            </a:r>
+          </a:p>
+        </p:txBody>
+      </p:sp>
+      <p:sp>
+        <p:nvSpPr>
+          <p:cNvPr id="4" name="TextBox 3"/>
+          <p:cNvSpPr txBox="1"/>
+          <p:nvPr/>
+        </p:nvSpPr>
+        <p:spPr>
+          <a:xfrm>
+            <a:off x="777240" y="1325880"/>
+            <a:ext cx="6766560" cy="4389120"/>
+          </a:xfrm>
+          <a:prstGeom prst="rect">
+            <a:avLst/>
+          </a:prstGeom>
+          <a:noFill/>
+        </p:spPr>
+        <p:txBody>
+          <a:bodyPr wrap="none">
+            <a:spAutoFit/>
+          </a:bodyPr>
+          <a:lstStyle/>
+          <a:p>
+            <a:pPr>
+              <a:spcAft>
+                <a:spcPts val="800"/>
+              </a:spcAft>
+              <a:defRPr sz="1900">
+                <a:solidFill>
+                  <a:srgbClr val="0F172A"/>
+                </a:solidFill>
+                <a:latin typeface="Aptos"/>
+              </a:defRPr>
+            </a:pPr>
+            <a:r>
+              <a:t>mDNS：局域网自动发现。</a:t>
+            </a:r>
+          </a:p>
+          <a:p>
+            <a:pPr>
+              <a:spcAft>
+                <a:spcPts val="800"/>
+              </a:spcAft>
+              <a:defRPr sz="1900">
+                <a:solidFill>
+                  <a:srgbClr val="0F172A"/>
+                </a:solidFill>
+                <a:latin typeface="Aptos"/>
+              </a:defRPr>
+            </a:pPr>
+            <a:r>
+              <a:t>bootstrap：静态 peer 地址接入。</a:t>
+            </a:r>
+          </a:p>
+          <a:p>
+            <a:pPr>
+              <a:spcAft>
+                <a:spcPts val="800"/>
+              </a:spcAft>
+              <a:defRPr sz="1900">
+                <a:solidFill>
+                  <a:srgbClr val="0F172A"/>
+                </a:solidFill>
+                <a:latin typeface="Aptos"/>
+              </a:defRPr>
+            </a:pPr>
+            <a:r>
+              <a:t>DHT：WAN peer discovery 与 pubkey registry。</a:t>
+            </a:r>
+          </a:p>
+          <a:p>
+            <a:pPr>
+              <a:spcAft>
+                <a:spcPts val="800"/>
+              </a:spcAft>
+              <a:defRPr sz="1900">
+                <a:solidFill>
+                  <a:srgbClr val="0F172A"/>
+                </a:solidFill>
+                <a:latin typeface="Aptos"/>
+              </a:defRPr>
+            </a:pPr>
+            <a:r>
+              <a:t>NAT traversal / relay：提升跨 NAT 场景可达性。</a:t>
+            </a:r>
+          </a:p>
+        </p:txBody>
+      </p:sp>
+      <p:sp>
+        <p:nvSpPr>
           <p:cNvPr id="5" name="TextBox 4"/>
           <p:cNvSpPr txBox="1"/>
           <p:nvPr/>
         </p:nvSpPr>
         <p:spPr>
           <a:xfrm>
-            <a:off x="822960" y="1554480"/>
-            <a:ext cx="9875520" cy="914400"/>
+            <a:off x="502920" y="6473952"/>
+            <a:ext cx="7315200" cy="228600"/>
+          </a:xfrm>
+          <a:prstGeom prst="rect">
+            <a:avLst/>
+          </a:prstGeom>
+          <a:noFill/>
+        </p:spPr>
+        <p:txBody>
+          <a:bodyPr wrap="none">
+            <a:spAutoFit/>
+          </a:bodyPr>
+          <a:lstStyle/>
+          <a:p>
+            <a:pPr>
+              <a:defRPr sz="900">
+                <a:solidFill>
+                  <a:srgbClr val="475569"/>
+                </a:solidFill>
+                <a:latin typeface="Aptos"/>
+              </a:defRPr>
+            </a:pPr>
+            <a:r>
+              <a:t>网络 / 10</a:t>
+            </a:r>
+          </a:p>
+        </p:txBody>
+      </p:sp>
+      <p:sp>
+        <p:nvSpPr>
+          <p:cNvPr id="6" name="Rounded Rectangle 5"/>
+          <p:cNvSpPr/>
+          <p:nvPr/>
+        </p:nvSpPr>
+        <p:spPr>
+          <a:xfrm>
+            <a:off x="7680960" y="1325880"/>
+            <a:ext cx="3657600" cy="2194560"/>
+          </a:xfrm>
+          <a:prstGeom prst="roundRect">
+            <a:avLst/>
+          </a:prstGeom>
+          <a:solidFill>
+            <a:srgbClr val="FFFFFF"/>
+          </a:solidFill>
+          <a:ln w="12700">
+            <a:solidFill>
+              <a:srgbClr val="94A3B8"/>
+            </a:solidFill>
+          </a:ln>
+        </p:spPr>
+        <p:style>
+          <a:lnRef idx="1">
+            <a:schemeClr val="accent1"/>
+          </a:lnRef>
+          <a:fillRef idx="3">
+            <a:schemeClr val="accent1"/>
+          </a:fillRef>
+          <a:effectRef idx="2">
+            <a:schemeClr val="accent1"/>
+          </a:effectRef>
+          <a:fontRef idx="minor">
+            <a:schemeClr val="lt1"/>
+          </a:fontRef>
+        </p:style>
+        <p:txBody>
+          <a:bodyPr rtlCol="0" anchor="ctr"/>
+          <a:lstStyle/>
+          <a:p>
+            <a:pPr algn="ctr"/>
+          </a:p>
+        </p:txBody>
+      </p:sp>
+      <p:sp>
+        <p:nvSpPr>
+          <p:cNvPr id="7" name="Rectangle 6"/>
+          <p:cNvSpPr/>
+          <p:nvPr/>
+        </p:nvSpPr>
+        <p:spPr>
+          <a:xfrm>
+            <a:off x="7680960" y="1325880"/>
+            <a:ext cx="73152" cy="2194560"/>
+          </a:xfrm>
+          <a:prstGeom prst="rect">
+            <a:avLst/>
+          </a:prstGeom>
+          <a:solidFill>
+            <a:srgbClr val="0F766E"/>
+          </a:solidFill>
+          <a:ln>
+            <a:solidFill>
+              <a:srgbClr val="0F766E"/>
+            </a:solidFill>
+          </a:ln>
+        </p:spPr>
+        <p:style>
+          <a:lnRef idx="1">
+            <a:schemeClr val="accent1"/>
+          </a:lnRef>
+          <a:fillRef idx="3">
+            <a:schemeClr val="accent1"/>
+          </a:fillRef>
+          <a:effectRef idx="2">
+            <a:schemeClr val="accent1"/>
+          </a:effectRef>
+          <a:fontRef idx="minor">
+            <a:schemeClr val="lt1"/>
+          </a:fontRef>
+        </p:style>
+        <p:txBody>
+          <a:bodyPr rtlCol="0" anchor="ctr"/>
+          <a:lstStyle/>
+          <a:p>
+            <a:pPr algn="ctr"/>
+          </a:p>
+        </p:txBody>
+      </p:sp>
+      <p:sp>
+        <p:nvSpPr>
+          <p:cNvPr id="8" name="TextBox 7"/>
+          <p:cNvSpPr txBox="1"/>
+          <p:nvPr/>
+        </p:nvSpPr>
+        <p:spPr>
+          <a:xfrm>
+            <a:off x="7882128" y="1490472"/>
+            <a:ext cx="3273552" cy="274320"/>
+          </a:xfrm>
+          <a:prstGeom prst="rect">
+            <a:avLst/>
+          </a:prstGeom>
+          <a:noFill/>
+        </p:spPr>
+        <p:txBody>
+          <a:bodyPr wrap="none">
+            <a:spAutoFit/>
+          </a:bodyPr>
+          <a:lstStyle/>
+          <a:p>
+            <a:pPr>
+              <a:defRPr sz="1600" b="1">
+                <a:solidFill>
+                  <a:srgbClr val="0F172A"/>
+                </a:solidFill>
+                <a:latin typeface="Aptos"/>
+              </a:defRPr>
+            </a:pPr>
+            <a:r>
+              <a:t>libp2p 可达性层</a:t>
+            </a:r>
+          </a:p>
+        </p:txBody>
+      </p:sp>
+      <p:sp>
+        <p:nvSpPr>
+          <p:cNvPr id="9" name="TextBox 8"/>
+          <p:cNvSpPr txBox="1"/>
+          <p:nvPr/>
+        </p:nvSpPr>
+        <p:spPr>
+          <a:xfrm>
+            <a:off x="7882128" y="1856231"/>
+            <a:ext cx="3273552" cy="1508760"/>
+          </a:xfrm>
+          <a:prstGeom prst="rect">
+            <a:avLst/>
+          </a:prstGeom>
+          <a:noFill/>
+        </p:spPr>
+        <p:txBody>
+          <a:bodyPr wrap="square">
+            <a:spAutoFit/>
+          </a:bodyPr>
+          <a:lstStyle/>
+          <a:p>
+            <a:pPr>
+              <a:spcAft>
+                <a:spcPts val="500"/>
+              </a:spcAft>
+              <a:defRPr sz="1200">
+                <a:solidFill>
+                  <a:srgbClr val="475569"/>
+                </a:solidFill>
+                <a:latin typeface="Aptos"/>
+              </a:defRPr>
+            </a:pPr>
+            <a:r>
+              <a:t>AutoNAT</a:t>
+            </a:r>
+          </a:p>
+          <a:p>
+            <a:pPr>
+              <a:spcAft>
+                <a:spcPts val="500"/>
+              </a:spcAft>
+              <a:defRPr sz="1200">
+                <a:solidFill>
+                  <a:srgbClr val="475569"/>
+                </a:solidFill>
+                <a:latin typeface="Aptos"/>
+              </a:defRPr>
+            </a:pPr>
+            <a:r>
+              <a:t>UPnP</a:t>
+            </a:r>
+          </a:p>
+          <a:p>
+            <a:pPr>
+              <a:spcAft>
+                <a:spcPts val="500"/>
+              </a:spcAft>
+              <a:defRPr sz="1200">
+                <a:solidFill>
+                  <a:srgbClr val="475569"/>
+                </a:solidFill>
+                <a:latin typeface="Aptos"/>
+              </a:defRPr>
+            </a:pPr>
+            <a:r>
+              <a:t>Circuit Relay v2</a:t>
+            </a:r>
+          </a:p>
+          <a:p>
+            <a:pPr>
+              <a:spcAft>
+                <a:spcPts val="500"/>
+              </a:spcAft>
+              <a:defRPr sz="1200">
+                <a:solidFill>
+                  <a:srgbClr val="475569"/>
+                </a:solidFill>
+                <a:latin typeface="Aptos"/>
+              </a:defRPr>
+            </a:pPr>
+            <a:r>
+              <a:t>DCUtR</a:t>
+            </a:r>
+          </a:p>
+        </p:txBody>
+      </p:sp>
+    </p:spTree>
+  </p:cSld>
+  <p:clrMapOvr>
+    <a:masterClrMapping/>
+  </p:clrMapOvr>
+</p:sld>
+</file>
+
+<file path=ppt/slides/slide11.xml><?xml version="1.0" encoding="utf-8"?>
+<p:sld xmlns:a="http://schemas.openxmlformats.org/drawingml/2006/main" xmlns:p="http://schemas.openxmlformats.org/presentationml/2006/main" xmlns:r="http://schemas.openxmlformats.org/officeDocument/2006/relationships">
+  <p:cSld>
+    <p:bg>
+      <p:bgPr>
+        <a:solidFill>
+          <a:srgbClr val="F8FAFC"/>
+        </a:solidFill>
+        <a:effectLst/>
+      </p:bgPr>
+    </p:bg>
+    <p:spTree>
+      <p:nvGrpSpPr>
+        <p:cNvPr id="1" name=""/>
+        <p:cNvGrpSpPr/>
+        <p:nvPr/>
+      </p:nvGrpSpPr>
+      <p:grpSpPr/>
+      <p:sp>
+        <p:nvSpPr>
+          <p:cNvPr id="2" name="TextBox 1"/>
+          <p:cNvSpPr txBox="1"/>
+          <p:nvPr/>
+        </p:nvSpPr>
+        <p:spPr>
+          <a:xfrm>
+            <a:off x="502920" y="292608"/>
+            <a:ext cx="7772400" cy="502920"/>
+          </a:xfrm>
+          <a:prstGeom prst="rect">
+            <a:avLst/>
+          </a:prstGeom>
+          <a:noFill/>
+        </p:spPr>
+        <p:txBody>
+          <a:bodyPr wrap="none">
+            <a:spAutoFit/>
+          </a:bodyPr>
+          <a:lstStyle/>
+          <a:p>
+            <a:pPr>
+              <a:defRPr sz="3000" b="1">
+                <a:solidFill>
+                  <a:srgbClr val="0F172A"/>
+                </a:solidFill>
+                <a:latin typeface="Aptos"/>
+              </a:defRPr>
+            </a:pPr>
+            <a:r>
+              <a:t>安全边界与鲁棒性</a:t>
+            </a:r>
+          </a:p>
+        </p:txBody>
+      </p:sp>
+      <p:sp>
+        <p:nvSpPr>
+          <p:cNvPr id="3" name="Rounded Rectangle 2"/>
+          <p:cNvSpPr/>
+          <p:nvPr/>
+        </p:nvSpPr>
+        <p:spPr>
+          <a:xfrm>
+            <a:off x="9326880" y="384048"/>
+            <a:ext cx="2240280" cy="310896"/>
+          </a:xfrm>
+          <a:prstGeom prst="roundRect">
+            <a:avLst/>
+          </a:prstGeom>
+          <a:solidFill>
+            <a:srgbClr val="CCFBF1"/>
+          </a:solidFill>
+          <a:ln>
+            <a:solidFill>
+              <a:srgbClr val="CCFBF1"/>
+            </a:solidFill>
+          </a:ln>
+        </p:spPr>
+        <p:style>
+          <a:lnRef idx="1">
+            <a:schemeClr val="accent1"/>
+          </a:lnRef>
+          <a:fillRef idx="3">
+            <a:schemeClr val="accent1"/>
+          </a:fillRef>
+          <a:effectRef idx="2">
+            <a:schemeClr val="accent1"/>
+          </a:effectRef>
+          <a:fontRef idx="minor">
+            <a:schemeClr val="lt1"/>
+          </a:fontRef>
+        </p:style>
+        <p:txBody>
+          <a:bodyPr rtlCol="0" anchor="ctr"/>
+          <a:lstStyle/>
+          <a:p>
+            <a:pPr algn="ctr">
+              <a:defRPr sz="1000" b="1">
+                <a:solidFill>
+                  <a:srgbClr val="0F766E"/>
+                </a:solidFill>
+                <a:latin typeface="Aptos"/>
+              </a:defRPr>
+            </a:pPr>
+            <a:r>
+              <a:t>边界</a:t>
+            </a:r>
+          </a:p>
+        </p:txBody>
+      </p:sp>
+      <p:sp>
+        <p:nvSpPr>
+          <p:cNvPr id="4" name="Rounded Rectangle 3"/>
+          <p:cNvSpPr/>
+          <p:nvPr/>
+        </p:nvSpPr>
+        <p:spPr>
+          <a:xfrm>
+            <a:off x="777240" y="1234440"/>
+            <a:ext cx="4983480" cy="3566160"/>
+          </a:xfrm>
+          <a:prstGeom prst="roundRect">
+            <a:avLst/>
+          </a:prstGeom>
+          <a:solidFill>
+            <a:srgbClr val="FFFFFF"/>
+          </a:solidFill>
+          <a:ln w="12700">
+            <a:solidFill>
+              <a:srgbClr val="94A3B8"/>
+            </a:solidFill>
+          </a:ln>
+        </p:spPr>
+        <p:style>
+          <a:lnRef idx="1">
+            <a:schemeClr val="accent1"/>
+          </a:lnRef>
+          <a:fillRef idx="3">
+            <a:schemeClr val="accent1"/>
+          </a:fillRef>
+          <a:effectRef idx="2">
+            <a:schemeClr val="accent1"/>
+          </a:effectRef>
+          <a:fontRef idx="minor">
+            <a:schemeClr val="lt1"/>
+          </a:fontRef>
+        </p:style>
+        <p:txBody>
+          <a:bodyPr rtlCol="0" anchor="ctr"/>
+          <a:lstStyle/>
+          <a:p>
+            <a:pPr algn="ctr"/>
+          </a:p>
+        </p:txBody>
+      </p:sp>
+      <p:sp>
+        <p:nvSpPr>
+          <p:cNvPr id="5" name="Rectangle 4"/>
+          <p:cNvSpPr/>
+          <p:nvPr/>
+        </p:nvSpPr>
+        <p:spPr>
+          <a:xfrm>
+            <a:off x="777240" y="1234440"/>
+            <a:ext cx="73152" cy="3566160"/>
+          </a:xfrm>
+          <a:prstGeom prst="rect">
+            <a:avLst/>
+          </a:prstGeom>
+          <a:solidFill>
+            <a:srgbClr val="16A34A"/>
+          </a:solidFill>
+          <a:ln>
+            <a:solidFill>
+              <a:srgbClr val="16A34A"/>
+            </a:solidFill>
+          </a:ln>
+        </p:spPr>
+        <p:style>
+          <a:lnRef idx="1">
+            <a:schemeClr val="accent1"/>
+          </a:lnRef>
+          <a:fillRef idx="3">
+            <a:schemeClr val="accent1"/>
+          </a:fillRef>
+          <a:effectRef idx="2">
+            <a:schemeClr val="accent1"/>
+          </a:effectRef>
+          <a:fontRef idx="minor">
+            <a:schemeClr val="lt1"/>
+          </a:fontRef>
+        </p:style>
+        <p:txBody>
+          <a:bodyPr rtlCol="0" anchor="ctr"/>
+          <a:lstStyle/>
+          <a:p>
+            <a:pPr algn="ctr"/>
+          </a:p>
+        </p:txBody>
+      </p:sp>
+      <p:sp>
+        <p:nvSpPr>
+          <p:cNvPr id="6" name="TextBox 5"/>
+          <p:cNvSpPr txBox="1"/>
+          <p:nvPr/>
+        </p:nvSpPr>
+        <p:spPr>
+          <a:xfrm>
+            <a:off x="978408" y="1399032"/>
+            <a:ext cx="4599432" cy="274320"/>
+          </a:xfrm>
+          <a:prstGeom prst="rect">
+            <a:avLst/>
+          </a:prstGeom>
+          <a:noFill/>
+        </p:spPr>
+        <p:txBody>
+          <a:bodyPr wrap="none">
+            <a:spAutoFit/>
+          </a:bodyPr>
+          <a:lstStyle/>
+          <a:p>
+            <a:pPr>
+              <a:defRPr sz="1600" b="1">
+                <a:solidFill>
+                  <a:srgbClr val="0F172A"/>
+                </a:solidFill>
+                <a:latin typeface="Aptos"/>
+              </a:defRPr>
+            </a:pPr>
+            <a:r>
+              <a:t>允许</a:t>
+            </a:r>
+          </a:p>
+        </p:txBody>
+      </p:sp>
+      <p:sp>
+        <p:nvSpPr>
+          <p:cNvPr id="7" name="TextBox 6"/>
+          <p:cNvSpPr txBox="1"/>
+          <p:nvPr/>
+        </p:nvSpPr>
+        <p:spPr>
+          <a:xfrm>
+            <a:off x="978408" y="1764792"/>
+            <a:ext cx="4599432" cy="2880360"/>
+          </a:xfrm>
+          <a:prstGeom prst="rect">
+            <a:avLst/>
+          </a:prstGeom>
+          <a:noFill/>
+        </p:spPr>
+        <p:txBody>
+          <a:bodyPr wrap="square">
+            <a:spAutoFit/>
+          </a:bodyPr>
+          <a:lstStyle/>
+          <a:p>
+            <a:pPr>
+              <a:spcAft>
+                <a:spcPts val="500"/>
+              </a:spcAft>
+              <a:defRPr sz="1200">
+                <a:solidFill>
+                  <a:srgbClr val="475569"/>
+                </a:solidFill>
+                <a:latin typeface="Aptos"/>
+              </a:defRPr>
+            </a:pPr>
+            <a:r>
+              <a:t>P2P 文本作为普通消息转发</a:t>
+            </a:r>
+          </a:p>
+          <a:p>
+            <a:pPr>
+              <a:spcAft>
+                <a:spcPts val="500"/>
+              </a:spcAft>
+              <a:defRPr sz="1200">
+                <a:solidFill>
+                  <a:srgbClr val="475569"/>
+                </a:solidFill>
+                <a:latin typeface="Aptos"/>
+              </a:defRPr>
+            </a:pPr>
+            <a:r>
+              <a:t>重复消息复用上次 ACK</a:t>
+            </a:r>
+          </a:p>
+          <a:p>
+            <a:pPr>
+              <a:spcAft>
+                <a:spcPts val="500"/>
+              </a:spcAft>
+              <a:defRPr sz="1200">
+                <a:solidFill>
+                  <a:srgbClr val="475569"/>
+                </a:solidFill>
+                <a:latin typeface="Aptos"/>
+              </a:defRPr>
+            </a:pPr>
+            <a:r>
+              <a:t>失败原因回传给发送方</a:t>
+            </a:r>
+          </a:p>
+        </p:txBody>
+      </p:sp>
+      <p:sp>
+        <p:nvSpPr>
+          <p:cNvPr id="8" name="Rounded Rectangle 7"/>
+          <p:cNvSpPr/>
+          <p:nvPr/>
+        </p:nvSpPr>
+        <p:spPr>
+          <a:xfrm>
+            <a:off x="6446520" y="1234440"/>
+            <a:ext cx="4983480" cy="3566160"/>
+          </a:xfrm>
+          <a:prstGeom prst="roundRect">
+            <a:avLst/>
+          </a:prstGeom>
+          <a:solidFill>
+            <a:srgbClr val="FFFFFF"/>
+          </a:solidFill>
+          <a:ln w="12700">
+            <a:solidFill>
+              <a:srgbClr val="94A3B8"/>
+            </a:solidFill>
+          </a:ln>
+        </p:spPr>
+        <p:style>
+          <a:lnRef idx="1">
+            <a:schemeClr val="accent1"/>
+          </a:lnRef>
+          <a:fillRef idx="3">
+            <a:schemeClr val="accent1"/>
+          </a:fillRef>
+          <a:effectRef idx="2">
+            <a:schemeClr val="accent1"/>
+          </a:effectRef>
+          <a:fontRef idx="minor">
+            <a:schemeClr val="lt1"/>
+          </a:fontRef>
+        </p:style>
+        <p:txBody>
+          <a:bodyPr rtlCol="0" anchor="ctr"/>
+          <a:lstStyle/>
+          <a:p>
+            <a:pPr algn="ctr"/>
+          </a:p>
+        </p:txBody>
+      </p:sp>
+      <p:sp>
+        <p:nvSpPr>
+          <p:cNvPr id="9" name="Rectangle 8"/>
+          <p:cNvSpPr/>
+          <p:nvPr/>
+        </p:nvSpPr>
+        <p:spPr>
+          <a:xfrm>
+            <a:off x="6446520" y="1234440"/>
+            <a:ext cx="73152" cy="3566160"/>
+          </a:xfrm>
+          <a:prstGeom prst="rect">
+            <a:avLst/>
+          </a:prstGeom>
+          <a:solidFill>
+            <a:srgbClr val="DC2626"/>
+          </a:solidFill>
+          <a:ln>
+            <a:solidFill>
+              <a:srgbClr val="DC2626"/>
+            </a:solidFill>
+          </a:ln>
+        </p:spPr>
+        <p:style>
+          <a:lnRef idx="1">
+            <a:schemeClr val="accent1"/>
+          </a:lnRef>
+          <a:fillRef idx="3">
+            <a:schemeClr val="accent1"/>
+          </a:fillRef>
+          <a:effectRef idx="2">
+            <a:schemeClr val="accent1"/>
+          </a:effectRef>
+          <a:fontRef idx="minor">
+            <a:schemeClr val="lt1"/>
+          </a:fontRef>
+        </p:style>
+        <p:txBody>
+          <a:bodyPr rtlCol="0" anchor="ctr"/>
+          <a:lstStyle/>
+          <a:p>
+            <a:pPr algn="ctr"/>
+          </a:p>
+        </p:txBody>
+      </p:sp>
+      <p:sp>
+        <p:nvSpPr>
+          <p:cNvPr id="10" name="TextBox 9"/>
+          <p:cNvSpPr txBox="1"/>
+          <p:nvPr/>
+        </p:nvSpPr>
+        <p:spPr>
+          <a:xfrm>
+            <a:off x="6647688" y="1399032"/>
+            <a:ext cx="4599432" cy="274320"/>
+          </a:xfrm>
+          <a:prstGeom prst="rect">
+            <a:avLst/>
+          </a:prstGeom>
+          <a:noFill/>
+        </p:spPr>
+        <p:txBody>
+          <a:bodyPr wrap="none">
+            <a:spAutoFit/>
+          </a:bodyPr>
+          <a:lstStyle/>
+          <a:p>
+            <a:pPr>
+              <a:defRPr sz="1600" b="1">
+                <a:solidFill>
+                  <a:srgbClr val="0F172A"/>
+                </a:solidFill>
+                <a:latin typeface="Aptos"/>
+              </a:defRPr>
+            </a:pPr>
+            <a:r>
+              <a:t>禁止</a:t>
+            </a:r>
+          </a:p>
+        </p:txBody>
+      </p:sp>
+      <p:sp>
+        <p:nvSpPr>
+          <p:cNvPr id="11" name="TextBox 10"/>
+          <p:cNvSpPr txBox="1"/>
+          <p:nvPr/>
+        </p:nvSpPr>
+        <p:spPr>
+          <a:xfrm>
+            <a:off x="6647688" y="1764792"/>
+            <a:ext cx="4599432" cy="2880360"/>
+          </a:xfrm>
+          <a:prstGeom prst="rect">
+            <a:avLst/>
+          </a:prstGeom>
+          <a:noFill/>
+        </p:spPr>
+        <p:txBody>
+          <a:bodyPr wrap="square">
+            <a:spAutoFit/>
+          </a:bodyPr>
+          <a:lstStyle/>
+          <a:p>
+            <a:pPr>
+              <a:spcAft>
+                <a:spcPts val="500"/>
+              </a:spcAft>
+              <a:defRPr sz="1200">
+                <a:solidFill>
+                  <a:srgbClr val="475569"/>
+                </a:solidFill>
+                <a:latin typeface="Aptos"/>
+              </a:defRPr>
+            </a:pPr>
+            <a:r>
+              <a:t>不把远端文本当系统提示词</a:t>
+            </a:r>
+          </a:p>
+          <a:p>
+            <a:pPr>
+              <a:spcAft>
+                <a:spcPts val="500"/>
+              </a:spcAft>
+              <a:defRPr sz="1200">
+                <a:solidFill>
+                  <a:srgbClr val="475569"/>
+                </a:solidFill>
+                <a:latin typeface="Aptos"/>
+              </a:defRPr>
+            </a:pPr>
+            <a:r>
+              <a:t>不自动执行远端指令</a:t>
+            </a:r>
+          </a:p>
+          <a:p>
+            <a:pPr>
+              <a:spcAft>
+                <a:spcPts val="500"/>
+              </a:spcAft>
+              <a:defRPr sz="1200">
+                <a:solidFill>
+                  <a:srgbClr val="475569"/>
+                </a:solidFill>
+                <a:latin typeface="Aptos"/>
+              </a:defRPr>
+            </a:pPr>
+            <a:r>
+              <a:t>不再使用 child_process shell 投递</a:t>
+            </a:r>
+          </a:p>
+        </p:txBody>
+      </p:sp>
+      <p:sp>
+        <p:nvSpPr>
+          <p:cNvPr id="12" name="TextBox 11"/>
+          <p:cNvSpPr txBox="1"/>
+          <p:nvPr/>
+        </p:nvSpPr>
+        <p:spPr>
+          <a:xfrm>
+            <a:off x="502920" y="6473952"/>
+            <a:ext cx="7315200" cy="228600"/>
+          </a:xfrm>
+          <a:prstGeom prst="rect">
+            <a:avLst/>
+          </a:prstGeom>
+          <a:noFill/>
+        </p:spPr>
+        <p:txBody>
+          <a:bodyPr wrap="none">
+            <a:spAutoFit/>
+          </a:bodyPr>
+          <a:lstStyle/>
+          <a:p>
+            <a:pPr>
+              <a:defRPr sz="900">
+                <a:solidFill>
+                  <a:srgbClr val="475569"/>
+                </a:solidFill>
+                <a:latin typeface="Aptos"/>
+              </a:defRPr>
+            </a:pPr>
+            <a:r>
+              <a:t>边界 / 11</a:t>
+            </a:r>
+          </a:p>
+        </p:txBody>
+      </p:sp>
+    </p:spTree>
+  </p:cSld>
+  <p:clrMapOvr>
+    <a:masterClrMapping/>
+  </p:clrMapOvr>
+</p:sld>
+</file>
+
+<file path=ppt/slides/slide12.xml><?xml version="1.0" encoding="utf-8"?>
+<p:sld xmlns:a="http://schemas.openxmlformats.org/drawingml/2006/main" xmlns:p="http://schemas.openxmlformats.org/presentationml/2006/main" xmlns:r="http://schemas.openxmlformats.org/officeDocument/2006/relationships">
+  <p:cSld>
+    <p:bg>
+      <p:bgPr>
+        <a:solidFill>
+          <a:srgbClr val="F8FAFC"/>
+        </a:solidFill>
+        <a:effectLst/>
+      </p:bgPr>
+    </p:bg>
+    <p:spTree>
+      <p:nvGrpSpPr>
+        <p:cNvPr id="1" name=""/>
+        <p:cNvGrpSpPr/>
+        <p:nvPr/>
+      </p:nvGrpSpPr>
+      <p:grpSpPr/>
+      <p:sp>
+        <p:nvSpPr>
+          <p:cNvPr id="2" name="TextBox 1"/>
+          <p:cNvSpPr txBox="1"/>
+          <p:nvPr/>
+        </p:nvSpPr>
+        <p:spPr>
+          <a:xfrm>
+            <a:off x="502920" y="292608"/>
+            <a:ext cx="7772400" cy="502920"/>
+          </a:xfrm>
+          <a:prstGeom prst="rect">
+            <a:avLst/>
+          </a:prstGeom>
+          <a:noFill/>
+        </p:spPr>
+        <p:txBody>
+          <a:bodyPr wrap="none">
+            <a:spAutoFit/>
+          </a:bodyPr>
+          <a:lstStyle/>
+          <a:p>
+            <a:pPr>
+              <a:defRPr sz="3000" b="1">
+                <a:solidFill>
+                  <a:srgbClr val="0F172A"/>
+                </a:solidFill>
+                <a:latin typeface="Aptos"/>
+              </a:defRPr>
+            </a:pPr>
+            <a:r>
+              <a:t>总结：三层闭环</a:t>
+            </a:r>
+          </a:p>
+        </p:txBody>
+      </p:sp>
+      <p:sp>
+        <p:nvSpPr>
+          <p:cNvPr id="3" name="Rounded Rectangle 2"/>
+          <p:cNvSpPr/>
+          <p:nvPr/>
+        </p:nvSpPr>
+        <p:spPr>
+          <a:xfrm>
+            <a:off x="9326880" y="384048"/>
+            <a:ext cx="2240280" cy="310896"/>
+          </a:xfrm>
+          <a:prstGeom prst="roundRect">
+            <a:avLst/>
+          </a:prstGeom>
+          <a:solidFill>
+            <a:srgbClr val="CCFBF1"/>
+          </a:solidFill>
+          <a:ln>
+            <a:solidFill>
+              <a:srgbClr val="CCFBF1"/>
+            </a:solidFill>
+          </a:ln>
+        </p:spPr>
+        <p:style>
+          <a:lnRef idx="1">
+            <a:schemeClr val="accent1"/>
+          </a:lnRef>
+          <a:fillRef idx="3">
+            <a:schemeClr val="accent1"/>
+          </a:fillRef>
+          <a:effectRef idx="2">
+            <a:schemeClr val="accent1"/>
+          </a:effectRef>
+          <a:fontRef idx="minor">
+            <a:schemeClr val="lt1"/>
+          </a:fontRef>
+        </p:style>
+        <p:txBody>
+          <a:bodyPr rtlCol="0" anchor="ctr"/>
+          <a:lstStyle/>
+          <a:p>
+            <a:pPr algn="ctr">
+              <a:defRPr sz="1000" b="1">
+                <a:solidFill>
+                  <a:srgbClr val="0F766E"/>
+                </a:solidFill>
+                <a:latin typeface="Aptos"/>
+              </a:defRPr>
+            </a:pPr>
+            <a:r>
+              <a:t>总结</a:t>
+            </a:r>
+          </a:p>
+        </p:txBody>
+      </p:sp>
+      <p:sp>
+        <p:nvSpPr>
+          <p:cNvPr id="4" name="Rounded Rectangle 3"/>
+          <p:cNvSpPr/>
+          <p:nvPr/>
+        </p:nvSpPr>
+        <p:spPr>
+          <a:xfrm>
+            <a:off x="777240" y="1417320"/>
+            <a:ext cx="3246120" cy="2148840"/>
+          </a:xfrm>
+          <a:prstGeom prst="roundRect">
+            <a:avLst/>
+          </a:prstGeom>
+          <a:solidFill>
+            <a:srgbClr val="FFFFFF"/>
+          </a:solidFill>
+          <a:ln w="12700">
+            <a:solidFill>
+              <a:srgbClr val="94A3B8"/>
+            </a:solidFill>
+          </a:ln>
+        </p:spPr>
+        <p:style>
+          <a:lnRef idx="1">
+            <a:schemeClr val="accent1"/>
+          </a:lnRef>
+          <a:fillRef idx="3">
+            <a:schemeClr val="accent1"/>
+          </a:fillRef>
+          <a:effectRef idx="2">
+            <a:schemeClr val="accent1"/>
+          </a:effectRef>
+          <a:fontRef idx="minor">
+            <a:schemeClr val="lt1"/>
+          </a:fontRef>
+        </p:style>
+        <p:txBody>
+          <a:bodyPr rtlCol="0" anchor="ctr"/>
+          <a:lstStyle/>
+          <a:p>
+            <a:pPr algn="ctr"/>
+          </a:p>
+        </p:txBody>
+      </p:sp>
+      <p:sp>
+        <p:nvSpPr>
+          <p:cNvPr id="5" name="Rectangle 4"/>
+          <p:cNvSpPr/>
+          <p:nvPr/>
+        </p:nvSpPr>
+        <p:spPr>
+          <a:xfrm>
+            <a:off x="777240" y="1417320"/>
+            <a:ext cx="73152" cy="2148840"/>
+          </a:xfrm>
+          <a:prstGeom prst="rect">
+            <a:avLst/>
+          </a:prstGeom>
+          <a:solidFill>
+            <a:srgbClr val="0F766E"/>
+          </a:solidFill>
+          <a:ln>
+            <a:solidFill>
+              <a:srgbClr val="0F766E"/>
+            </a:solidFill>
+          </a:ln>
+        </p:spPr>
+        <p:style>
+          <a:lnRef idx="1">
+            <a:schemeClr val="accent1"/>
+          </a:lnRef>
+          <a:fillRef idx="3">
+            <a:schemeClr val="accent1"/>
+          </a:fillRef>
+          <a:effectRef idx="2">
+            <a:schemeClr val="accent1"/>
+          </a:effectRef>
+          <a:fontRef idx="minor">
+            <a:schemeClr val="lt1"/>
+          </a:fontRef>
+        </p:style>
+        <p:txBody>
+          <a:bodyPr rtlCol="0" anchor="ctr"/>
+          <a:lstStyle/>
+          <a:p>
+            <a:pPr algn="ctr"/>
+          </a:p>
+        </p:txBody>
+      </p:sp>
+      <p:sp>
+        <p:nvSpPr>
+          <p:cNvPr id="6" name="TextBox 5"/>
+          <p:cNvSpPr txBox="1"/>
+          <p:nvPr/>
+        </p:nvSpPr>
+        <p:spPr>
+          <a:xfrm>
+            <a:off x="978408" y="1581912"/>
+            <a:ext cx="2862072" cy="274320"/>
+          </a:xfrm>
+          <a:prstGeom prst="rect">
+            <a:avLst/>
+          </a:prstGeom>
+          <a:noFill/>
+        </p:spPr>
+        <p:txBody>
+          <a:bodyPr wrap="none">
+            <a:spAutoFit/>
+          </a:bodyPr>
+          <a:lstStyle/>
+          <a:p>
+            <a:pPr>
+              <a:defRPr sz="1600" b="1">
+                <a:solidFill>
+                  <a:srgbClr val="0F172A"/>
+                </a:solidFill>
+                <a:latin typeface="Aptos"/>
+              </a:defRPr>
+            </a:pPr>
+            <a:r>
+              <a:t>用户层</a:t>
+            </a:r>
+          </a:p>
+        </p:txBody>
+      </p:sp>
+      <p:sp>
+        <p:nvSpPr>
+          <p:cNvPr id="7" name="TextBox 6"/>
+          <p:cNvSpPr txBox="1"/>
+          <p:nvPr/>
+        </p:nvSpPr>
+        <p:spPr>
+          <a:xfrm>
+            <a:off x="978408" y="1947672"/>
+            <a:ext cx="2862072" cy="1463040"/>
+          </a:xfrm>
+          <a:prstGeom prst="rect">
+            <a:avLst/>
+          </a:prstGeom>
+          <a:noFill/>
+        </p:spPr>
+        <p:txBody>
+          <a:bodyPr wrap="square">
+            <a:spAutoFit/>
+          </a:bodyPr>
+          <a:lstStyle/>
+          <a:p>
+            <a:pPr>
+              <a:spcAft>
+                <a:spcPts val="500"/>
+              </a:spcAft>
+              <a:defRPr sz="1200">
+                <a:solidFill>
+                  <a:srgbClr val="475569"/>
+                </a:solidFill>
+                <a:latin typeface="Aptos"/>
+              </a:defRPr>
+            </a:pPr>
+            <a:r>
+              <a:t>只需使用 instanceId</a:t>
+            </a:r>
+          </a:p>
+          <a:p>
+            <a:pPr>
+              <a:spcAft>
+                <a:spcPts val="500"/>
+              </a:spcAft>
+              <a:defRPr sz="1200">
+                <a:solidFill>
+                  <a:srgbClr val="475569"/>
+                </a:solidFill>
+                <a:latin typeface="Aptos"/>
+              </a:defRPr>
+            </a:pPr>
+            <a:r>
+              <a:t>不理解 peerId 也能发消息</a:t>
+            </a:r>
+          </a:p>
+        </p:txBody>
+      </p:sp>
+      <p:sp>
+        <p:nvSpPr>
+          <p:cNvPr id="8" name="Rounded Rectangle 7"/>
+          <p:cNvSpPr/>
+          <p:nvPr/>
+        </p:nvSpPr>
+        <p:spPr>
+          <a:xfrm>
+            <a:off x="4480560" y="1417320"/>
+            <a:ext cx="3246120" cy="2148840"/>
+          </a:xfrm>
+          <a:prstGeom prst="roundRect">
+            <a:avLst/>
+          </a:prstGeom>
+          <a:solidFill>
+            <a:srgbClr val="FFFFFF"/>
+          </a:solidFill>
+          <a:ln w="12700">
+            <a:solidFill>
+              <a:srgbClr val="94A3B8"/>
+            </a:solidFill>
+          </a:ln>
+        </p:spPr>
+        <p:style>
+          <a:lnRef idx="1">
+            <a:schemeClr val="accent1"/>
+          </a:lnRef>
+          <a:fillRef idx="3">
+            <a:schemeClr val="accent1"/>
+          </a:fillRef>
+          <a:effectRef idx="2">
+            <a:schemeClr val="accent1"/>
+          </a:effectRef>
+          <a:fontRef idx="minor">
+            <a:schemeClr val="lt1"/>
+          </a:fontRef>
+        </p:style>
+        <p:txBody>
+          <a:bodyPr rtlCol="0" anchor="ctr"/>
+          <a:lstStyle/>
+          <a:p>
+            <a:pPr algn="ctr"/>
+          </a:p>
+        </p:txBody>
+      </p:sp>
+      <p:sp>
+        <p:nvSpPr>
+          <p:cNvPr id="9" name="Rectangle 8"/>
+          <p:cNvSpPr/>
+          <p:nvPr/>
+        </p:nvSpPr>
+        <p:spPr>
+          <a:xfrm>
+            <a:off x="4480560" y="1417320"/>
+            <a:ext cx="73152" cy="2148840"/>
+          </a:xfrm>
+          <a:prstGeom prst="rect">
+            <a:avLst/>
+          </a:prstGeom>
+          <a:solidFill>
+            <a:srgbClr val="0F766E"/>
+          </a:solidFill>
+          <a:ln>
+            <a:solidFill>
+              <a:srgbClr val="0F766E"/>
+            </a:solidFill>
+          </a:ln>
+        </p:spPr>
+        <p:style>
+          <a:lnRef idx="1">
+            <a:schemeClr val="accent1"/>
+          </a:lnRef>
+          <a:fillRef idx="3">
+            <a:schemeClr val="accent1"/>
+          </a:fillRef>
+          <a:effectRef idx="2">
+            <a:schemeClr val="accent1"/>
+          </a:effectRef>
+          <a:fontRef idx="minor">
+            <a:schemeClr val="lt1"/>
+          </a:fontRef>
+        </p:style>
+        <p:txBody>
+          <a:bodyPr rtlCol="0" anchor="ctr"/>
+          <a:lstStyle/>
+          <a:p>
+            <a:pPr algn="ctr"/>
+          </a:p>
+        </p:txBody>
+      </p:sp>
+      <p:sp>
+        <p:nvSpPr>
+          <p:cNvPr id="10" name="TextBox 9"/>
+          <p:cNvSpPr txBox="1"/>
+          <p:nvPr/>
+        </p:nvSpPr>
+        <p:spPr>
+          <a:xfrm>
+            <a:off x="4681728" y="1581912"/>
+            <a:ext cx="2862072" cy="274320"/>
+          </a:xfrm>
+          <a:prstGeom prst="rect">
+            <a:avLst/>
+          </a:prstGeom>
+          <a:noFill/>
+        </p:spPr>
+        <p:txBody>
+          <a:bodyPr wrap="none">
+            <a:spAutoFit/>
+          </a:bodyPr>
+          <a:lstStyle/>
+          <a:p>
+            <a:pPr>
+              <a:defRPr sz="1600" b="1">
+                <a:solidFill>
+                  <a:srgbClr val="0F172A"/>
+                </a:solidFill>
+                <a:latin typeface="Aptos"/>
+              </a:defRPr>
+            </a:pPr>
+            <a:r>
+              <a:t>Agent 层</a:t>
+            </a:r>
+          </a:p>
+        </p:txBody>
+      </p:sp>
+      <p:sp>
+        <p:nvSpPr>
+          <p:cNvPr id="11" name="TextBox 10"/>
+          <p:cNvSpPr txBox="1"/>
+          <p:nvPr/>
+        </p:nvSpPr>
+        <p:spPr>
+          <a:xfrm>
+            <a:off x="4681728" y="1947672"/>
+            <a:ext cx="2862072" cy="1463040"/>
+          </a:xfrm>
+          <a:prstGeom prst="rect">
+            <a:avLst/>
+          </a:prstGeom>
+          <a:noFill/>
+        </p:spPr>
+        <p:txBody>
+          <a:bodyPr wrap="square">
+            <a:spAutoFit/>
+          </a:bodyPr>
+          <a:lstStyle/>
+          <a:p>
+            <a:pPr>
+              <a:spcAft>
+                <a:spcPts val="500"/>
+              </a:spcAft>
+              <a:defRPr sz="1200">
+                <a:solidFill>
+                  <a:srgbClr val="475569"/>
+                </a:solidFill>
+                <a:latin typeface="Aptos"/>
+              </a:defRPr>
+            </a:pPr>
+            <a:r>
+              <a:t>主工具清晰</a:t>
+            </a:r>
+          </a:p>
+          <a:p>
+            <a:pPr>
+              <a:spcAft>
+                <a:spcPts val="500"/>
+              </a:spcAft>
+              <a:defRPr sz="1200">
+                <a:solidFill>
+                  <a:srgbClr val="475569"/>
+                </a:solidFill>
+                <a:latin typeface="Aptos"/>
+              </a:defRPr>
+            </a:pPr>
+            <a:r>
+              <a:t>p2p_send_instance_message</a:t>
+            </a:r>
+          </a:p>
+        </p:txBody>
+      </p:sp>
+      <p:sp>
+        <p:nvSpPr>
+          <p:cNvPr id="12" name="Rounded Rectangle 11"/>
+          <p:cNvSpPr/>
+          <p:nvPr/>
+        </p:nvSpPr>
+        <p:spPr>
+          <a:xfrm>
+            <a:off x="8183879" y="1417320"/>
+            <a:ext cx="3246120" cy="2148840"/>
+          </a:xfrm>
+          <a:prstGeom prst="roundRect">
+            <a:avLst/>
+          </a:prstGeom>
+          <a:solidFill>
+            <a:srgbClr val="FFFFFF"/>
+          </a:solidFill>
+          <a:ln w="12700">
+            <a:solidFill>
+              <a:srgbClr val="94A3B8"/>
+            </a:solidFill>
+          </a:ln>
+        </p:spPr>
+        <p:style>
+          <a:lnRef idx="1">
+            <a:schemeClr val="accent1"/>
+          </a:lnRef>
+          <a:fillRef idx="3">
+            <a:schemeClr val="accent1"/>
+          </a:fillRef>
+          <a:effectRef idx="2">
+            <a:schemeClr val="accent1"/>
+          </a:effectRef>
+          <a:fontRef idx="minor">
+            <a:schemeClr val="lt1"/>
+          </a:fontRef>
+        </p:style>
+        <p:txBody>
+          <a:bodyPr rtlCol="0" anchor="ctr"/>
+          <a:lstStyle/>
+          <a:p>
+            <a:pPr algn="ctr"/>
+          </a:p>
+        </p:txBody>
+      </p:sp>
+      <p:sp>
+        <p:nvSpPr>
+          <p:cNvPr id="13" name="Rectangle 12"/>
+          <p:cNvSpPr/>
+          <p:nvPr/>
+        </p:nvSpPr>
+        <p:spPr>
+          <a:xfrm>
+            <a:off x="8183879" y="1417320"/>
+            <a:ext cx="73152" cy="2148840"/>
+          </a:xfrm>
+          <a:prstGeom prst="rect">
+            <a:avLst/>
+          </a:prstGeom>
+          <a:solidFill>
+            <a:srgbClr val="16A34A"/>
+          </a:solidFill>
+          <a:ln>
+            <a:solidFill>
+              <a:srgbClr val="16A34A"/>
+            </a:solidFill>
+          </a:ln>
+        </p:spPr>
+        <p:style>
+          <a:lnRef idx="1">
+            <a:schemeClr val="accent1"/>
+          </a:lnRef>
+          <a:fillRef idx="3">
+            <a:schemeClr val="accent1"/>
+          </a:fillRef>
+          <a:effectRef idx="2">
+            <a:schemeClr val="accent1"/>
+          </a:effectRef>
+          <a:fontRef idx="minor">
+            <a:schemeClr val="lt1"/>
+          </a:fontRef>
+        </p:style>
+        <p:txBody>
+          <a:bodyPr rtlCol="0" anchor="ctr"/>
+          <a:lstStyle/>
+          <a:p>
+            <a:pPr algn="ctr"/>
+          </a:p>
+        </p:txBody>
+      </p:sp>
+      <p:sp>
+        <p:nvSpPr>
+          <p:cNvPr id="14" name="TextBox 13"/>
+          <p:cNvSpPr txBox="1"/>
+          <p:nvPr/>
+        </p:nvSpPr>
+        <p:spPr>
+          <a:xfrm>
+            <a:off x="8385048" y="1581912"/>
+            <a:ext cx="2862072" cy="274320"/>
+          </a:xfrm>
+          <a:prstGeom prst="rect">
+            <a:avLst/>
+          </a:prstGeom>
+          <a:noFill/>
+        </p:spPr>
+        <p:txBody>
+          <a:bodyPr wrap="none">
+            <a:spAutoFit/>
+          </a:bodyPr>
+          <a:lstStyle/>
+          <a:p>
+            <a:pPr>
+              <a:defRPr sz="1600" b="1">
+                <a:solidFill>
+                  <a:srgbClr val="0F172A"/>
+                </a:solidFill>
+                <a:latin typeface="Aptos"/>
+              </a:defRPr>
+            </a:pPr>
+            <a:r>
+              <a:t>网络层</a:t>
+            </a:r>
+          </a:p>
+        </p:txBody>
+      </p:sp>
+      <p:sp>
+        <p:nvSpPr>
+          <p:cNvPr id="15" name="TextBox 14"/>
+          <p:cNvSpPr txBox="1"/>
+          <p:nvPr/>
+        </p:nvSpPr>
+        <p:spPr>
+          <a:xfrm>
+            <a:off x="8385048" y="1947672"/>
+            <a:ext cx="2862072" cy="1463040"/>
+          </a:xfrm>
+          <a:prstGeom prst="rect">
+            <a:avLst/>
+          </a:prstGeom>
+          <a:noFill/>
+        </p:spPr>
+        <p:txBody>
+          <a:bodyPr wrap="square">
+            <a:spAutoFit/>
+          </a:bodyPr>
+          <a:lstStyle/>
+          <a:p>
+            <a:pPr>
+              <a:spcAft>
+                <a:spcPts val="500"/>
+              </a:spcAft>
+              <a:defRPr sz="1200">
+                <a:solidFill>
+                  <a:srgbClr val="475569"/>
+                </a:solidFill>
+                <a:latin typeface="Aptos"/>
+              </a:defRPr>
+            </a:pPr>
+            <a:r>
+              <a:t>自动路由公告</a:t>
+            </a:r>
+          </a:p>
+          <a:p>
+            <a:pPr>
+              <a:spcAft>
+                <a:spcPts val="500"/>
+              </a:spcAft>
+              <a:defRPr sz="1200">
+                <a:solidFill>
+                  <a:srgbClr val="475569"/>
+                </a:solidFill>
+                <a:latin typeface="Aptos"/>
+              </a:defRPr>
+            </a:pPr>
+            <a:r>
+              <a:t>结构化消息 + ACK</a:t>
+            </a:r>
+          </a:p>
+        </p:txBody>
+      </p:sp>
+      <p:sp>
+        <p:nvSpPr>
+          <p:cNvPr id="16" name="TextBox 15"/>
+          <p:cNvSpPr txBox="1"/>
+          <p:nvPr/>
+        </p:nvSpPr>
+        <p:spPr>
+          <a:xfrm>
+            <a:off x="960120" y="4572000"/>
+            <a:ext cx="9875520" cy="731520"/>
+          </a:xfrm>
+          <a:prstGeom prst="rect">
+            <a:avLst/>
+          </a:prstGeom>
+          <a:noFill/>
+        </p:spPr>
+        <p:txBody>
+          <a:bodyPr wrap="none">
+            <a:spAutoFit/>
+          </a:bodyPr>
+          <a:lstStyle/>
+          <a:p>
+            <a:pPr>
+              <a:spcAft>
+                <a:spcPts val="800"/>
+              </a:spcAft>
+              <a:defRPr sz="1800">
+                <a:solidFill>
+                  <a:srgbClr val="0F172A"/>
+                </a:solidFill>
+                <a:latin typeface="Aptos"/>
+              </a:defRPr>
+            </a:pPr>
+            <a:r>
+              <a:t>后续方向：联系人别名、路由过期清理、受控自动回复、跨 NAT 可视化诊断。</a:t>
+            </a:r>
+          </a:p>
+        </p:txBody>
+      </p:sp>
+      <p:sp>
+        <p:nvSpPr>
+          <p:cNvPr id="17" name="TextBox 16"/>
+          <p:cNvSpPr txBox="1"/>
+          <p:nvPr/>
+        </p:nvSpPr>
+        <p:spPr>
+          <a:xfrm>
+            <a:off x="502920" y="6473952"/>
+            <a:ext cx="7315200" cy="228600"/>
+          </a:xfrm>
+          <a:prstGeom prst="rect">
+            <a:avLst/>
+          </a:prstGeom>
+          <a:noFill/>
+        </p:spPr>
+        <p:txBody>
+          <a:bodyPr wrap="none">
+            <a:spAutoFit/>
+          </a:bodyPr>
+          <a:lstStyle/>
+          <a:p>
+            <a:pPr>
+              <a:defRPr sz="900">
+                <a:solidFill>
+                  <a:srgbClr val="475569"/>
+                </a:solidFill>
+                <a:latin typeface="Aptos"/>
+              </a:defRPr>
+            </a:pPr>
+            <a:r>
+              <a:t>总结 / 12</a:t>
+            </a:r>
+          </a:p>
+        </p:txBody>
+      </p:sp>
+    </p:spTree>
+  </p:cSld>
+  <p:clrMapOvr>
+    <a:masterClrMapping/>
+  </p:clrMapOvr>
+</p:sld>
+</file>
+
+<file path=ppt/slides/slide2.xml><?xml version="1.0" encoding="utf-8"?>
+<p:sld xmlns:a="http://schemas.openxmlformats.org/drawingml/2006/main" xmlns:p="http://schemas.openxmlformats.org/presentationml/2006/main" xmlns:r="http://schemas.openxmlformats.org/officeDocument/2006/relationships">
+  <p:cSld>
+    <p:bg>
+      <p:bgPr>
+        <a:solidFill>
+          <a:srgbClr val="F8FAFC"/>
+        </a:solidFill>
+        <a:effectLst/>
+      </p:bgPr>
+    </p:bg>
+    <p:spTree>
+      <p:nvGrpSpPr>
+        <p:cNvPr id="1" name=""/>
+        <p:cNvGrpSpPr/>
+        <p:nvPr/>
+      </p:nvGrpSpPr>
+      <p:grpSpPr/>
+      <p:sp>
+        <p:nvSpPr>
+          <p:cNvPr id="2" name="TextBox 1"/>
+          <p:cNvSpPr txBox="1"/>
+          <p:nvPr/>
+        </p:nvSpPr>
+        <p:spPr>
+          <a:xfrm>
+            <a:off x="502920" y="292608"/>
+            <a:ext cx="7772400" cy="502920"/>
+          </a:xfrm>
+          <a:prstGeom prst="rect">
+            <a:avLst/>
+          </a:prstGeom>
+          <a:noFill/>
+        </p:spPr>
+        <p:txBody>
+          <a:bodyPr wrap="none">
+            <a:spAutoFit/>
+          </a:bodyPr>
+          <a:lstStyle/>
+          <a:p>
+            <a:pPr>
+              <a:defRPr sz="3000" b="1">
+                <a:solidFill>
+                  <a:srgbClr val="0F172A"/>
+                </a:solidFill>
+                <a:latin typeface="Aptos"/>
+              </a:defRPr>
+            </a:pPr>
+            <a:r>
+              <a:t>背景与目标：从 peerId 调试到 instanceId 通信</a:t>
+            </a:r>
+          </a:p>
+        </p:txBody>
+      </p:sp>
+      <p:sp>
+        <p:nvSpPr>
+          <p:cNvPr id="3" name="Rounded Rectangle 2"/>
+          <p:cNvSpPr/>
+          <p:nvPr/>
+        </p:nvSpPr>
+        <p:spPr>
+          <a:xfrm>
+            <a:off x="9326880" y="384048"/>
+            <a:ext cx="2240280" cy="310896"/>
+          </a:xfrm>
+          <a:prstGeom prst="roundRect">
+            <a:avLst/>
+          </a:prstGeom>
+          <a:solidFill>
+            <a:srgbClr val="CCFBF1"/>
+          </a:solidFill>
+          <a:ln>
+            <a:solidFill>
+              <a:srgbClr val="CCFBF1"/>
+            </a:solidFill>
+          </a:ln>
+        </p:spPr>
+        <p:style>
+          <a:lnRef idx="1">
+            <a:schemeClr val="accent1"/>
+          </a:lnRef>
+          <a:fillRef idx="3">
+            <a:schemeClr val="accent1"/>
+          </a:fillRef>
+          <a:effectRef idx="2">
+            <a:schemeClr val="accent1"/>
+          </a:effectRef>
+          <a:fontRef idx="minor">
+            <a:schemeClr val="lt1"/>
+          </a:fontRef>
+        </p:style>
+        <p:txBody>
+          <a:bodyPr rtlCol="0" anchor="ctr"/>
+          <a:lstStyle/>
+          <a:p>
+            <a:pPr algn="ctr">
+              <a:defRPr sz="1000" b="1">
+                <a:solidFill>
+                  <a:srgbClr val="0F766E"/>
+                </a:solidFill>
+                <a:latin typeface="Aptos"/>
+              </a:defRPr>
+            </a:pPr>
+            <a:r>
+              <a:t>背景</a:t>
+            </a:r>
+          </a:p>
+        </p:txBody>
+      </p:sp>
+      <p:sp>
+        <p:nvSpPr>
+          <p:cNvPr id="4" name="TextBox 3"/>
+          <p:cNvSpPr txBox="1"/>
+          <p:nvPr/>
+        </p:nvSpPr>
+        <p:spPr>
+          <a:xfrm>
+            <a:off x="777240" y="1325880"/>
+            <a:ext cx="6766560" cy="4389120"/>
+          </a:xfrm>
+          <a:prstGeom prst="rect">
+            <a:avLst/>
+          </a:prstGeom>
+          <a:noFill/>
+        </p:spPr>
+        <p:txBody>
+          <a:bodyPr wrap="none">
+            <a:spAutoFit/>
+          </a:bodyPr>
+          <a:lstStyle/>
+          <a:p>
+            <a:pPr>
+              <a:spcAft>
+                <a:spcPts val="800"/>
+              </a:spcAft>
+              <a:defRPr sz="1900">
+                <a:solidFill>
+                  <a:srgbClr val="0F172A"/>
+                </a:solidFill>
+                <a:latin typeface="Aptos"/>
+              </a:defRPr>
+            </a:pPr>
+            <a:r>
+              <a:t>peerId 是 libp2p 网络层身份，不适合作为用户操作入口。</a:t>
+            </a:r>
+          </a:p>
+          <a:p>
+            <a:pPr>
+              <a:spcAft>
+                <a:spcPts val="800"/>
+              </a:spcAft>
+              <a:defRPr sz="1900">
+                <a:solidFill>
+                  <a:srgbClr val="0F172A"/>
+                </a:solidFill>
+                <a:latin typeface="Aptos"/>
+              </a:defRPr>
+            </a:pPr>
+            <a:r>
+              <a:t>instanceId 是 OpenClaw 实例身份，更贴近用户和设备。</a:t>
+            </a:r>
+          </a:p>
+          <a:p>
+            <a:pPr>
+              <a:spcAft>
+                <a:spcPts val="800"/>
+              </a:spcAft>
+              <a:defRPr sz="1900">
+                <a:solidFill>
+                  <a:srgbClr val="0F172A"/>
+                </a:solidFill>
+                <a:latin typeface="Aptos"/>
+              </a:defRPr>
+            </a:pPr>
+            <a:r>
+              <a:t>目标链路：用户指令 -&gt; Agent 工具 -&gt; P2P 网络 -&gt; 远端用户可见。</a:t>
+            </a:r>
+          </a:p>
+        </p:txBody>
+      </p:sp>
+      <p:sp>
+        <p:nvSpPr>
+          <p:cNvPr id="5" name="TextBox 4"/>
+          <p:cNvSpPr txBox="1"/>
+          <p:nvPr/>
+        </p:nvSpPr>
+        <p:spPr>
+          <a:xfrm>
+            <a:off x="502920" y="6473952"/>
+            <a:ext cx="7315200" cy="228600"/>
+          </a:xfrm>
+          <a:prstGeom prst="rect">
+            <a:avLst/>
+          </a:prstGeom>
+          <a:noFill/>
+        </p:spPr>
+        <p:txBody>
+          <a:bodyPr wrap="none">
+            <a:spAutoFit/>
+          </a:bodyPr>
+          <a:lstStyle/>
+          <a:p>
+            <a:pPr>
+              <a:defRPr sz="900">
+                <a:solidFill>
+                  <a:srgbClr val="475569"/>
+                </a:solidFill>
+                <a:latin typeface="Aptos"/>
+              </a:defRPr>
+            </a:pPr>
+            <a:r>
+              <a:t>背景 / 02</a:t>
+            </a:r>
+          </a:p>
+        </p:txBody>
+      </p:sp>
+      <p:sp>
+        <p:nvSpPr>
+          <p:cNvPr id="6" name="Rounded Rectangle 5"/>
+          <p:cNvSpPr/>
+          <p:nvPr/>
+        </p:nvSpPr>
+        <p:spPr>
+          <a:xfrm>
+            <a:off x="8001000" y="1417320"/>
+            <a:ext cx="1737360" cy="1143000"/>
+          </a:xfrm>
+          <a:prstGeom prst="roundRect">
+            <a:avLst/>
+          </a:prstGeom>
+          <a:solidFill>
+            <a:srgbClr val="FFFFFF"/>
+          </a:solidFill>
+          <a:ln w="12700">
+            <a:solidFill>
+              <a:srgbClr val="94A3B8"/>
+            </a:solidFill>
+          </a:ln>
+        </p:spPr>
+        <p:style>
+          <a:lnRef idx="1">
+            <a:schemeClr val="accent1"/>
+          </a:lnRef>
+          <a:fillRef idx="3">
+            <a:schemeClr val="accent1"/>
+          </a:fillRef>
+          <a:effectRef idx="2">
+            <a:schemeClr val="accent1"/>
+          </a:effectRef>
+          <a:fontRef idx="minor">
+            <a:schemeClr val="lt1"/>
+          </a:fontRef>
+        </p:style>
+        <p:txBody>
+          <a:bodyPr rtlCol="0" anchor="ctr"/>
+          <a:lstStyle/>
+          <a:p>
+            <a:pPr algn="ctr"/>
+          </a:p>
+        </p:txBody>
+      </p:sp>
+      <p:sp>
+        <p:nvSpPr>
+          <p:cNvPr id="7" name="Rectangle 6"/>
+          <p:cNvSpPr/>
+          <p:nvPr/>
+        </p:nvSpPr>
+        <p:spPr>
+          <a:xfrm>
+            <a:off x="8001000" y="1417320"/>
+            <a:ext cx="73152" cy="1143000"/>
+          </a:xfrm>
+          <a:prstGeom prst="rect">
+            <a:avLst/>
+          </a:prstGeom>
+          <a:solidFill>
+            <a:srgbClr val="D97706"/>
+          </a:solidFill>
+          <a:ln>
+            <a:solidFill>
+              <a:srgbClr val="D97706"/>
+            </a:solidFill>
+          </a:ln>
+        </p:spPr>
+        <p:style>
+          <a:lnRef idx="1">
+            <a:schemeClr val="accent1"/>
+          </a:lnRef>
+          <a:fillRef idx="3">
+            <a:schemeClr val="accent1"/>
+          </a:fillRef>
+          <a:effectRef idx="2">
+            <a:schemeClr val="accent1"/>
+          </a:effectRef>
+          <a:fontRef idx="minor">
+            <a:schemeClr val="lt1"/>
+          </a:fontRef>
+        </p:style>
+        <p:txBody>
+          <a:bodyPr rtlCol="0" anchor="ctr"/>
+          <a:lstStyle/>
+          <a:p>
+            <a:pPr algn="ctr"/>
+          </a:p>
+        </p:txBody>
+      </p:sp>
+      <p:sp>
+        <p:nvSpPr>
+          <p:cNvPr id="8" name="TextBox 7"/>
+          <p:cNvSpPr txBox="1"/>
+          <p:nvPr/>
+        </p:nvSpPr>
+        <p:spPr>
+          <a:xfrm>
+            <a:off x="8202168" y="1581912"/>
+            <a:ext cx="1353312" cy="274320"/>
+          </a:xfrm>
+          <a:prstGeom prst="rect">
+            <a:avLst/>
+          </a:prstGeom>
+          <a:noFill/>
+        </p:spPr>
+        <p:txBody>
+          <a:bodyPr wrap="none">
+            <a:spAutoFit/>
+          </a:bodyPr>
+          <a:lstStyle/>
+          <a:p>
+            <a:pPr>
+              <a:defRPr sz="1600" b="1">
+                <a:solidFill>
+                  <a:srgbClr val="0F172A"/>
+                </a:solidFill>
+                <a:latin typeface="Aptos"/>
+              </a:defRPr>
+            </a:pPr>
+            <a:r>
+              <a:t>旧方式</a:t>
+            </a:r>
+          </a:p>
+        </p:txBody>
+      </p:sp>
+      <p:sp>
+        <p:nvSpPr>
+          <p:cNvPr id="9" name="TextBox 8"/>
+          <p:cNvSpPr txBox="1"/>
+          <p:nvPr/>
+        </p:nvSpPr>
+        <p:spPr>
+          <a:xfrm>
+            <a:off x="8202168" y="1947672"/>
+            <a:ext cx="1353312" cy="457200"/>
+          </a:xfrm>
+          <a:prstGeom prst="rect">
+            <a:avLst/>
+          </a:prstGeom>
+          <a:noFill/>
+        </p:spPr>
+        <p:txBody>
+          <a:bodyPr wrap="square">
+            <a:spAutoFit/>
+          </a:bodyPr>
+          <a:lstStyle/>
+          <a:p>
+            <a:pPr>
+              <a:spcAft>
+                <a:spcPts val="500"/>
+              </a:spcAft>
+              <a:defRPr sz="1200">
+                <a:solidFill>
+                  <a:srgbClr val="475569"/>
+                </a:solidFill>
+                <a:latin typeface="Aptos"/>
+              </a:defRPr>
+            </a:pPr>
+            <a:r>
+              <a:t>peerId 直发</a:t>
+            </a:r>
+          </a:p>
+          <a:p>
+            <a:pPr>
+              <a:spcAft>
+                <a:spcPts val="500"/>
+              </a:spcAft>
+              <a:defRPr sz="1200">
+                <a:solidFill>
+                  <a:srgbClr val="475569"/>
+                </a:solidFill>
+                <a:latin typeface="Aptos"/>
+              </a:defRPr>
+            </a:pPr>
+            <a:r>
+              <a:t>偏调试</a:t>
+            </a:r>
+          </a:p>
+        </p:txBody>
+      </p:sp>
+      <p:sp>
+        <p:nvSpPr>
+          <p:cNvPr id="10" name="Rounded Rectangle 9"/>
+          <p:cNvSpPr/>
+          <p:nvPr/>
+        </p:nvSpPr>
+        <p:spPr>
+          <a:xfrm>
+            <a:off x="9829800" y="1417320"/>
+            <a:ext cx="1737360" cy="1143000"/>
+          </a:xfrm>
+          <a:prstGeom prst="roundRect">
+            <a:avLst/>
+          </a:prstGeom>
+          <a:solidFill>
+            <a:srgbClr val="FFFFFF"/>
+          </a:solidFill>
+          <a:ln w="12700">
+            <a:solidFill>
+              <a:srgbClr val="94A3B8"/>
+            </a:solidFill>
+          </a:ln>
+        </p:spPr>
+        <p:style>
+          <a:lnRef idx="1">
+            <a:schemeClr val="accent1"/>
+          </a:lnRef>
+          <a:fillRef idx="3">
+            <a:schemeClr val="accent1"/>
+          </a:fillRef>
+          <a:effectRef idx="2">
+            <a:schemeClr val="accent1"/>
+          </a:effectRef>
+          <a:fontRef idx="minor">
+            <a:schemeClr val="lt1"/>
+          </a:fontRef>
+        </p:style>
+        <p:txBody>
+          <a:bodyPr rtlCol="0" anchor="ctr"/>
+          <a:lstStyle/>
+          <a:p>
+            <a:pPr algn="ctr"/>
+          </a:p>
+        </p:txBody>
+      </p:sp>
+      <p:sp>
+        <p:nvSpPr>
+          <p:cNvPr id="11" name="Rectangle 10"/>
+          <p:cNvSpPr/>
+          <p:nvPr/>
+        </p:nvSpPr>
+        <p:spPr>
+          <a:xfrm>
+            <a:off x="9829800" y="1417320"/>
+            <a:ext cx="73152" cy="1143000"/>
+          </a:xfrm>
+          <a:prstGeom prst="rect">
+            <a:avLst/>
+          </a:prstGeom>
+          <a:solidFill>
+            <a:srgbClr val="16A34A"/>
+          </a:solidFill>
+          <a:ln>
+            <a:solidFill>
+              <a:srgbClr val="16A34A"/>
+            </a:solidFill>
+          </a:ln>
+        </p:spPr>
+        <p:style>
+          <a:lnRef idx="1">
+            <a:schemeClr val="accent1"/>
+          </a:lnRef>
+          <a:fillRef idx="3">
+            <a:schemeClr val="accent1"/>
+          </a:fillRef>
+          <a:effectRef idx="2">
+            <a:schemeClr val="accent1"/>
+          </a:effectRef>
+          <a:fontRef idx="minor">
+            <a:schemeClr val="lt1"/>
+          </a:fontRef>
+        </p:style>
+        <p:txBody>
+          <a:bodyPr rtlCol="0" anchor="ctr"/>
+          <a:lstStyle/>
+          <a:p>
+            <a:pPr algn="ctr"/>
+          </a:p>
+        </p:txBody>
+      </p:sp>
+      <p:sp>
+        <p:nvSpPr>
+          <p:cNvPr id="12" name="TextBox 11"/>
+          <p:cNvSpPr txBox="1"/>
+          <p:nvPr/>
+        </p:nvSpPr>
+        <p:spPr>
+          <a:xfrm>
+            <a:off x="10030968" y="1581912"/>
+            <a:ext cx="1353312" cy="274320"/>
+          </a:xfrm>
+          <a:prstGeom prst="rect">
+            <a:avLst/>
+          </a:prstGeom>
+          <a:noFill/>
+        </p:spPr>
+        <p:txBody>
+          <a:bodyPr wrap="none">
+            <a:spAutoFit/>
+          </a:bodyPr>
+          <a:lstStyle/>
+          <a:p>
+            <a:pPr>
+              <a:defRPr sz="1600" b="1">
+                <a:solidFill>
+                  <a:srgbClr val="0F172A"/>
+                </a:solidFill>
+                <a:latin typeface="Aptos"/>
+              </a:defRPr>
+            </a:pPr>
+            <a:r>
+              <a:t>新方式</a:t>
+            </a:r>
+          </a:p>
+        </p:txBody>
+      </p:sp>
+      <p:sp>
+        <p:nvSpPr>
+          <p:cNvPr id="13" name="TextBox 12"/>
+          <p:cNvSpPr txBox="1"/>
+          <p:nvPr/>
+        </p:nvSpPr>
+        <p:spPr>
+          <a:xfrm>
+            <a:off x="10030968" y="1947672"/>
+            <a:ext cx="1353312" cy="457200"/>
+          </a:xfrm>
+          <a:prstGeom prst="rect">
+            <a:avLst/>
+          </a:prstGeom>
+          <a:noFill/>
+        </p:spPr>
+        <p:txBody>
+          <a:bodyPr wrap="square">
+            <a:spAutoFit/>
+          </a:bodyPr>
+          <a:lstStyle/>
+          <a:p>
+            <a:pPr>
+              <a:spcAft>
+                <a:spcPts val="500"/>
+              </a:spcAft>
+              <a:defRPr sz="1200">
+                <a:solidFill>
+                  <a:srgbClr val="475569"/>
+                </a:solidFill>
+                <a:latin typeface="Aptos"/>
+              </a:defRPr>
+            </a:pPr>
+            <a:r>
+              <a:t>instanceId 发信</a:t>
+            </a:r>
+          </a:p>
+          <a:p>
+            <a:pPr>
+              <a:spcAft>
+                <a:spcPts val="500"/>
+              </a:spcAft>
+              <a:defRPr sz="1200">
+                <a:solidFill>
+                  <a:srgbClr val="475569"/>
+                </a:solidFill>
+                <a:latin typeface="Aptos"/>
+              </a:defRPr>
+            </a:pPr>
+            <a:r>
+              <a:t>面向用户</a:t>
+            </a:r>
+          </a:p>
+        </p:txBody>
+      </p:sp>
+    </p:spTree>
+  </p:cSld>
+  <p:clrMapOvr>
+    <a:masterClrMapping/>
+  </p:clrMapOvr>
+</p:sld>
+</file>
+
+<file path=ppt/slides/slide3.xml><?xml version="1.0" encoding="utf-8"?>
+<p:sld xmlns:a="http://schemas.openxmlformats.org/drawingml/2006/main" xmlns:p="http://schemas.openxmlformats.org/presentationml/2006/main" xmlns:r="http://schemas.openxmlformats.org/officeDocument/2006/relationships">
+  <p:cSld>
+    <p:bg>
+      <p:bgPr>
+        <a:solidFill>
+          <a:srgbClr val="F8FAFC"/>
+        </a:solidFill>
+        <a:effectLst/>
+      </p:bgPr>
+    </p:bg>
+    <p:spTree>
+      <p:nvGrpSpPr>
+        <p:cNvPr id="1" name=""/>
+        <p:cNvGrpSpPr/>
+        <p:nvPr/>
+      </p:nvGrpSpPr>
+      <p:grpSpPr/>
+      <p:sp>
+        <p:nvSpPr>
+          <p:cNvPr id="2" name="TextBox 1"/>
+          <p:cNvSpPr txBox="1"/>
+          <p:nvPr/>
+        </p:nvSpPr>
+        <p:spPr>
+          <a:xfrm>
+            <a:off x="502920" y="292608"/>
+            <a:ext cx="7772400" cy="502920"/>
+          </a:xfrm>
+          <a:prstGeom prst="rect">
+            <a:avLst/>
+          </a:prstGeom>
+          <a:noFill/>
+        </p:spPr>
+        <p:txBody>
+          <a:bodyPr wrap="none">
+            <a:spAutoFit/>
+          </a:bodyPr>
+          <a:lstStyle/>
+          <a:p>
+            <a:pPr>
+              <a:defRPr sz="3000" b="1">
+                <a:solidFill>
+                  <a:srgbClr val="0F172A"/>
+                </a:solidFill>
+                <a:latin typeface="Aptos"/>
+              </a:defRPr>
+            </a:pPr>
+            <a:r>
+              <a:t>总体链路：用户 A 的一句话如何到达用户 B</a:t>
+            </a:r>
+          </a:p>
+        </p:txBody>
+      </p:sp>
+      <p:sp>
+        <p:nvSpPr>
+          <p:cNvPr id="3" name="Rounded Rectangle 2"/>
+          <p:cNvSpPr/>
+          <p:nvPr/>
+        </p:nvSpPr>
+        <p:spPr>
+          <a:xfrm>
+            <a:off x="9326880" y="384048"/>
+            <a:ext cx="2240280" cy="310896"/>
+          </a:xfrm>
+          <a:prstGeom prst="roundRect">
+            <a:avLst/>
+          </a:prstGeom>
+          <a:solidFill>
+            <a:srgbClr val="CCFBF1"/>
+          </a:solidFill>
+          <a:ln>
+            <a:solidFill>
+              <a:srgbClr val="CCFBF1"/>
+            </a:solidFill>
+          </a:ln>
+        </p:spPr>
+        <p:style>
+          <a:lnRef idx="1">
+            <a:schemeClr val="accent1"/>
+          </a:lnRef>
+          <a:fillRef idx="3">
+            <a:schemeClr val="accent1"/>
+          </a:fillRef>
+          <a:effectRef idx="2">
+            <a:schemeClr val="accent1"/>
+          </a:effectRef>
+          <a:fontRef idx="minor">
+            <a:schemeClr val="lt1"/>
+          </a:fontRef>
+        </p:style>
+        <p:txBody>
+          <a:bodyPr rtlCol="0" anchor="ctr"/>
+          <a:lstStyle/>
+          <a:p>
+            <a:pPr algn="ctr">
+              <a:defRPr sz="1000" b="1">
+                <a:solidFill>
+                  <a:srgbClr val="0F766E"/>
+                </a:solidFill>
+                <a:latin typeface="Aptos"/>
+              </a:defRPr>
+            </a:pPr>
+            <a:r>
+              <a:t>链路</a:t>
+            </a:r>
+          </a:p>
+        </p:txBody>
+      </p:sp>
+      <p:sp>
+        <p:nvSpPr>
+          <p:cNvPr id="4" name="Rounded Rectangle 3"/>
+          <p:cNvSpPr/>
+          <p:nvPr/>
+        </p:nvSpPr>
+        <p:spPr>
+          <a:xfrm>
+            <a:off x="411480" y="1874519"/>
+            <a:ext cx="1234440" cy="960120"/>
+          </a:xfrm>
+          <a:prstGeom prst="roundRect">
+            <a:avLst/>
+          </a:prstGeom>
+          <a:solidFill>
+            <a:srgbClr val="FFFFFF"/>
+          </a:solidFill>
+          <a:ln w="12700">
+            <a:solidFill>
+              <a:srgbClr val="94A3B8"/>
+            </a:solidFill>
+          </a:ln>
+        </p:spPr>
+        <p:style>
+          <a:lnRef idx="1">
+            <a:schemeClr val="accent1"/>
+          </a:lnRef>
+          <a:fillRef idx="3">
+            <a:schemeClr val="accent1"/>
+          </a:fillRef>
+          <a:effectRef idx="2">
+            <a:schemeClr val="accent1"/>
+          </a:effectRef>
+          <a:fontRef idx="minor">
+            <a:schemeClr val="lt1"/>
+          </a:fontRef>
+        </p:style>
+        <p:txBody>
+          <a:bodyPr rtlCol="0" anchor="ctr"/>
+          <a:lstStyle/>
+          <a:p>
+            <a:pPr algn="ctr"/>
+          </a:p>
+        </p:txBody>
+      </p:sp>
+      <p:sp>
+        <p:nvSpPr>
+          <p:cNvPr id="5" name="Rectangle 4"/>
+          <p:cNvSpPr/>
+          <p:nvPr/>
+        </p:nvSpPr>
+        <p:spPr>
+          <a:xfrm>
+            <a:off x="411480" y="1874519"/>
+            <a:ext cx="73152" cy="960120"/>
+          </a:xfrm>
+          <a:prstGeom prst="rect">
+            <a:avLst/>
+          </a:prstGeom>
+          <a:solidFill>
+            <a:srgbClr val="0F766E"/>
+          </a:solidFill>
+          <a:ln>
+            <a:solidFill>
+              <a:srgbClr val="0F766E"/>
+            </a:solidFill>
+          </a:ln>
+        </p:spPr>
+        <p:style>
+          <a:lnRef idx="1">
+            <a:schemeClr val="accent1"/>
+          </a:lnRef>
+          <a:fillRef idx="3">
+            <a:schemeClr val="accent1"/>
+          </a:fillRef>
+          <a:effectRef idx="2">
+            <a:schemeClr val="accent1"/>
+          </a:effectRef>
+          <a:fontRef idx="minor">
+            <a:schemeClr val="lt1"/>
+          </a:fontRef>
+        </p:style>
+        <p:txBody>
+          <a:bodyPr rtlCol="0" anchor="ctr"/>
+          <a:lstStyle/>
+          <a:p>
+            <a:pPr algn="ctr"/>
+          </a:p>
+        </p:txBody>
+      </p:sp>
+      <p:sp>
+        <p:nvSpPr>
+          <p:cNvPr id="6" name="TextBox 5"/>
+          <p:cNvSpPr txBox="1"/>
+          <p:nvPr/>
+        </p:nvSpPr>
+        <p:spPr>
+          <a:xfrm>
+            <a:off x="612648" y="2039112"/>
+            <a:ext cx="850392" cy="274320"/>
+          </a:xfrm>
+          <a:prstGeom prst="rect">
+            <a:avLst/>
+          </a:prstGeom>
+          <a:noFill/>
+        </p:spPr>
+        <p:txBody>
+          <a:bodyPr wrap="none">
+            <a:spAutoFit/>
+          </a:bodyPr>
+          <a:lstStyle/>
+          <a:p>
+            <a:pPr>
+              <a:defRPr sz="1600" b="1">
+                <a:solidFill>
+                  <a:srgbClr val="0F172A"/>
+                </a:solidFill>
+                <a:latin typeface="Aptos"/>
+              </a:defRPr>
+            </a:pPr>
+            <a:r>
+              <a:t>用户 A 飞书</a:t>
+            </a:r>
+          </a:p>
+        </p:txBody>
+      </p:sp>
+      <p:sp>
+        <p:nvSpPr>
+          <p:cNvPr id="7" name="TextBox 6"/>
+          <p:cNvSpPr txBox="1"/>
+          <p:nvPr/>
+        </p:nvSpPr>
+        <p:spPr>
+          <a:xfrm>
+            <a:off x="612648" y="2404872"/>
+            <a:ext cx="850392" cy="274320"/>
+          </a:xfrm>
+          <a:prstGeom prst="rect">
+            <a:avLst/>
+          </a:prstGeom>
+          <a:noFill/>
+        </p:spPr>
+        <p:txBody>
+          <a:bodyPr wrap="square">
+            <a:spAutoFit/>
+          </a:bodyPr>
+          <a:lstStyle/>
+          <a:p>
+            <a:pPr>
+              <a:spcAft>
+                <a:spcPts val="500"/>
+              </a:spcAft>
+              <a:defRPr sz="1200">
+                <a:solidFill>
+                  <a:srgbClr val="475569"/>
+                </a:solidFill>
+                <a:latin typeface="Aptos"/>
+              </a:defRPr>
+            </a:pPr>
+            <a:r>
+              <a:t>指令</a:t>
+            </a:r>
+          </a:p>
+        </p:txBody>
+      </p:sp>
+      <p:cxnSp>
+        <p:nvCxnSpPr>
+          <p:cNvPr id="8" name="Connector 7"/>
+          <p:cNvCxnSpPr/>
+          <p:nvPr/>
+        </p:nvCxnSpPr>
+        <p:spPr>
+          <a:xfrm>
+            <a:off x="1673351" y="2359152"/>
+            <a:ext cx="292609" cy="0"/>
+          </a:xfrm>
+          <a:prstGeom prst="line">
+            <a:avLst/>
+          </a:prstGeom>
+          <a:ln w="25400">
+            <a:solidFill>
+              <a:srgbClr val="94A3B8"/>
+            </a:solidFill>
+          </a:ln>
+        </p:spPr>
+        <p:style>
+          <a:lnRef idx="2">
+            <a:schemeClr val="accent1"/>
+          </a:lnRef>
+          <a:fillRef idx="0">
+            <a:schemeClr val="accent1"/>
+          </a:fillRef>
+          <a:effectRef idx="1">
+            <a:schemeClr val="accent1"/>
+          </a:effectRef>
+          <a:fontRef idx="minor">
+            <a:schemeClr val="tx1"/>
+          </a:fontRef>
+        </p:style>
+      </p:cxnSp>
+      <p:sp>
+        <p:nvSpPr>
+          <p:cNvPr id="9" name="Rounded Rectangle 8"/>
+          <p:cNvSpPr/>
+          <p:nvPr/>
+        </p:nvSpPr>
+        <p:spPr>
+          <a:xfrm>
+            <a:off x="2039112" y="1874519"/>
+            <a:ext cx="1234440" cy="960120"/>
+          </a:xfrm>
+          <a:prstGeom prst="roundRect">
+            <a:avLst/>
+          </a:prstGeom>
+          <a:solidFill>
+            <a:srgbClr val="FFFFFF"/>
+          </a:solidFill>
+          <a:ln w="12700">
+            <a:solidFill>
+              <a:srgbClr val="94A3B8"/>
+            </a:solidFill>
+          </a:ln>
+        </p:spPr>
+        <p:style>
+          <a:lnRef idx="1">
+            <a:schemeClr val="accent1"/>
+          </a:lnRef>
+          <a:fillRef idx="3">
+            <a:schemeClr val="accent1"/>
+          </a:fillRef>
+          <a:effectRef idx="2">
+            <a:schemeClr val="accent1"/>
+          </a:effectRef>
+          <a:fontRef idx="minor">
+            <a:schemeClr val="lt1"/>
+          </a:fontRef>
+        </p:style>
+        <p:txBody>
+          <a:bodyPr rtlCol="0" anchor="ctr"/>
+          <a:lstStyle/>
+          <a:p>
+            <a:pPr algn="ctr"/>
+          </a:p>
+        </p:txBody>
+      </p:sp>
+      <p:sp>
+        <p:nvSpPr>
+          <p:cNvPr id="10" name="Rectangle 9"/>
+          <p:cNvSpPr/>
+          <p:nvPr/>
+        </p:nvSpPr>
+        <p:spPr>
+          <a:xfrm>
+            <a:off x="2039112" y="1874519"/>
+            <a:ext cx="73152" cy="960120"/>
+          </a:xfrm>
+          <a:prstGeom prst="rect">
+            <a:avLst/>
+          </a:prstGeom>
+          <a:solidFill>
+            <a:srgbClr val="0F766E"/>
+          </a:solidFill>
+          <a:ln>
+            <a:solidFill>
+              <a:srgbClr val="0F766E"/>
+            </a:solidFill>
+          </a:ln>
+        </p:spPr>
+        <p:style>
+          <a:lnRef idx="1">
+            <a:schemeClr val="accent1"/>
+          </a:lnRef>
+          <a:fillRef idx="3">
+            <a:schemeClr val="accent1"/>
+          </a:fillRef>
+          <a:effectRef idx="2">
+            <a:schemeClr val="accent1"/>
+          </a:effectRef>
+          <a:fontRef idx="minor">
+            <a:schemeClr val="lt1"/>
+          </a:fontRef>
+        </p:style>
+        <p:txBody>
+          <a:bodyPr rtlCol="0" anchor="ctr"/>
+          <a:lstStyle/>
+          <a:p>
+            <a:pPr algn="ctr"/>
+          </a:p>
+        </p:txBody>
+      </p:sp>
+      <p:sp>
+        <p:nvSpPr>
+          <p:cNvPr id="11" name="TextBox 10"/>
+          <p:cNvSpPr txBox="1"/>
+          <p:nvPr/>
+        </p:nvSpPr>
+        <p:spPr>
+          <a:xfrm>
+            <a:off x="2240280" y="2039112"/>
+            <a:ext cx="850392" cy="274320"/>
+          </a:xfrm>
+          <a:prstGeom prst="rect">
+            <a:avLst/>
+          </a:prstGeom>
+          <a:noFill/>
+        </p:spPr>
+        <p:txBody>
+          <a:bodyPr wrap="none">
+            <a:spAutoFit/>
+          </a:bodyPr>
+          <a:lstStyle/>
+          <a:p>
+            <a:pPr>
+              <a:defRPr sz="1600" b="1">
+                <a:solidFill>
+                  <a:srgbClr val="0F172A"/>
+                </a:solidFill>
+                <a:latin typeface="Aptos"/>
+              </a:defRPr>
+            </a:pPr>
+            <a:r>
+              <a:t>Agent</a:t>
+            </a:r>
+          </a:p>
+        </p:txBody>
+      </p:sp>
+      <p:sp>
+        <p:nvSpPr>
+          <p:cNvPr id="12" name="TextBox 11"/>
+          <p:cNvSpPr txBox="1"/>
+          <p:nvPr/>
+        </p:nvSpPr>
+        <p:spPr>
+          <a:xfrm>
+            <a:off x="2240280" y="2404872"/>
+            <a:ext cx="850392" cy="274320"/>
+          </a:xfrm>
+          <a:prstGeom prst="rect">
+            <a:avLst/>
+          </a:prstGeom>
+          <a:noFill/>
+        </p:spPr>
+        <p:txBody>
+          <a:bodyPr wrap="square">
+            <a:spAutoFit/>
+          </a:bodyPr>
+          <a:lstStyle/>
+          <a:p>
+            <a:pPr>
+              <a:spcAft>
+                <a:spcPts val="500"/>
+              </a:spcAft>
+              <a:defRPr sz="1200">
+                <a:solidFill>
+                  <a:srgbClr val="475569"/>
+                </a:solidFill>
+                <a:latin typeface="Aptos"/>
+              </a:defRPr>
+            </a:pPr>
+            <a:r>
+              <a:t>选工具</a:t>
+            </a:r>
+          </a:p>
+        </p:txBody>
+      </p:sp>
+      <p:cxnSp>
+        <p:nvCxnSpPr>
+          <p:cNvPr id="13" name="Connector 12"/>
+          <p:cNvCxnSpPr/>
+          <p:nvPr/>
+        </p:nvCxnSpPr>
+        <p:spPr>
+          <a:xfrm>
+            <a:off x="3300984" y="2359152"/>
+            <a:ext cx="292607" cy="0"/>
+          </a:xfrm>
+          <a:prstGeom prst="line">
+            <a:avLst/>
+          </a:prstGeom>
+          <a:ln w="25400">
+            <a:solidFill>
+              <a:srgbClr val="94A3B8"/>
+            </a:solidFill>
+          </a:ln>
+        </p:spPr>
+        <p:style>
+          <a:lnRef idx="2">
+            <a:schemeClr val="accent1"/>
+          </a:lnRef>
+          <a:fillRef idx="0">
+            <a:schemeClr val="accent1"/>
+          </a:fillRef>
+          <a:effectRef idx="1">
+            <a:schemeClr val="accent1"/>
+          </a:effectRef>
+          <a:fontRef idx="minor">
+            <a:schemeClr val="tx1"/>
+          </a:fontRef>
+        </p:style>
+      </p:cxnSp>
+      <p:sp>
+        <p:nvSpPr>
+          <p:cNvPr id="14" name="Rounded Rectangle 13"/>
+          <p:cNvSpPr/>
+          <p:nvPr/>
+        </p:nvSpPr>
+        <p:spPr>
+          <a:xfrm>
+            <a:off x="3666744" y="1874519"/>
+            <a:ext cx="1234440" cy="960120"/>
+          </a:xfrm>
+          <a:prstGeom prst="roundRect">
+            <a:avLst/>
+          </a:prstGeom>
+          <a:solidFill>
+            <a:srgbClr val="FFFFFF"/>
+          </a:solidFill>
+          <a:ln w="12700">
+            <a:solidFill>
+              <a:srgbClr val="94A3B8"/>
+            </a:solidFill>
+          </a:ln>
+        </p:spPr>
+        <p:style>
+          <a:lnRef idx="1">
+            <a:schemeClr val="accent1"/>
+          </a:lnRef>
+          <a:fillRef idx="3">
+            <a:schemeClr val="accent1"/>
+          </a:fillRef>
+          <a:effectRef idx="2">
+            <a:schemeClr val="accent1"/>
+          </a:effectRef>
+          <a:fontRef idx="minor">
+            <a:schemeClr val="lt1"/>
+          </a:fontRef>
+        </p:style>
+        <p:txBody>
+          <a:bodyPr rtlCol="0" anchor="ctr"/>
+          <a:lstStyle/>
+          <a:p>
+            <a:pPr algn="ctr"/>
+          </a:p>
+        </p:txBody>
+      </p:sp>
+      <p:sp>
+        <p:nvSpPr>
+          <p:cNvPr id="15" name="Rectangle 14"/>
+          <p:cNvSpPr/>
+          <p:nvPr/>
+        </p:nvSpPr>
+        <p:spPr>
+          <a:xfrm>
+            <a:off x="3666744" y="1874519"/>
+            <a:ext cx="73152" cy="960120"/>
+          </a:xfrm>
+          <a:prstGeom prst="rect">
+            <a:avLst/>
+          </a:prstGeom>
+          <a:solidFill>
+            <a:srgbClr val="0F766E"/>
+          </a:solidFill>
+          <a:ln>
+            <a:solidFill>
+              <a:srgbClr val="0F766E"/>
+            </a:solidFill>
+          </a:ln>
+        </p:spPr>
+        <p:style>
+          <a:lnRef idx="1">
+            <a:schemeClr val="accent1"/>
+          </a:lnRef>
+          <a:fillRef idx="3">
+            <a:schemeClr val="accent1"/>
+          </a:fillRef>
+          <a:effectRef idx="2">
+            <a:schemeClr val="accent1"/>
+          </a:effectRef>
+          <a:fontRef idx="minor">
+            <a:schemeClr val="lt1"/>
+          </a:fontRef>
+        </p:style>
+        <p:txBody>
+          <a:bodyPr rtlCol="0" anchor="ctr"/>
+          <a:lstStyle/>
+          <a:p>
+            <a:pPr algn="ctr"/>
+          </a:p>
+        </p:txBody>
+      </p:sp>
+      <p:sp>
+        <p:nvSpPr>
+          <p:cNvPr id="16" name="TextBox 15"/>
+          <p:cNvSpPr txBox="1"/>
+          <p:nvPr/>
+        </p:nvSpPr>
+        <p:spPr>
+          <a:xfrm>
+            <a:off x="3867911" y="2039112"/>
+            <a:ext cx="850392" cy="274320"/>
+          </a:xfrm>
+          <a:prstGeom prst="rect">
+            <a:avLst/>
+          </a:prstGeom>
+          <a:noFill/>
+        </p:spPr>
+        <p:txBody>
+          <a:bodyPr wrap="none">
+            <a:spAutoFit/>
+          </a:bodyPr>
+          <a:lstStyle/>
+          <a:p>
+            <a:pPr>
+              <a:defRPr sz="1600" b="1">
+                <a:solidFill>
+                  <a:srgbClr val="0F172A"/>
+                </a:solidFill>
+                <a:latin typeface="Aptos"/>
+              </a:defRPr>
+            </a:pPr>
+            <a:r>
+              <a:t>InstanceRouter</a:t>
+            </a:r>
+          </a:p>
+        </p:txBody>
+      </p:sp>
+      <p:sp>
+        <p:nvSpPr>
+          <p:cNvPr id="17" name="TextBox 16"/>
+          <p:cNvSpPr txBox="1"/>
+          <p:nvPr/>
+        </p:nvSpPr>
+        <p:spPr>
+          <a:xfrm>
+            <a:off x="3867911" y="2404872"/>
+            <a:ext cx="850392" cy="274320"/>
+          </a:xfrm>
+          <a:prstGeom prst="rect">
+            <a:avLst/>
+          </a:prstGeom>
+          <a:noFill/>
+        </p:spPr>
+        <p:txBody>
+          <a:bodyPr wrap="square">
+            <a:spAutoFit/>
+          </a:bodyPr>
+          <a:lstStyle/>
+          <a:p>
+            <a:pPr>
+              <a:spcAft>
+                <a:spcPts val="500"/>
+              </a:spcAft>
+              <a:defRPr sz="1200">
+                <a:solidFill>
+                  <a:srgbClr val="475569"/>
+                </a:solidFill>
+                <a:latin typeface="Aptos"/>
+              </a:defRPr>
+            </a:pPr>
+            <a:r>
+              <a:t>查路由</a:t>
+            </a:r>
+          </a:p>
+        </p:txBody>
+      </p:sp>
+      <p:cxnSp>
+        <p:nvCxnSpPr>
+          <p:cNvPr id="18" name="Connector 17"/>
+          <p:cNvCxnSpPr/>
+          <p:nvPr/>
+        </p:nvCxnSpPr>
+        <p:spPr>
+          <a:xfrm>
+            <a:off x="4928616" y="2359152"/>
+            <a:ext cx="292608" cy="0"/>
+          </a:xfrm>
+          <a:prstGeom prst="line">
+            <a:avLst/>
+          </a:prstGeom>
+          <a:ln w="25400">
+            <a:solidFill>
+              <a:srgbClr val="94A3B8"/>
+            </a:solidFill>
+          </a:ln>
+        </p:spPr>
+        <p:style>
+          <a:lnRef idx="2">
+            <a:schemeClr val="accent1"/>
+          </a:lnRef>
+          <a:fillRef idx="0">
+            <a:schemeClr val="accent1"/>
+          </a:fillRef>
+          <a:effectRef idx="1">
+            <a:schemeClr val="accent1"/>
+          </a:effectRef>
+          <a:fontRef idx="minor">
+            <a:schemeClr val="tx1"/>
+          </a:fontRef>
+        </p:style>
+      </p:cxnSp>
+      <p:sp>
+        <p:nvSpPr>
+          <p:cNvPr id="19" name="Rounded Rectangle 18"/>
+          <p:cNvSpPr/>
+          <p:nvPr/>
+        </p:nvSpPr>
+        <p:spPr>
+          <a:xfrm>
+            <a:off x="5294376" y="1874519"/>
+            <a:ext cx="1234440" cy="960120"/>
+          </a:xfrm>
+          <a:prstGeom prst="roundRect">
+            <a:avLst/>
+          </a:prstGeom>
+          <a:solidFill>
+            <a:srgbClr val="FFFFFF"/>
+          </a:solidFill>
+          <a:ln w="12700">
+            <a:solidFill>
+              <a:srgbClr val="94A3B8"/>
+            </a:solidFill>
+          </a:ln>
+        </p:spPr>
+        <p:style>
+          <a:lnRef idx="1">
+            <a:schemeClr val="accent1"/>
+          </a:lnRef>
+          <a:fillRef idx="3">
+            <a:schemeClr val="accent1"/>
+          </a:fillRef>
+          <a:effectRef idx="2">
+            <a:schemeClr val="accent1"/>
+          </a:effectRef>
+          <a:fontRef idx="minor">
+            <a:schemeClr val="lt1"/>
+          </a:fontRef>
+        </p:style>
+        <p:txBody>
+          <a:bodyPr rtlCol="0" anchor="ctr"/>
+          <a:lstStyle/>
+          <a:p>
+            <a:pPr algn="ctr"/>
+          </a:p>
+        </p:txBody>
+      </p:sp>
+      <p:sp>
+        <p:nvSpPr>
+          <p:cNvPr id="20" name="Rectangle 19"/>
+          <p:cNvSpPr/>
+          <p:nvPr/>
+        </p:nvSpPr>
+        <p:spPr>
+          <a:xfrm>
+            <a:off x="5294376" y="1874519"/>
+            <a:ext cx="73152" cy="960120"/>
+          </a:xfrm>
+          <a:prstGeom prst="rect">
+            <a:avLst/>
+          </a:prstGeom>
+          <a:solidFill>
+            <a:srgbClr val="0F766E"/>
+          </a:solidFill>
+          <a:ln>
+            <a:solidFill>
+              <a:srgbClr val="0F766E"/>
+            </a:solidFill>
+          </a:ln>
+        </p:spPr>
+        <p:style>
+          <a:lnRef idx="1">
+            <a:schemeClr val="accent1"/>
+          </a:lnRef>
+          <a:fillRef idx="3">
+            <a:schemeClr val="accent1"/>
+          </a:fillRef>
+          <a:effectRef idx="2">
+            <a:schemeClr val="accent1"/>
+          </a:effectRef>
+          <a:fontRef idx="minor">
+            <a:schemeClr val="lt1"/>
+          </a:fontRef>
+        </p:style>
+        <p:txBody>
+          <a:bodyPr rtlCol="0" anchor="ctr"/>
+          <a:lstStyle/>
+          <a:p>
+            <a:pPr algn="ctr"/>
+          </a:p>
+        </p:txBody>
+      </p:sp>
+      <p:sp>
+        <p:nvSpPr>
+          <p:cNvPr id="21" name="TextBox 20"/>
+          <p:cNvSpPr txBox="1"/>
+          <p:nvPr/>
+        </p:nvSpPr>
+        <p:spPr>
+          <a:xfrm>
+            <a:off x="5495544" y="2039112"/>
+            <a:ext cx="850392" cy="274320"/>
+          </a:xfrm>
+          <a:prstGeom prst="rect">
+            <a:avLst/>
+          </a:prstGeom>
+          <a:noFill/>
+        </p:spPr>
+        <p:txBody>
+          <a:bodyPr wrap="none">
+            <a:spAutoFit/>
+          </a:bodyPr>
+          <a:lstStyle/>
+          <a:p>
+            <a:pPr>
+              <a:defRPr sz="1600" b="1">
+                <a:solidFill>
+                  <a:srgbClr val="0F172A"/>
+                </a:solidFill>
+                <a:latin typeface="Aptos"/>
+              </a:defRPr>
+            </a:pPr>
+            <a:r>
+              <a:t>libp2p</a:t>
+            </a:r>
+          </a:p>
+        </p:txBody>
+      </p:sp>
+      <p:sp>
+        <p:nvSpPr>
+          <p:cNvPr id="22" name="TextBox 21"/>
+          <p:cNvSpPr txBox="1"/>
+          <p:nvPr/>
+        </p:nvSpPr>
+        <p:spPr>
+          <a:xfrm>
+            <a:off x="5495544" y="2404872"/>
+            <a:ext cx="850392" cy="274320"/>
+          </a:xfrm>
+          <a:prstGeom prst="rect">
+            <a:avLst/>
+          </a:prstGeom>
+          <a:noFill/>
+        </p:spPr>
+        <p:txBody>
+          <a:bodyPr wrap="square">
+            <a:spAutoFit/>
+          </a:bodyPr>
+          <a:lstStyle/>
+          <a:p>
+            <a:pPr>
+              <a:spcAft>
+                <a:spcPts val="500"/>
+              </a:spcAft>
+              <a:defRPr sz="1200">
+                <a:solidFill>
+                  <a:srgbClr val="475569"/>
+                </a:solidFill>
+                <a:latin typeface="Aptos"/>
+              </a:defRPr>
+            </a:pPr>
+            <a:r>
+              <a:t>user-message</a:t>
+            </a:r>
+          </a:p>
+        </p:txBody>
+      </p:sp>
+      <p:cxnSp>
+        <p:nvCxnSpPr>
+          <p:cNvPr id="23" name="Connector 22"/>
+          <p:cNvCxnSpPr/>
+          <p:nvPr/>
+        </p:nvCxnSpPr>
+        <p:spPr>
+          <a:xfrm>
+            <a:off x="6556248" y="2359152"/>
+            <a:ext cx="292608" cy="0"/>
+          </a:xfrm>
+          <a:prstGeom prst="line">
+            <a:avLst/>
+          </a:prstGeom>
+          <a:ln w="25400">
+            <a:solidFill>
+              <a:srgbClr val="94A3B8"/>
+            </a:solidFill>
+          </a:ln>
+        </p:spPr>
+        <p:style>
+          <a:lnRef idx="2">
+            <a:schemeClr val="accent1"/>
+          </a:lnRef>
+          <a:fillRef idx="0">
+            <a:schemeClr val="accent1"/>
+          </a:fillRef>
+          <a:effectRef idx="1">
+            <a:schemeClr val="accent1"/>
+          </a:effectRef>
+          <a:fontRef idx="minor">
+            <a:schemeClr val="tx1"/>
+          </a:fontRef>
+        </p:style>
+      </p:cxnSp>
+      <p:sp>
+        <p:nvSpPr>
+          <p:cNvPr id="24" name="Rounded Rectangle 23"/>
+          <p:cNvSpPr/>
+          <p:nvPr/>
+        </p:nvSpPr>
+        <p:spPr>
+          <a:xfrm>
+            <a:off x="6922008" y="1874519"/>
+            <a:ext cx="1234440" cy="960120"/>
+          </a:xfrm>
+          <a:prstGeom prst="roundRect">
+            <a:avLst/>
+          </a:prstGeom>
+          <a:solidFill>
+            <a:srgbClr val="FFFFFF"/>
+          </a:solidFill>
+          <a:ln w="12700">
+            <a:solidFill>
+              <a:srgbClr val="94A3B8"/>
+            </a:solidFill>
+          </a:ln>
+        </p:spPr>
+        <p:style>
+          <a:lnRef idx="1">
+            <a:schemeClr val="accent1"/>
+          </a:lnRef>
+          <a:fillRef idx="3">
+            <a:schemeClr val="accent1"/>
+          </a:fillRef>
+          <a:effectRef idx="2">
+            <a:schemeClr val="accent1"/>
+          </a:effectRef>
+          <a:fontRef idx="minor">
+            <a:schemeClr val="lt1"/>
+          </a:fontRef>
+        </p:style>
+        <p:txBody>
+          <a:bodyPr rtlCol="0" anchor="ctr"/>
+          <a:lstStyle/>
+          <a:p>
+            <a:pPr algn="ctr"/>
+          </a:p>
+        </p:txBody>
+      </p:sp>
+      <p:sp>
+        <p:nvSpPr>
+          <p:cNvPr id="25" name="Rectangle 24"/>
+          <p:cNvSpPr/>
+          <p:nvPr/>
+        </p:nvSpPr>
+        <p:spPr>
+          <a:xfrm>
+            <a:off x="6922008" y="1874519"/>
+            <a:ext cx="73152" cy="960120"/>
+          </a:xfrm>
+          <a:prstGeom prst="rect">
+            <a:avLst/>
+          </a:prstGeom>
+          <a:solidFill>
+            <a:srgbClr val="0F766E"/>
+          </a:solidFill>
+          <a:ln>
+            <a:solidFill>
+              <a:srgbClr val="0F766E"/>
+            </a:solidFill>
+          </a:ln>
+        </p:spPr>
+        <p:style>
+          <a:lnRef idx="1">
+            <a:schemeClr val="accent1"/>
+          </a:lnRef>
+          <a:fillRef idx="3">
+            <a:schemeClr val="accent1"/>
+          </a:fillRef>
+          <a:effectRef idx="2">
+            <a:schemeClr val="accent1"/>
+          </a:effectRef>
+          <a:fontRef idx="minor">
+            <a:schemeClr val="lt1"/>
+          </a:fontRef>
+        </p:style>
+        <p:txBody>
+          <a:bodyPr rtlCol="0" anchor="ctr"/>
+          <a:lstStyle/>
+          <a:p>
+            <a:pPr algn="ctr"/>
+          </a:p>
+        </p:txBody>
+      </p:sp>
+      <p:sp>
+        <p:nvSpPr>
+          <p:cNvPr id="26" name="TextBox 25"/>
+          <p:cNvSpPr txBox="1"/>
+          <p:nvPr/>
+        </p:nvSpPr>
+        <p:spPr>
+          <a:xfrm>
+            <a:off x="7123176" y="2039112"/>
+            <a:ext cx="850392" cy="274320"/>
+          </a:xfrm>
+          <a:prstGeom prst="rect">
+            <a:avLst/>
+          </a:prstGeom>
+          <a:noFill/>
+        </p:spPr>
+        <p:txBody>
+          <a:bodyPr wrap="none">
+            <a:spAutoFit/>
+          </a:bodyPr>
+          <a:lstStyle/>
+          <a:p>
+            <a:pPr>
+              <a:defRPr sz="1600" b="1">
+                <a:solidFill>
+                  <a:srgbClr val="0F172A"/>
+                </a:solidFill>
+                <a:latin typeface="Aptos"/>
+              </a:defRPr>
+            </a:pPr>
+            <a:r>
+              <a:t>远端 Router</a:t>
+            </a:r>
+          </a:p>
+        </p:txBody>
+      </p:sp>
+      <p:sp>
+        <p:nvSpPr>
+          <p:cNvPr id="27" name="TextBox 26"/>
+          <p:cNvSpPr txBox="1"/>
+          <p:nvPr/>
+        </p:nvSpPr>
+        <p:spPr>
+          <a:xfrm>
+            <a:off x="7123176" y="2404872"/>
+            <a:ext cx="850392" cy="274320"/>
+          </a:xfrm>
+          <a:prstGeom prst="rect">
+            <a:avLst/>
+          </a:prstGeom>
+          <a:noFill/>
+        </p:spPr>
+        <p:txBody>
+          <a:bodyPr wrap="square">
+            <a:spAutoFit/>
+          </a:bodyPr>
+          <a:lstStyle/>
+          <a:p>
+            <a:pPr>
+              <a:spcAft>
+                <a:spcPts val="500"/>
+              </a:spcAft>
+              <a:defRPr sz="1200">
+                <a:solidFill>
+                  <a:srgbClr val="475569"/>
+                </a:solidFill>
+                <a:latin typeface="Aptos"/>
+              </a:defRPr>
+            </a:pPr>
+            <a:r>
+              <a:t>入站处理</a:t>
+            </a:r>
+          </a:p>
+        </p:txBody>
+      </p:sp>
+      <p:cxnSp>
+        <p:nvCxnSpPr>
+          <p:cNvPr id="28" name="Connector 27"/>
+          <p:cNvCxnSpPr/>
+          <p:nvPr/>
+        </p:nvCxnSpPr>
+        <p:spPr>
+          <a:xfrm>
+            <a:off x="8183879" y="2359152"/>
+            <a:ext cx="292609" cy="0"/>
+          </a:xfrm>
+          <a:prstGeom prst="line">
+            <a:avLst/>
+          </a:prstGeom>
+          <a:ln w="25400">
+            <a:solidFill>
+              <a:srgbClr val="94A3B8"/>
+            </a:solidFill>
+          </a:ln>
+        </p:spPr>
+        <p:style>
+          <a:lnRef idx="2">
+            <a:schemeClr val="accent1"/>
+          </a:lnRef>
+          <a:fillRef idx="0">
+            <a:schemeClr val="accent1"/>
+          </a:fillRef>
+          <a:effectRef idx="1">
+            <a:schemeClr val="accent1"/>
+          </a:effectRef>
+          <a:fontRef idx="minor">
+            <a:schemeClr val="tx1"/>
+          </a:fontRef>
+        </p:style>
+      </p:cxnSp>
+      <p:sp>
+        <p:nvSpPr>
+          <p:cNvPr id="29" name="Rounded Rectangle 28"/>
+          <p:cNvSpPr/>
+          <p:nvPr/>
+        </p:nvSpPr>
+        <p:spPr>
+          <a:xfrm>
+            <a:off x="8549640" y="1874519"/>
+            <a:ext cx="1234440" cy="960120"/>
+          </a:xfrm>
+          <a:prstGeom prst="roundRect">
+            <a:avLst/>
+          </a:prstGeom>
+          <a:solidFill>
+            <a:srgbClr val="FFFFFF"/>
+          </a:solidFill>
+          <a:ln w="12700">
+            <a:solidFill>
+              <a:srgbClr val="94A3B8"/>
+            </a:solidFill>
+          </a:ln>
+        </p:spPr>
+        <p:style>
+          <a:lnRef idx="1">
+            <a:schemeClr val="accent1"/>
+          </a:lnRef>
+          <a:fillRef idx="3">
+            <a:schemeClr val="accent1"/>
+          </a:fillRef>
+          <a:effectRef idx="2">
+            <a:schemeClr val="accent1"/>
+          </a:effectRef>
+          <a:fontRef idx="minor">
+            <a:schemeClr val="lt1"/>
+          </a:fontRef>
+        </p:style>
+        <p:txBody>
+          <a:bodyPr rtlCol="0" anchor="ctr"/>
+          <a:lstStyle/>
+          <a:p>
+            <a:pPr algn="ctr"/>
+          </a:p>
+        </p:txBody>
+      </p:sp>
+      <p:sp>
+        <p:nvSpPr>
+          <p:cNvPr id="30" name="Rectangle 29"/>
+          <p:cNvSpPr/>
+          <p:nvPr/>
+        </p:nvSpPr>
+        <p:spPr>
+          <a:xfrm>
+            <a:off x="8549640" y="1874519"/>
+            <a:ext cx="73152" cy="960120"/>
+          </a:xfrm>
+          <a:prstGeom prst="rect">
+            <a:avLst/>
+          </a:prstGeom>
+          <a:solidFill>
+            <a:srgbClr val="0F766E"/>
+          </a:solidFill>
+          <a:ln>
+            <a:solidFill>
+              <a:srgbClr val="0F766E"/>
+            </a:solidFill>
+          </a:ln>
+        </p:spPr>
+        <p:style>
+          <a:lnRef idx="1">
+            <a:schemeClr val="accent1"/>
+          </a:lnRef>
+          <a:fillRef idx="3">
+            <a:schemeClr val="accent1"/>
+          </a:fillRef>
+          <a:effectRef idx="2">
+            <a:schemeClr val="accent1"/>
+          </a:effectRef>
+          <a:fontRef idx="minor">
+            <a:schemeClr val="lt1"/>
+          </a:fontRef>
+        </p:style>
+        <p:txBody>
+          <a:bodyPr rtlCol="0" anchor="ctr"/>
+          <a:lstStyle/>
+          <a:p>
+            <a:pPr algn="ctr"/>
+          </a:p>
+        </p:txBody>
+      </p:sp>
+      <p:sp>
+        <p:nvSpPr>
+          <p:cNvPr id="31" name="TextBox 30"/>
+          <p:cNvSpPr txBox="1"/>
+          <p:nvPr/>
+        </p:nvSpPr>
+        <p:spPr>
+          <a:xfrm>
+            <a:off x="8750808" y="2039112"/>
+            <a:ext cx="850392" cy="274320"/>
+          </a:xfrm>
+          <a:prstGeom prst="rect">
+            <a:avLst/>
+          </a:prstGeom>
+          <a:noFill/>
+        </p:spPr>
+        <p:txBody>
+          <a:bodyPr wrap="none">
+            <a:spAutoFit/>
+          </a:bodyPr>
+          <a:lstStyle/>
+          <a:p>
+            <a:pPr>
+              <a:defRPr sz="1600" b="1">
+                <a:solidFill>
+                  <a:srgbClr val="0F172A"/>
+                </a:solidFill>
+                <a:latin typeface="Aptos"/>
+              </a:defRPr>
+            </a:pPr>
+            <a:r>
+              <a:t>Feishu</a:t>
+            </a:r>
+          </a:p>
+        </p:txBody>
+      </p:sp>
+      <p:sp>
+        <p:nvSpPr>
+          <p:cNvPr id="32" name="TextBox 31"/>
+          <p:cNvSpPr txBox="1"/>
+          <p:nvPr/>
+        </p:nvSpPr>
+        <p:spPr>
+          <a:xfrm>
+            <a:off x="8750808" y="2404872"/>
+            <a:ext cx="850392" cy="274320"/>
+          </a:xfrm>
+          <a:prstGeom prst="rect">
+            <a:avLst/>
+          </a:prstGeom>
+          <a:noFill/>
+        </p:spPr>
+        <p:txBody>
+          <a:bodyPr wrap="square">
+            <a:spAutoFit/>
+          </a:bodyPr>
+          <a:lstStyle/>
+          <a:p>
+            <a:pPr>
+              <a:spcAft>
+                <a:spcPts val="500"/>
+              </a:spcAft>
+              <a:defRPr sz="1200">
+                <a:solidFill>
+                  <a:srgbClr val="475569"/>
+                </a:solidFill>
+                <a:latin typeface="Aptos"/>
+              </a:defRPr>
+            </a:pPr>
+            <a:r>
+              <a:t>sendText</a:t>
+            </a:r>
+          </a:p>
+        </p:txBody>
+      </p:sp>
+      <p:cxnSp>
+        <p:nvCxnSpPr>
+          <p:cNvPr id="33" name="Connector 32"/>
+          <p:cNvCxnSpPr/>
+          <p:nvPr/>
+        </p:nvCxnSpPr>
+        <p:spPr>
+          <a:xfrm>
+            <a:off x="9811512" y="2359152"/>
+            <a:ext cx="292607" cy="0"/>
+          </a:xfrm>
+          <a:prstGeom prst="line">
+            <a:avLst/>
+          </a:prstGeom>
+          <a:ln w="25400">
+            <a:solidFill>
+              <a:srgbClr val="94A3B8"/>
+            </a:solidFill>
+          </a:ln>
+        </p:spPr>
+        <p:style>
+          <a:lnRef idx="2">
+            <a:schemeClr val="accent1"/>
+          </a:lnRef>
+          <a:fillRef idx="0">
+            <a:schemeClr val="accent1"/>
+          </a:fillRef>
+          <a:effectRef idx="1">
+            <a:schemeClr val="accent1"/>
+          </a:effectRef>
+          <a:fontRef idx="minor">
+            <a:schemeClr val="tx1"/>
+          </a:fontRef>
+        </p:style>
+      </p:cxnSp>
+      <p:sp>
+        <p:nvSpPr>
+          <p:cNvPr id="34" name="Rounded Rectangle 33"/>
+          <p:cNvSpPr/>
+          <p:nvPr/>
+        </p:nvSpPr>
+        <p:spPr>
+          <a:xfrm>
+            <a:off x="10177272" y="1874519"/>
+            <a:ext cx="1234440" cy="960120"/>
+          </a:xfrm>
+          <a:prstGeom prst="roundRect">
+            <a:avLst/>
+          </a:prstGeom>
+          <a:solidFill>
+            <a:srgbClr val="FFFFFF"/>
+          </a:solidFill>
+          <a:ln w="12700">
+            <a:solidFill>
+              <a:srgbClr val="94A3B8"/>
+            </a:solidFill>
+          </a:ln>
+        </p:spPr>
+        <p:style>
+          <a:lnRef idx="1">
+            <a:schemeClr val="accent1"/>
+          </a:lnRef>
+          <a:fillRef idx="3">
+            <a:schemeClr val="accent1"/>
+          </a:fillRef>
+          <a:effectRef idx="2">
+            <a:schemeClr val="accent1"/>
+          </a:effectRef>
+          <a:fontRef idx="minor">
+            <a:schemeClr val="lt1"/>
+          </a:fontRef>
+        </p:style>
+        <p:txBody>
+          <a:bodyPr rtlCol="0" anchor="ctr"/>
+          <a:lstStyle/>
+          <a:p>
+            <a:pPr algn="ctr"/>
+          </a:p>
+        </p:txBody>
+      </p:sp>
+      <p:sp>
+        <p:nvSpPr>
+          <p:cNvPr id="35" name="Rectangle 34"/>
+          <p:cNvSpPr/>
+          <p:nvPr/>
+        </p:nvSpPr>
+        <p:spPr>
+          <a:xfrm>
+            <a:off x="10177272" y="1874519"/>
+            <a:ext cx="73152" cy="960120"/>
+          </a:xfrm>
+          <a:prstGeom prst="rect">
+            <a:avLst/>
+          </a:prstGeom>
+          <a:solidFill>
+            <a:srgbClr val="16A34A"/>
+          </a:solidFill>
+          <a:ln>
+            <a:solidFill>
+              <a:srgbClr val="16A34A"/>
+            </a:solidFill>
+          </a:ln>
+        </p:spPr>
+        <p:style>
+          <a:lnRef idx="1">
+            <a:schemeClr val="accent1"/>
+          </a:lnRef>
+          <a:fillRef idx="3">
+            <a:schemeClr val="accent1"/>
+          </a:fillRef>
+          <a:effectRef idx="2">
+            <a:schemeClr val="accent1"/>
+          </a:effectRef>
+          <a:fontRef idx="minor">
+            <a:schemeClr val="lt1"/>
+          </a:fontRef>
+        </p:style>
+        <p:txBody>
+          <a:bodyPr rtlCol="0" anchor="ctr"/>
+          <a:lstStyle/>
+          <a:p>
+            <a:pPr algn="ctr"/>
+          </a:p>
+        </p:txBody>
+      </p:sp>
+      <p:sp>
+        <p:nvSpPr>
+          <p:cNvPr id="36" name="TextBox 35"/>
+          <p:cNvSpPr txBox="1"/>
+          <p:nvPr/>
+        </p:nvSpPr>
+        <p:spPr>
+          <a:xfrm>
+            <a:off x="10378440" y="2039112"/>
+            <a:ext cx="850392" cy="274320"/>
+          </a:xfrm>
+          <a:prstGeom prst="rect">
+            <a:avLst/>
+          </a:prstGeom>
+          <a:noFill/>
+        </p:spPr>
+        <p:txBody>
+          <a:bodyPr wrap="none">
+            <a:spAutoFit/>
+          </a:bodyPr>
+          <a:lstStyle/>
+          <a:p>
+            <a:pPr>
+              <a:defRPr sz="1600" b="1">
+                <a:solidFill>
+                  <a:srgbClr val="0F172A"/>
+                </a:solidFill>
+                <a:latin typeface="Aptos"/>
+              </a:defRPr>
+            </a:pPr>
+            <a:r>
+              <a:t>用户 B</a:t>
+            </a:r>
+          </a:p>
+        </p:txBody>
+      </p:sp>
+      <p:sp>
+        <p:nvSpPr>
+          <p:cNvPr id="37" name="TextBox 36"/>
+          <p:cNvSpPr txBox="1"/>
+          <p:nvPr/>
+        </p:nvSpPr>
+        <p:spPr>
+          <a:xfrm>
+            <a:off x="10378440" y="2404872"/>
+            <a:ext cx="850392" cy="274320"/>
+          </a:xfrm>
+          <a:prstGeom prst="rect">
+            <a:avLst/>
+          </a:prstGeom>
+          <a:noFill/>
+        </p:spPr>
+        <p:txBody>
+          <a:bodyPr wrap="square">
+            <a:spAutoFit/>
+          </a:bodyPr>
+          <a:lstStyle/>
+          <a:p>
+            <a:pPr>
+              <a:spcAft>
+                <a:spcPts val="500"/>
+              </a:spcAft>
+              <a:defRPr sz="1200">
+                <a:solidFill>
+                  <a:srgbClr val="475569"/>
+                </a:solidFill>
+                <a:latin typeface="Aptos"/>
+              </a:defRPr>
+            </a:pPr>
+            <a:r>
+              <a:t>看见消息</a:t>
+            </a:r>
+          </a:p>
+        </p:txBody>
+      </p:sp>
+      <p:sp>
+        <p:nvSpPr>
+          <p:cNvPr id="38" name="Rounded Rectangle 37"/>
+          <p:cNvSpPr/>
+          <p:nvPr/>
+        </p:nvSpPr>
+        <p:spPr>
+          <a:xfrm>
+            <a:off x="4526280" y="3246120"/>
+            <a:ext cx="1417320" cy="292608"/>
+          </a:xfrm>
+          <a:prstGeom prst="roundRect">
+            <a:avLst/>
+          </a:prstGeom>
+          <a:solidFill>
+            <a:srgbClr val="FFFFFF"/>
+          </a:solidFill>
+          <a:ln>
+            <a:solidFill>
+              <a:srgbClr val="16A34A"/>
+            </a:solidFill>
+          </a:ln>
+        </p:spPr>
+        <p:style>
+          <a:lnRef idx="1">
+            <a:schemeClr val="accent1"/>
+          </a:lnRef>
+          <a:fillRef idx="3">
+            <a:schemeClr val="accent1"/>
+          </a:fillRef>
+          <a:effectRef idx="2">
+            <a:schemeClr val="accent1"/>
+          </a:effectRef>
+          <a:fontRef idx="minor">
+            <a:schemeClr val="lt1"/>
+          </a:fontRef>
+        </p:style>
+        <p:txBody>
+          <a:bodyPr rtlCol="0" anchor="ctr"/>
+          <a:lstStyle/>
+          <a:p>
+            <a:pPr algn="ctr">
+              <a:defRPr sz="900" b="1">
+                <a:solidFill>
+                  <a:srgbClr val="16A34A"/>
+                </a:solidFill>
+                <a:latin typeface="Cascadia Mono"/>
+              </a:defRPr>
+            </a:pPr>
+            <a:r>
+              <a:t>delivery-ack</a:t>
+            </a:r>
+          </a:p>
+        </p:txBody>
+      </p:sp>
+      <p:cxnSp>
+        <p:nvCxnSpPr>
+          <p:cNvPr id="39" name="Connector 38"/>
+          <p:cNvCxnSpPr/>
+          <p:nvPr/>
+        </p:nvCxnSpPr>
+        <p:spPr>
+          <a:xfrm flipH="1">
+            <a:off x="2057400" y="3429000"/>
+            <a:ext cx="7909560" cy="0"/>
+          </a:xfrm>
+          <a:prstGeom prst="line">
+            <a:avLst/>
+          </a:prstGeom>
+          <a:ln w="25400">
+            <a:solidFill>
+              <a:srgbClr val="16A34A"/>
+            </a:solidFill>
+          </a:ln>
+        </p:spPr>
+        <p:style>
+          <a:lnRef idx="2">
+            <a:schemeClr val="accent1"/>
+          </a:lnRef>
+          <a:fillRef idx="0">
+            <a:schemeClr val="accent1"/>
+          </a:fillRef>
+          <a:effectRef idx="1">
+            <a:schemeClr val="accent1"/>
+          </a:effectRef>
+          <a:fontRef idx="minor">
+            <a:schemeClr val="tx1"/>
+          </a:fontRef>
+        </p:style>
+      </p:cxnSp>
+      <p:sp>
+        <p:nvSpPr>
+          <p:cNvPr id="40" name="TextBox 39"/>
+          <p:cNvSpPr txBox="1"/>
+          <p:nvPr/>
+        </p:nvSpPr>
+        <p:spPr>
+          <a:xfrm>
+            <a:off x="960120" y="4160520"/>
+            <a:ext cx="10058400" cy="731520"/>
           </a:xfrm>
           <a:prstGeom prst="rect">
             <a:avLst/>
@@ -3257,14 +7817,14 @@
               </a:defRPr>
             </a:pPr>
             <a:r>
-              <a:t>Task 3 will replace this one-slide skeleton with the full 12-slide deck.</a:t>
-            </a:r>
-          </a:p>
-        </p:txBody>
-      </p:sp>
-      <p:sp>
-        <p:nvSpPr>
-          <p:cNvPr id="6" name="TextBox 5"/>
+              <a:t>成功标准不是“P2P 已发出”，而是远端 channel 投递成功并返回 ACK。</a:t>
+            </a:r>
+          </a:p>
+        </p:txBody>
+      </p:sp>
+      <p:sp>
+        <p:nvSpPr>
+          <p:cNvPr id="41" name="TextBox 40"/>
           <p:cNvSpPr txBox="1"/>
           <p:nvPr/>
         </p:nvSpPr>
@@ -3293,7 +7853,4148 @@
               </a:defRPr>
             </a:pPr>
             <a:r>
-              <a:t>概览 / 01</a:t>
+              <a:t>链路 / 03</a:t>
+            </a:r>
+          </a:p>
+        </p:txBody>
+      </p:sp>
+    </p:spTree>
+  </p:cSld>
+  <p:clrMapOvr>
+    <a:masterClrMapping/>
+  </p:clrMapOvr>
+</p:sld>
+</file>
+
+<file path=ppt/slides/slide4.xml><?xml version="1.0" encoding="utf-8"?>
+<p:sld xmlns:a="http://schemas.openxmlformats.org/drawingml/2006/main" xmlns:p="http://schemas.openxmlformats.org/presentationml/2006/main" xmlns:r="http://schemas.openxmlformats.org/officeDocument/2006/relationships">
+  <p:cSld>
+    <p:bg>
+      <p:bgPr>
+        <a:solidFill>
+          <a:srgbClr val="F8FAFC"/>
+        </a:solidFill>
+        <a:effectLst/>
+      </p:bgPr>
+    </p:bg>
+    <p:spTree>
+      <p:nvGrpSpPr>
+        <p:cNvPr id="1" name=""/>
+        <p:cNvGrpSpPr/>
+        <p:nvPr/>
+      </p:nvGrpSpPr>
+      <p:grpSpPr/>
+      <p:sp>
+        <p:nvSpPr>
+          <p:cNvPr id="2" name="TextBox 1"/>
+          <p:cNvSpPr txBox="1"/>
+          <p:nvPr/>
+        </p:nvSpPr>
+        <p:spPr>
+          <a:xfrm>
+            <a:off x="502920" y="292608"/>
+            <a:ext cx="7772400" cy="502920"/>
+          </a:xfrm>
+          <a:prstGeom prst="rect">
+            <a:avLst/>
+          </a:prstGeom>
+          <a:noFill/>
+        </p:spPr>
+        <p:txBody>
+          <a:bodyPr wrap="none">
+            <a:spAutoFit/>
+          </a:bodyPr>
+          <a:lstStyle/>
+          <a:p>
+            <a:pPr>
+              <a:defRPr sz="3000" b="1">
+                <a:solidFill>
+                  <a:srgbClr val="0F172A"/>
+                </a:solidFill>
+                <a:latin typeface="Aptos"/>
+              </a:defRPr>
+            </a:pPr>
+            <a:r>
+              <a:t>用户指令如何触发 P2P</a:t>
+            </a:r>
+          </a:p>
+        </p:txBody>
+      </p:sp>
+      <p:sp>
+        <p:nvSpPr>
+          <p:cNvPr id="3" name="Rounded Rectangle 2"/>
+          <p:cNvSpPr/>
+          <p:nvPr/>
+        </p:nvSpPr>
+        <p:spPr>
+          <a:xfrm>
+            <a:off x="9326880" y="384048"/>
+            <a:ext cx="2240280" cy="310896"/>
+          </a:xfrm>
+          <a:prstGeom prst="roundRect">
+            <a:avLst/>
+          </a:prstGeom>
+          <a:solidFill>
+            <a:srgbClr val="CCFBF1"/>
+          </a:solidFill>
+          <a:ln>
+            <a:solidFill>
+              <a:srgbClr val="CCFBF1"/>
+            </a:solidFill>
+          </a:ln>
+        </p:spPr>
+        <p:style>
+          <a:lnRef idx="1">
+            <a:schemeClr val="accent1"/>
+          </a:lnRef>
+          <a:fillRef idx="3">
+            <a:schemeClr val="accent1"/>
+          </a:fillRef>
+          <a:effectRef idx="2">
+            <a:schemeClr val="accent1"/>
+          </a:effectRef>
+          <a:fontRef idx="minor">
+            <a:schemeClr val="lt1"/>
+          </a:fontRef>
+        </p:style>
+        <p:txBody>
+          <a:bodyPr rtlCol="0" anchor="ctr"/>
+          <a:lstStyle/>
+          <a:p>
+            <a:pPr algn="ctr">
+              <a:defRPr sz="1000" b="1">
+                <a:solidFill>
+                  <a:srgbClr val="0F766E"/>
+                </a:solidFill>
+                <a:latin typeface="Aptos"/>
+              </a:defRPr>
+            </a:pPr>
+            <a:r>
+              <a:t>工具</a:t>
+            </a:r>
+          </a:p>
+        </p:txBody>
+      </p:sp>
+      <p:sp>
+        <p:nvSpPr>
+          <p:cNvPr id="4" name="TextBox 3"/>
+          <p:cNvSpPr txBox="1"/>
+          <p:nvPr/>
+        </p:nvSpPr>
+        <p:spPr>
+          <a:xfrm>
+            <a:off x="777240" y="1325880"/>
+            <a:ext cx="6766560" cy="4389120"/>
+          </a:xfrm>
+          <a:prstGeom prst="rect">
+            <a:avLst/>
+          </a:prstGeom>
+          <a:noFill/>
+        </p:spPr>
+        <p:txBody>
+          <a:bodyPr wrap="none">
+            <a:spAutoFit/>
+          </a:bodyPr>
+          <a:lstStyle/>
+          <a:p>
+            <a:pPr>
+              <a:spcAft>
+                <a:spcPts val="800"/>
+              </a:spcAft>
+              <a:defRPr sz="1900">
+                <a:solidFill>
+                  <a:srgbClr val="0F172A"/>
+                </a:solidFill>
+                <a:latin typeface="Aptos"/>
+              </a:defRPr>
+            </a:pPr>
+            <a:r>
+              <a:t>用户给出目标 instanceId 和原始消息内容。</a:t>
+            </a:r>
+          </a:p>
+          <a:p>
+            <a:pPr>
+              <a:spcAft>
+                <a:spcPts val="800"/>
+              </a:spcAft>
+              <a:defRPr sz="1900">
+                <a:solidFill>
+                  <a:srgbClr val="0F172A"/>
+                </a:solidFill>
+                <a:latin typeface="Aptos"/>
+              </a:defRPr>
+            </a:pPr>
+            <a:r>
+              <a:t>Agent 主路径调用 p2p_send_instance_message({ instanceId, message })。</a:t>
+            </a:r>
+          </a:p>
+          <a:p>
+            <a:pPr>
+              <a:spcAft>
+                <a:spcPts val="800"/>
+              </a:spcAft>
+              <a:defRPr sz="1900">
+                <a:solidFill>
+                  <a:srgbClr val="0F172A"/>
+                </a:solidFill>
+                <a:latin typeface="Aptos"/>
+              </a:defRPr>
+            </a:pPr>
+            <a:r>
+              <a:t>不再手动先查映射再调用 p2p_send_message。</a:t>
+            </a:r>
+          </a:p>
+          <a:p>
+            <a:pPr>
+              <a:spcAft>
+                <a:spcPts val="800"/>
+              </a:spcAft>
+              <a:defRPr sz="1900">
+                <a:solidFill>
+                  <a:srgbClr val="0F172A"/>
+                </a:solidFill>
+                <a:latin typeface="Aptos"/>
+              </a:defRPr>
+            </a:pPr>
+            <a:r>
+              <a:t>p2p_send_message 保留为已知 peerId 的低层调试直发。</a:t>
+            </a:r>
+          </a:p>
+        </p:txBody>
+      </p:sp>
+      <p:sp>
+        <p:nvSpPr>
+          <p:cNvPr id="5" name="TextBox 4"/>
+          <p:cNvSpPr txBox="1"/>
+          <p:nvPr/>
+        </p:nvSpPr>
+        <p:spPr>
+          <a:xfrm>
+            <a:off x="502920" y="6473952"/>
+            <a:ext cx="7315200" cy="228600"/>
+          </a:xfrm>
+          <a:prstGeom prst="rect">
+            <a:avLst/>
+          </a:prstGeom>
+          <a:noFill/>
+        </p:spPr>
+        <p:txBody>
+          <a:bodyPr wrap="none">
+            <a:spAutoFit/>
+          </a:bodyPr>
+          <a:lstStyle/>
+          <a:p>
+            <a:pPr>
+              <a:defRPr sz="900">
+                <a:solidFill>
+                  <a:srgbClr val="475569"/>
+                </a:solidFill>
+                <a:latin typeface="Aptos"/>
+              </a:defRPr>
+            </a:pPr>
+            <a:r>
+              <a:t>工具 / 04</a:t>
+            </a:r>
+          </a:p>
+        </p:txBody>
+      </p:sp>
+      <p:sp>
+        <p:nvSpPr>
+          <p:cNvPr id="6" name="Rounded Rectangle 5"/>
+          <p:cNvSpPr/>
+          <p:nvPr/>
+        </p:nvSpPr>
+        <p:spPr>
+          <a:xfrm>
+            <a:off x="7635240" y="1325880"/>
+            <a:ext cx="3749039" cy="1005840"/>
+          </a:xfrm>
+          <a:prstGeom prst="roundRect">
+            <a:avLst/>
+          </a:prstGeom>
+          <a:solidFill>
+            <a:srgbClr val="FFFFFF"/>
+          </a:solidFill>
+          <a:ln w="12700">
+            <a:solidFill>
+              <a:srgbClr val="94A3B8"/>
+            </a:solidFill>
+          </a:ln>
+        </p:spPr>
+        <p:style>
+          <a:lnRef idx="1">
+            <a:schemeClr val="accent1"/>
+          </a:lnRef>
+          <a:fillRef idx="3">
+            <a:schemeClr val="accent1"/>
+          </a:fillRef>
+          <a:effectRef idx="2">
+            <a:schemeClr val="accent1"/>
+          </a:effectRef>
+          <a:fontRef idx="minor">
+            <a:schemeClr val="lt1"/>
+          </a:fontRef>
+        </p:style>
+        <p:txBody>
+          <a:bodyPr rtlCol="0" anchor="ctr"/>
+          <a:lstStyle/>
+          <a:p>
+            <a:pPr algn="ctr"/>
+          </a:p>
+        </p:txBody>
+      </p:sp>
+      <p:sp>
+        <p:nvSpPr>
+          <p:cNvPr id="7" name="Rectangle 6"/>
+          <p:cNvSpPr/>
+          <p:nvPr/>
+        </p:nvSpPr>
+        <p:spPr>
+          <a:xfrm>
+            <a:off x="7635240" y="1325880"/>
+            <a:ext cx="73152" cy="1005840"/>
+          </a:xfrm>
+          <a:prstGeom prst="rect">
+            <a:avLst/>
+          </a:prstGeom>
+          <a:solidFill>
+            <a:srgbClr val="0F766E"/>
+          </a:solidFill>
+          <a:ln>
+            <a:solidFill>
+              <a:srgbClr val="0F766E"/>
+            </a:solidFill>
+          </a:ln>
+        </p:spPr>
+        <p:style>
+          <a:lnRef idx="1">
+            <a:schemeClr val="accent1"/>
+          </a:lnRef>
+          <a:fillRef idx="3">
+            <a:schemeClr val="accent1"/>
+          </a:fillRef>
+          <a:effectRef idx="2">
+            <a:schemeClr val="accent1"/>
+          </a:effectRef>
+          <a:fontRef idx="minor">
+            <a:schemeClr val="lt1"/>
+          </a:fontRef>
+        </p:style>
+        <p:txBody>
+          <a:bodyPr rtlCol="0" anchor="ctr"/>
+          <a:lstStyle/>
+          <a:p>
+            <a:pPr algn="ctr"/>
+          </a:p>
+        </p:txBody>
+      </p:sp>
+      <p:sp>
+        <p:nvSpPr>
+          <p:cNvPr id="8" name="TextBox 7"/>
+          <p:cNvSpPr txBox="1"/>
+          <p:nvPr/>
+        </p:nvSpPr>
+        <p:spPr>
+          <a:xfrm>
+            <a:off x="7836408" y="1490472"/>
+            <a:ext cx="3364991" cy="274320"/>
+          </a:xfrm>
+          <a:prstGeom prst="rect">
+            <a:avLst/>
+          </a:prstGeom>
+          <a:noFill/>
+        </p:spPr>
+        <p:txBody>
+          <a:bodyPr wrap="none">
+            <a:spAutoFit/>
+          </a:bodyPr>
+          <a:lstStyle/>
+          <a:p>
+            <a:pPr>
+              <a:defRPr sz="1600" b="1">
+                <a:solidFill>
+                  <a:srgbClr val="0F172A"/>
+                </a:solidFill>
+                <a:latin typeface="Aptos"/>
+              </a:defRPr>
+            </a:pPr>
+            <a:r>
+              <a:t>飞书指令</a:t>
+            </a:r>
+          </a:p>
+        </p:txBody>
+      </p:sp>
+      <p:sp>
+        <p:nvSpPr>
+          <p:cNvPr id="9" name="TextBox 8"/>
+          <p:cNvSpPr txBox="1"/>
+          <p:nvPr/>
+        </p:nvSpPr>
+        <p:spPr>
+          <a:xfrm>
+            <a:off x="7836408" y="1856231"/>
+            <a:ext cx="3364991" cy="320040"/>
+          </a:xfrm>
+          <a:prstGeom prst="rect">
+            <a:avLst/>
+          </a:prstGeom>
+          <a:noFill/>
+        </p:spPr>
+        <p:txBody>
+          <a:bodyPr wrap="square">
+            <a:spAutoFit/>
+          </a:bodyPr>
+          <a:lstStyle/>
+          <a:p>
+            <a:pPr>
+              <a:spcAft>
+                <a:spcPts val="500"/>
+              </a:spcAft>
+              <a:defRPr sz="1200">
+                <a:solidFill>
+                  <a:srgbClr val="475569"/>
+                </a:solidFill>
+                <a:latin typeface="Aptos"/>
+              </a:defRPr>
+            </a:pPr>
+            <a:r>
+              <a:t>给 fhl-enine@... 发送消息：今晚来吃饭</a:t>
+            </a:r>
+          </a:p>
+        </p:txBody>
+      </p:sp>
+      <p:sp>
+        <p:nvSpPr>
+          <p:cNvPr id="10" name="Rounded Rectangle 9"/>
+          <p:cNvSpPr/>
+          <p:nvPr/>
+        </p:nvSpPr>
+        <p:spPr>
+          <a:xfrm>
+            <a:off x="7635240" y="2743200"/>
+            <a:ext cx="3749039" cy="1234440"/>
+          </a:xfrm>
+          <a:prstGeom prst="roundRect">
+            <a:avLst/>
+          </a:prstGeom>
+          <a:solidFill>
+            <a:srgbClr val="FFFFFF"/>
+          </a:solidFill>
+          <a:ln w="12700">
+            <a:solidFill>
+              <a:srgbClr val="94A3B8"/>
+            </a:solidFill>
+          </a:ln>
+        </p:spPr>
+        <p:style>
+          <a:lnRef idx="1">
+            <a:schemeClr val="accent1"/>
+          </a:lnRef>
+          <a:fillRef idx="3">
+            <a:schemeClr val="accent1"/>
+          </a:fillRef>
+          <a:effectRef idx="2">
+            <a:schemeClr val="accent1"/>
+          </a:effectRef>
+          <a:fontRef idx="minor">
+            <a:schemeClr val="lt1"/>
+          </a:fontRef>
+        </p:style>
+        <p:txBody>
+          <a:bodyPr rtlCol="0" anchor="ctr"/>
+          <a:lstStyle/>
+          <a:p>
+            <a:pPr algn="ctr"/>
+          </a:p>
+        </p:txBody>
+      </p:sp>
+      <p:sp>
+        <p:nvSpPr>
+          <p:cNvPr id="11" name="Rectangle 10"/>
+          <p:cNvSpPr/>
+          <p:nvPr/>
+        </p:nvSpPr>
+        <p:spPr>
+          <a:xfrm>
+            <a:off x="7635240" y="2743200"/>
+            <a:ext cx="73152" cy="1234440"/>
+          </a:xfrm>
+          <a:prstGeom prst="rect">
+            <a:avLst/>
+          </a:prstGeom>
+          <a:solidFill>
+            <a:srgbClr val="16A34A"/>
+          </a:solidFill>
+          <a:ln>
+            <a:solidFill>
+              <a:srgbClr val="16A34A"/>
+            </a:solidFill>
+          </a:ln>
+        </p:spPr>
+        <p:style>
+          <a:lnRef idx="1">
+            <a:schemeClr val="accent1"/>
+          </a:lnRef>
+          <a:fillRef idx="3">
+            <a:schemeClr val="accent1"/>
+          </a:fillRef>
+          <a:effectRef idx="2">
+            <a:schemeClr val="accent1"/>
+          </a:effectRef>
+          <a:fontRef idx="minor">
+            <a:schemeClr val="lt1"/>
+          </a:fontRef>
+        </p:style>
+        <p:txBody>
+          <a:bodyPr rtlCol="0" anchor="ctr"/>
+          <a:lstStyle/>
+          <a:p>
+            <a:pPr algn="ctr"/>
+          </a:p>
+        </p:txBody>
+      </p:sp>
+      <p:sp>
+        <p:nvSpPr>
+          <p:cNvPr id="12" name="TextBox 11"/>
+          <p:cNvSpPr txBox="1"/>
+          <p:nvPr/>
+        </p:nvSpPr>
+        <p:spPr>
+          <a:xfrm>
+            <a:off x="7836408" y="2907792"/>
+            <a:ext cx="3364991" cy="274320"/>
+          </a:xfrm>
+          <a:prstGeom prst="rect">
+            <a:avLst/>
+          </a:prstGeom>
+          <a:noFill/>
+        </p:spPr>
+        <p:txBody>
+          <a:bodyPr wrap="none">
+            <a:spAutoFit/>
+          </a:bodyPr>
+          <a:lstStyle/>
+          <a:p>
+            <a:pPr>
+              <a:defRPr sz="1600" b="1">
+                <a:solidFill>
+                  <a:srgbClr val="0F172A"/>
+                </a:solidFill>
+                <a:latin typeface="Aptos"/>
+              </a:defRPr>
+            </a:pPr>
+            <a:r>
+              <a:t>工具调用</a:t>
+            </a:r>
+          </a:p>
+        </p:txBody>
+      </p:sp>
+      <p:sp>
+        <p:nvSpPr>
+          <p:cNvPr id="13" name="TextBox 12"/>
+          <p:cNvSpPr txBox="1"/>
+          <p:nvPr/>
+        </p:nvSpPr>
+        <p:spPr>
+          <a:xfrm>
+            <a:off x="7836408" y="3273552"/>
+            <a:ext cx="3364991" cy="548640"/>
+          </a:xfrm>
+          <a:prstGeom prst="rect">
+            <a:avLst/>
+          </a:prstGeom>
+          <a:noFill/>
+        </p:spPr>
+        <p:txBody>
+          <a:bodyPr wrap="square">
+            <a:spAutoFit/>
+          </a:bodyPr>
+          <a:lstStyle/>
+          <a:p>
+            <a:pPr>
+              <a:spcAft>
+                <a:spcPts val="500"/>
+              </a:spcAft>
+              <a:defRPr sz="1200">
+                <a:solidFill>
+                  <a:srgbClr val="475569"/>
+                </a:solidFill>
+                <a:latin typeface="Aptos"/>
+              </a:defRPr>
+            </a:pPr>
+            <a:r>
+              <a:t>p2p_send_instance_message</a:t>
+            </a:r>
+          </a:p>
+          <a:p>
+            <a:pPr>
+              <a:spcAft>
+                <a:spcPts val="500"/>
+              </a:spcAft>
+              <a:defRPr sz="1200">
+                <a:solidFill>
+                  <a:srgbClr val="475569"/>
+                </a:solidFill>
+                <a:latin typeface="Aptos"/>
+              </a:defRPr>
+            </a:pPr>
+            <a:r>
+              <a:t>instanceId + message</a:t>
+            </a:r>
+          </a:p>
+        </p:txBody>
+      </p:sp>
+      <p:cxnSp>
+        <p:nvCxnSpPr>
+          <p:cNvPr id="14" name="Connector 13"/>
+          <p:cNvCxnSpPr/>
+          <p:nvPr/>
+        </p:nvCxnSpPr>
+        <p:spPr>
+          <a:xfrm>
+            <a:off x="9509760" y="2377440"/>
+            <a:ext cx="0" cy="320040"/>
+          </a:xfrm>
+          <a:prstGeom prst="line">
+            <a:avLst/>
+          </a:prstGeom>
+          <a:ln w="25400">
+            <a:solidFill>
+              <a:srgbClr val="94A3B8"/>
+            </a:solidFill>
+          </a:ln>
+        </p:spPr>
+        <p:style>
+          <a:lnRef idx="2">
+            <a:schemeClr val="accent1"/>
+          </a:lnRef>
+          <a:fillRef idx="0">
+            <a:schemeClr val="accent1"/>
+          </a:fillRef>
+          <a:effectRef idx="1">
+            <a:schemeClr val="accent1"/>
+          </a:effectRef>
+          <a:fontRef idx="minor">
+            <a:schemeClr val="tx1"/>
+          </a:fontRef>
+        </p:style>
+      </p:cxnSp>
+    </p:spTree>
+  </p:cSld>
+  <p:clrMapOvr>
+    <a:masterClrMapping/>
+  </p:clrMapOvr>
+</p:sld>
+</file>
+
+<file path=ppt/slides/slide5.xml><?xml version="1.0" encoding="utf-8"?>
+<p:sld xmlns:a="http://schemas.openxmlformats.org/drawingml/2006/main" xmlns:p="http://schemas.openxmlformats.org/presentationml/2006/main" xmlns:r="http://schemas.openxmlformats.org/officeDocument/2006/relationships">
+  <p:cSld>
+    <p:bg>
+      <p:bgPr>
+        <a:solidFill>
+          <a:srgbClr val="F8FAFC"/>
+        </a:solidFill>
+        <a:effectLst/>
+      </p:bgPr>
+    </p:bg>
+    <p:spTree>
+      <p:nvGrpSpPr>
+        <p:cNvPr id="1" name=""/>
+        <p:cNvGrpSpPr/>
+        <p:nvPr/>
+      </p:nvGrpSpPr>
+      <p:grpSpPr/>
+      <p:sp>
+        <p:nvSpPr>
+          <p:cNvPr id="2" name="TextBox 1"/>
+          <p:cNvSpPr txBox="1"/>
+          <p:nvPr/>
+        </p:nvSpPr>
+        <p:spPr>
+          <a:xfrm>
+            <a:off x="502920" y="292608"/>
+            <a:ext cx="7772400" cy="502920"/>
+          </a:xfrm>
+          <a:prstGeom prst="rect">
+            <a:avLst/>
+          </a:prstGeom>
+          <a:noFill/>
+        </p:spPr>
+        <p:txBody>
+          <a:bodyPr wrap="none">
+            <a:spAutoFit/>
+          </a:bodyPr>
+          <a:lstStyle/>
+          <a:p>
+            <a:pPr>
+              <a:defRPr sz="3000" b="1">
+                <a:solidFill>
+                  <a:srgbClr val="0F172A"/>
+                </a:solidFill>
+                <a:latin typeface="Aptos"/>
+              </a:defRPr>
+            </a:pPr>
+            <a:r>
+              <a:t>instanceId 如何找到 peerId</a:t>
+            </a:r>
+          </a:p>
+        </p:txBody>
+      </p:sp>
+      <p:sp>
+        <p:nvSpPr>
+          <p:cNvPr id="3" name="Rounded Rectangle 2"/>
+          <p:cNvSpPr/>
+          <p:nvPr/>
+        </p:nvSpPr>
+        <p:spPr>
+          <a:xfrm>
+            <a:off x="9326880" y="384048"/>
+            <a:ext cx="2240280" cy="310896"/>
+          </a:xfrm>
+          <a:prstGeom prst="roundRect">
+            <a:avLst/>
+          </a:prstGeom>
+          <a:solidFill>
+            <a:srgbClr val="CCFBF1"/>
+          </a:solidFill>
+          <a:ln>
+            <a:solidFill>
+              <a:srgbClr val="CCFBF1"/>
+            </a:solidFill>
+          </a:ln>
+        </p:spPr>
+        <p:style>
+          <a:lnRef idx="1">
+            <a:schemeClr val="accent1"/>
+          </a:lnRef>
+          <a:fillRef idx="3">
+            <a:schemeClr val="accent1"/>
+          </a:fillRef>
+          <a:effectRef idx="2">
+            <a:schemeClr val="accent1"/>
+          </a:effectRef>
+          <a:fontRef idx="minor">
+            <a:schemeClr val="lt1"/>
+          </a:fontRef>
+        </p:style>
+        <p:txBody>
+          <a:bodyPr rtlCol="0" anchor="ctr"/>
+          <a:lstStyle/>
+          <a:p>
+            <a:pPr algn="ctr">
+              <a:defRPr sz="1000" b="1">
+                <a:solidFill>
+                  <a:srgbClr val="0F766E"/>
+                </a:solidFill>
+                <a:latin typeface="Aptos"/>
+              </a:defRPr>
+            </a:pPr>
+            <a:r>
+              <a:t>路由</a:t>
+            </a:r>
+          </a:p>
+        </p:txBody>
+      </p:sp>
+      <p:sp>
+        <p:nvSpPr>
+          <p:cNvPr id="4" name="Rounded Rectangle 3"/>
+          <p:cNvSpPr/>
+          <p:nvPr/>
+        </p:nvSpPr>
+        <p:spPr>
+          <a:xfrm>
+            <a:off x="731520" y="1325880"/>
+            <a:ext cx="2743200" cy="1143000"/>
+          </a:xfrm>
+          <a:prstGeom prst="roundRect">
+            <a:avLst/>
+          </a:prstGeom>
+          <a:solidFill>
+            <a:srgbClr val="FFFFFF"/>
+          </a:solidFill>
+          <a:ln w="12700">
+            <a:solidFill>
+              <a:srgbClr val="94A3B8"/>
+            </a:solidFill>
+          </a:ln>
+        </p:spPr>
+        <p:style>
+          <a:lnRef idx="1">
+            <a:schemeClr val="accent1"/>
+          </a:lnRef>
+          <a:fillRef idx="3">
+            <a:schemeClr val="accent1"/>
+          </a:fillRef>
+          <a:effectRef idx="2">
+            <a:schemeClr val="accent1"/>
+          </a:effectRef>
+          <a:fontRef idx="minor">
+            <a:schemeClr val="lt1"/>
+          </a:fontRef>
+        </p:style>
+        <p:txBody>
+          <a:bodyPr rtlCol="0" anchor="ctr"/>
+          <a:lstStyle/>
+          <a:p>
+            <a:pPr algn="ctr"/>
+          </a:p>
+        </p:txBody>
+      </p:sp>
+      <p:sp>
+        <p:nvSpPr>
+          <p:cNvPr id="5" name="Rectangle 4"/>
+          <p:cNvSpPr/>
+          <p:nvPr/>
+        </p:nvSpPr>
+        <p:spPr>
+          <a:xfrm>
+            <a:off x="731520" y="1325880"/>
+            <a:ext cx="73152" cy="1143000"/>
+          </a:xfrm>
+          <a:prstGeom prst="rect">
+            <a:avLst/>
+          </a:prstGeom>
+          <a:solidFill>
+            <a:srgbClr val="0F766E"/>
+          </a:solidFill>
+          <a:ln>
+            <a:solidFill>
+              <a:srgbClr val="0F766E"/>
+            </a:solidFill>
+          </a:ln>
+        </p:spPr>
+        <p:style>
+          <a:lnRef idx="1">
+            <a:schemeClr val="accent1"/>
+          </a:lnRef>
+          <a:fillRef idx="3">
+            <a:schemeClr val="accent1"/>
+          </a:fillRef>
+          <a:effectRef idx="2">
+            <a:schemeClr val="accent1"/>
+          </a:effectRef>
+          <a:fontRef idx="minor">
+            <a:schemeClr val="lt1"/>
+          </a:fontRef>
+        </p:style>
+        <p:txBody>
+          <a:bodyPr rtlCol="0" anchor="ctr"/>
+          <a:lstStyle/>
+          <a:p>
+            <a:pPr algn="ctr"/>
+          </a:p>
+        </p:txBody>
+      </p:sp>
+      <p:sp>
+        <p:nvSpPr>
+          <p:cNvPr id="6" name="TextBox 5"/>
+          <p:cNvSpPr txBox="1"/>
+          <p:nvPr/>
+        </p:nvSpPr>
+        <p:spPr>
+          <a:xfrm>
+            <a:off x="932688" y="1490472"/>
+            <a:ext cx="2359152" cy="274320"/>
+          </a:xfrm>
+          <a:prstGeom prst="rect">
+            <a:avLst/>
+          </a:prstGeom>
+          <a:noFill/>
+        </p:spPr>
+        <p:txBody>
+          <a:bodyPr wrap="none">
+            <a:spAutoFit/>
+          </a:bodyPr>
+          <a:lstStyle/>
+          <a:p>
+            <a:pPr>
+              <a:defRPr sz="1600" b="1">
+                <a:solidFill>
+                  <a:srgbClr val="0F172A"/>
+                </a:solidFill>
+                <a:latin typeface="Aptos"/>
+              </a:defRPr>
+            </a:pPr>
+            <a:r>
+              <a:t>mesh 启动 / peer 连接</a:t>
+            </a:r>
+          </a:p>
+        </p:txBody>
+      </p:sp>
+      <p:sp>
+        <p:nvSpPr>
+          <p:cNvPr id="7" name="TextBox 6"/>
+          <p:cNvSpPr txBox="1"/>
+          <p:nvPr/>
+        </p:nvSpPr>
+        <p:spPr>
+          <a:xfrm>
+            <a:off x="932688" y="1856231"/>
+            <a:ext cx="2359152" cy="457200"/>
+          </a:xfrm>
+          <a:prstGeom prst="rect">
+            <a:avLst/>
+          </a:prstGeom>
+          <a:noFill/>
+        </p:spPr>
+        <p:txBody>
+          <a:bodyPr wrap="square">
+            <a:spAutoFit/>
+          </a:bodyPr>
+          <a:lstStyle/>
+          <a:p>
+            <a:pPr>
+              <a:spcAft>
+                <a:spcPts val="500"/>
+              </a:spcAft>
+              <a:defRPr sz="1200">
+                <a:solidFill>
+                  <a:srgbClr val="475569"/>
+                </a:solidFill>
+                <a:latin typeface="Aptos"/>
+              </a:defRPr>
+            </a:pPr>
+            <a:r>
+              <a:t>发送 instance-announce</a:t>
+            </a:r>
+          </a:p>
+        </p:txBody>
+      </p:sp>
+      <p:sp>
+        <p:nvSpPr>
+          <p:cNvPr id="8" name="Rounded Rectangle 7"/>
+          <p:cNvSpPr/>
+          <p:nvPr/>
+        </p:nvSpPr>
+        <p:spPr>
+          <a:xfrm>
+            <a:off x="4572000" y="1325880"/>
+            <a:ext cx="2743200" cy="1143000"/>
+          </a:xfrm>
+          <a:prstGeom prst="roundRect">
+            <a:avLst/>
+          </a:prstGeom>
+          <a:solidFill>
+            <a:srgbClr val="FFFFFF"/>
+          </a:solidFill>
+          <a:ln w="12700">
+            <a:solidFill>
+              <a:srgbClr val="94A3B8"/>
+            </a:solidFill>
+          </a:ln>
+        </p:spPr>
+        <p:style>
+          <a:lnRef idx="1">
+            <a:schemeClr val="accent1"/>
+          </a:lnRef>
+          <a:fillRef idx="3">
+            <a:schemeClr val="accent1"/>
+          </a:fillRef>
+          <a:effectRef idx="2">
+            <a:schemeClr val="accent1"/>
+          </a:effectRef>
+          <a:fontRef idx="minor">
+            <a:schemeClr val="lt1"/>
+          </a:fontRef>
+        </p:style>
+        <p:txBody>
+          <a:bodyPr rtlCol="0" anchor="ctr"/>
+          <a:lstStyle/>
+          <a:p>
+            <a:pPr algn="ctr"/>
+          </a:p>
+        </p:txBody>
+      </p:sp>
+      <p:sp>
+        <p:nvSpPr>
+          <p:cNvPr id="9" name="Rectangle 8"/>
+          <p:cNvSpPr/>
+          <p:nvPr/>
+        </p:nvSpPr>
+        <p:spPr>
+          <a:xfrm>
+            <a:off x="4572000" y="1325880"/>
+            <a:ext cx="73152" cy="1143000"/>
+          </a:xfrm>
+          <a:prstGeom prst="rect">
+            <a:avLst/>
+          </a:prstGeom>
+          <a:solidFill>
+            <a:srgbClr val="0F766E"/>
+          </a:solidFill>
+          <a:ln>
+            <a:solidFill>
+              <a:srgbClr val="0F766E"/>
+            </a:solidFill>
+          </a:ln>
+        </p:spPr>
+        <p:style>
+          <a:lnRef idx="1">
+            <a:schemeClr val="accent1"/>
+          </a:lnRef>
+          <a:fillRef idx="3">
+            <a:schemeClr val="accent1"/>
+          </a:fillRef>
+          <a:effectRef idx="2">
+            <a:schemeClr val="accent1"/>
+          </a:effectRef>
+          <a:fontRef idx="minor">
+            <a:schemeClr val="lt1"/>
+          </a:fontRef>
+        </p:style>
+        <p:txBody>
+          <a:bodyPr rtlCol="0" anchor="ctr"/>
+          <a:lstStyle/>
+          <a:p>
+            <a:pPr algn="ctr"/>
+          </a:p>
+        </p:txBody>
+      </p:sp>
+      <p:sp>
+        <p:nvSpPr>
+          <p:cNvPr id="10" name="TextBox 9"/>
+          <p:cNvSpPr txBox="1"/>
+          <p:nvPr/>
+        </p:nvSpPr>
+        <p:spPr>
+          <a:xfrm>
+            <a:off x="4773168" y="1490472"/>
+            <a:ext cx="2359152" cy="274320"/>
+          </a:xfrm>
+          <a:prstGeom prst="rect">
+            <a:avLst/>
+          </a:prstGeom>
+          <a:noFill/>
+        </p:spPr>
+        <p:txBody>
+          <a:bodyPr wrap="none">
+            <a:spAutoFit/>
+          </a:bodyPr>
+          <a:lstStyle/>
+          <a:p>
+            <a:pPr>
+              <a:defRPr sz="1600" b="1">
+                <a:solidFill>
+                  <a:srgbClr val="0F172A"/>
+                </a:solidFill>
+                <a:latin typeface="Aptos"/>
+              </a:defRPr>
+            </a:pPr>
+            <a:r>
+              <a:t>本地路由表</a:t>
+            </a:r>
+          </a:p>
+        </p:txBody>
+      </p:sp>
+      <p:sp>
+        <p:nvSpPr>
+          <p:cNvPr id="11" name="TextBox 10"/>
+          <p:cNvSpPr txBox="1"/>
+          <p:nvPr/>
+        </p:nvSpPr>
+        <p:spPr>
+          <a:xfrm>
+            <a:off x="4773168" y="1856231"/>
+            <a:ext cx="2359152" cy="457200"/>
+          </a:xfrm>
+          <a:prstGeom prst="rect">
+            <a:avLst/>
+          </a:prstGeom>
+          <a:noFill/>
+        </p:spPr>
+        <p:txBody>
+          <a:bodyPr wrap="square">
+            <a:spAutoFit/>
+          </a:bodyPr>
+          <a:lstStyle/>
+          <a:p>
+            <a:pPr>
+              <a:spcAft>
+                <a:spcPts val="500"/>
+              </a:spcAft>
+              <a:defRPr sz="1200">
+                <a:solidFill>
+                  <a:srgbClr val="475569"/>
+                </a:solidFill>
+                <a:latin typeface="Aptos"/>
+              </a:defRPr>
+            </a:pPr>
+            <a:r>
+              <a:t>instance-peer.json</a:t>
+            </a:r>
+          </a:p>
+        </p:txBody>
+      </p:sp>
+      <p:sp>
+        <p:nvSpPr>
+          <p:cNvPr id="12" name="Rounded Rectangle 11"/>
+          <p:cNvSpPr/>
+          <p:nvPr/>
+        </p:nvSpPr>
+        <p:spPr>
+          <a:xfrm>
+            <a:off x="8412480" y="1325880"/>
+            <a:ext cx="2743200" cy="1143000"/>
+          </a:xfrm>
+          <a:prstGeom prst="roundRect">
+            <a:avLst/>
+          </a:prstGeom>
+          <a:solidFill>
+            <a:srgbClr val="FFFFFF"/>
+          </a:solidFill>
+          <a:ln w="12700">
+            <a:solidFill>
+              <a:srgbClr val="94A3B8"/>
+            </a:solidFill>
+          </a:ln>
+        </p:spPr>
+        <p:style>
+          <a:lnRef idx="1">
+            <a:schemeClr val="accent1"/>
+          </a:lnRef>
+          <a:fillRef idx="3">
+            <a:schemeClr val="accent1"/>
+          </a:fillRef>
+          <a:effectRef idx="2">
+            <a:schemeClr val="accent1"/>
+          </a:effectRef>
+          <a:fontRef idx="minor">
+            <a:schemeClr val="lt1"/>
+          </a:fontRef>
+        </p:style>
+        <p:txBody>
+          <a:bodyPr rtlCol="0" anchor="ctr"/>
+          <a:lstStyle/>
+          <a:p>
+            <a:pPr algn="ctr"/>
+          </a:p>
+        </p:txBody>
+      </p:sp>
+      <p:sp>
+        <p:nvSpPr>
+          <p:cNvPr id="13" name="Rectangle 12"/>
+          <p:cNvSpPr/>
+          <p:nvPr/>
+        </p:nvSpPr>
+        <p:spPr>
+          <a:xfrm>
+            <a:off x="8412480" y="1325880"/>
+            <a:ext cx="73152" cy="1143000"/>
+          </a:xfrm>
+          <a:prstGeom prst="rect">
+            <a:avLst/>
+          </a:prstGeom>
+          <a:solidFill>
+            <a:srgbClr val="16A34A"/>
+          </a:solidFill>
+          <a:ln>
+            <a:solidFill>
+              <a:srgbClr val="16A34A"/>
+            </a:solidFill>
+          </a:ln>
+        </p:spPr>
+        <p:style>
+          <a:lnRef idx="1">
+            <a:schemeClr val="accent1"/>
+          </a:lnRef>
+          <a:fillRef idx="3">
+            <a:schemeClr val="accent1"/>
+          </a:fillRef>
+          <a:effectRef idx="2">
+            <a:schemeClr val="accent1"/>
+          </a:effectRef>
+          <a:fontRef idx="minor">
+            <a:schemeClr val="lt1"/>
+          </a:fontRef>
+        </p:style>
+        <p:txBody>
+          <a:bodyPr rtlCol="0" anchor="ctr"/>
+          <a:lstStyle/>
+          <a:p>
+            <a:pPr algn="ctr"/>
+          </a:p>
+        </p:txBody>
+      </p:sp>
+      <p:sp>
+        <p:nvSpPr>
+          <p:cNvPr id="14" name="TextBox 13"/>
+          <p:cNvSpPr txBox="1"/>
+          <p:nvPr/>
+        </p:nvSpPr>
+        <p:spPr>
+          <a:xfrm>
+            <a:off x="8613648" y="1490472"/>
+            <a:ext cx="2359152" cy="274320"/>
+          </a:xfrm>
+          <a:prstGeom prst="rect">
+            <a:avLst/>
+          </a:prstGeom>
+          <a:noFill/>
+        </p:spPr>
+        <p:txBody>
+          <a:bodyPr wrap="none">
+            <a:spAutoFit/>
+          </a:bodyPr>
+          <a:lstStyle/>
+          <a:p>
+            <a:pPr>
+              <a:defRPr sz="1600" b="1">
+                <a:solidFill>
+                  <a:srgbClr val="0F172A"/>
+                </a:solidFill>
+                <a:latin typeface="Aptos"/>
+              </a:defRPr>
+            </a:pPr>
+            <a:r>
+              <a:t>发送前解析</a:t>
+            </a:r>
+          </a:p>
+        </p:txBody>
+      </p:sp>
+      <p:sp>
+        <p:nvSpPr>
+          <p:cNvPr id="15" name="TextBox 14"/>
+          <p:cNvSpPr txBox="1"/>
+          <p:nvPr/>
+        </p:nvSpPr>
+        <p:spPr>
+          <a:xfrm>
+            <a:off x="8613648" y="1856231"/>
+            <a:ext cx="2359152" cy="457200"/>
+          </a:xfrm>
+          <a:prstGeom prst="rect">
+            <a:avLst/>
+          </a:prstGeom>
+          <a:noFill/>
+        </p:spPr>
+        <p:txBody>
+          <a:bodyPr wrap="square">
+            <a:spAutoFit/>
+          </a:bodyPr>
+          <a:lstStyle/>
+          <a:p>
+            <a:pPr>
+              <a:spcAft>
+                <a:spcPts val="500"/>
+              </a:spcAft>
+              <a:defRPr sz="1200">
+                <a:solidFill>
+                  <a:srgbClr val="475569"/>
+                </a:solidFill>
+                <a:latin typeface="Aptos"/>
+              </a:defRPr>
+            </a:pPr>
+            <a:r>
+              <a:t>instanceId -&gt; peerId</a:t>
+            </a:r>
+          </a:p>
+        </p:txBody>
+      </p:sp>
+      <p:cxnSp>
+        <p:nvCxnSpPr>
+          <p:cNvPr id="16" name="Connector 15"/>
+          <p:cNvCxnSpPr/>
+          <p:nvPr/>
+        </p:nvCxnSpPr>
+        <p:spPr>
+          <a:xfrm>
+            <a:off x="3520440" y="1901952"/>
+            <a:ext cx="960120" cy="0"/>
+          </a:xfrm>
+          <a:prstGeom prst="line">
+            <a:avLst/>
+          </a:prstGeom>
+          <a:ln w="25400">
+            <a:solidFill>
+              <a:srgbClr val="94A3B8"/>
+            </a:solidFill>
+          </a:ln>
+        </p:spPr>
+        <p:style>
+          <a:lnRef idx="2">
+            <a:schemeClr val="accent1"/>
+          </a:lnRef>
+          <a:fillRef idx="0">
+            <a:schemeClr val="accent1"/>
+          </a:fillRef>
+          <a:effectRef idx="1">
+            <a:schemeClr val="accent1"/>
+          </a:effectRef>
+          <a:fontRef idx="minor">
+            <a:schemeClr val="tx1"/>
+          </a:fontRef>
+        </p:style>
+      </p:cxnSp>
+      <p:cxnSp>
+        <p:nvCxnSpPr>
+          <p:cNvPr id="17" name="Connector 16"/>
+          <p:cNvCxnSpPr/>
+          <p:nvPr/>
+        </p:nvCxnSpPr>
+        <p:spPr>
+          <a:xfrm>
+            <a:off x="7360920" y="1901952"/>
+            <a:ext cx="960120" cy="0"/>
+          </a:xfrm>
+          <a:prstGeom prst="line">
+            <a:avLst/>
+          </a:prstGeom>
+          <a:ln w="25400">
+            <a:solidFill>
+              <a:srgbClr val="94A3B8"/>
+            </a:solidFill>
+          </a:ln>
+        </p:spPr>
+        <p:style>
+          <a:lnRef idx="2">
+            <a:schemeClr val="accent1"/>
+          </a:lnRef>
+          <a:fillRef idx="0">
+            <a:schemeClr val="accent1"/>
+          </a:fillRef>
+          <a:effectRef idx="1">
+            <a:schemeClr val="accent1"/>
+          </a:effectRef>
+          <a:fontRef idx="minor">
+            <a:schemeClr val="tx1"/>
+          </a:fontRef>
+        </p:style>
+      </p:cxnSp>
+      <p:sp>
+        <p:nvSpPr>
+          <p:cNvPr id="18" name="TextBox 17"/>
+          <p:cNvSpPr txBox="1"/>
+          <p:nvPr/>
+        </p:nvSpPr>
+        <p:spPr>
+          <a:xfrm>
+            <a:off x="914400" y="3154680"/>
+            <a:ext cx="10058400" cy="1463040"/>
+          </a:xfrm>
+          <a:prstGeom prst="rect">
+            <a:avLst/>
+          </a:prstGeom>
+          <a:noFill/>
+        </p:spPr>
+        <p:txBody>
+          <a:bodyPr wrap="none">
+            <a:spAutoFit/>
+          </a:bodyPr>
+          <a:lstStyle/>
+          <a:p>
+            <a:pPr>
+              <a:spcAft>
+                <a:spcPts val="800"/>
+              </a:spcAft>
+              <a:defRPr sz="1800">
+                <a:solidFill>
+                  <a:srgbClr val="0F172A"/>
+                </a:solidFill>
+                <a:latin typeface="Aptos"/>
+              </a:defRPr>
+            </a:pPr>
+            <a:r>
+              <a:t>映射表由插件自动维护，路径为 ~/.openclaw/libp2p/instance-peer.json。</a:t>
+            </a:r>
+          </a:p>
+          <a:p>
+            <a:pPr>
+              <a:spcAft>
+                <a:spcPts val="800"/>
+              </a:spcAft>
+              <a:defRPr sz="1800">
+                <a:solidFill>
+                  <a:srgbClr val="0F172A"/>
+                </a:solidFill>
+                <a:latin typeface="Aptos"/>
+              </a:defRPr>
+            </a:pPr>
+            <a:r>
+              <a:t>查询工具：p2p_list_instances / p2p_resolve_instance。</a:t>
+            </a:r>
+          </a:p>
+          <a:p>
+            <a:pPr>
+              <a:spcAft>
+                <a:spcPts val="800"/>
+              </a:spcAft>
+              <a:defRPr sz="1800">
+                <a:solidFill>
+                  <a:srgbClr val="0F172A"/>
+                </a:solidFill>
+                <a:latin typeface="Aptos"/>
+              </a:defRPr>
+            </a:pPr>
+            <a:r>
+              <a:t>用户不需要在配置中手写 peerId 映射。</a:t>
+            </a:r>
+          </a:p>
+        </p:txBody>
+      </p:sp>
+      <p:sp>
+        <p:nvSpPr>
+          <p:cNvPr id="19" name="TextBox 18"/>
+          <p:cNvSpPr txBox="1"/>
+          <p:nvPr/>
+        </p:nvSpPr>
+        <p:spPr>
+          <a:xfrm>
+            <a:off x="502920" y="6473952"/>
+            <a:ext cx="7315200" cy="228600"/>
+          </a:xfrm>
+          <a:prstGeom prst="rect">
+            <a:avLst/>
+          </a:prstGeom>
+          <a:noFill/>
+        </p:spPr>
+        <p:txBody>
+          <a:bodyPr wrap="none">
+            <a:spAutoFit/>
+          </a:bodyPr>
+          <a:lstStyle/>
+          <a:p>
+            <a:pPr>
+              <a:defRPr sz="900">
+                <a:solidFill>
+                  <a:srgbClr val="475569"/>
+                </a:solidFill>
+                <a:latin typeface="Aptos"/>
+              </a:defRPr>
+            </a:pPr>
+            <a:r>
+              <a:t>路由 / 05</a:t>
+            </a:r>
+          </a:p>
+        </p:txBody>
+      </p:sp>
+    </p:spTree>
+  </p:cSld>
+  <p:clrMapOvr>
+    <a:masterClrMapping/>
+  </p:clrMapOvr>
+</p:sld>
+</file>
+
+<file path=ppt/slides/slide6.xml><?xml version="1.0" encoding="utf-8"?>
+<p:sld xmlns:a="http://schemas.openxmlformats.org/drawingml/2006/main" xmlns:p="http://schemas.openxmlformats.org/presentationml/2006/main" xmlns:r="http://schemas.openxmlformats.org/officeDocument/2006/relationships">
+  <p:cSld>
+    <p:bg>
+      <p:bgPr>
+        <a:solidFill>
+          <a:srgbClr val="F8FAFC"/>
+        </a:solidFill>
+        <a:effectLst/>
+      </p:bgPr>
+    </p:bg>
+    <p:spTree>
+      <p:nvGrpSpPr>
+        <p:cNvPr id="1" name=""/>
+        <p:cNvGrpSpPr/>
+        <p:nvPr/>
+      </p:nvGrpSpPr>
+      <p:grpSpPr/>
+      <p:sp>
+        <p:nvSpPr>
+          <p:cNvPr id="2" name="TextBox 1"/>
+          <p:cNvSpPr txBox="1"/>
+          <p:nvPr/>
+        </p:nvSpPr>
+        <p:spPr>
+          <a:xfrm>
+            <a:off x="502920" y="292608"/>
+            <a:ext cx="7772400" cy="502920"/>
+          </a:xfrm>
+          <a:prstGeom prst="rect">
+            <a:avLst/>
+          </a:prstGeom>
+          <a:noFill/>
+        </p:spPr>
+        <p:txBody>
+          <a:bodyPr wrap="none">
+            <a:spAutoFit/>
+          </a:bodyPr>
+          <a:lstStyle/>
+          <a:p>
+            <a:pPr>
+              <a:defRPr sz="3000" b="1">
+                <a:solidFill>
+                  <a:srgbClr val="0F172A"/>
+                </a:solidFill>
+                <a:latin typeface="Aptos"/>
+              </a:defRPr>
+            </a:pPr>
+            <a:r>
+              <a:t>P2P 网络中传输的是结构化消息</a:t>
+            </a:r>
+          </a:p>
+        </p:txBody>
+      </p:sp>
+      <p:sp>
+        <p:nvSpPr>
+          <p:cNvPr id="3" name="Rounded Rectangle 2"/>
+          <p:cNvSpPr/>
+          <p:nvPr/>
+        </p:nvSpPr>
+        <p:spPr>
+          <a:xfrm>
+            <a:off x="9326880" y="384048"/>
+            <a:ext cx="2240280" cy="310896"/>
+          </a:xfrm>
+          <a:prstGeom prst="roundRect">
+            <a:avLst/>
+          </a:prstGeom>
+          <a:solidFill>
+            <a:srgbClr val="CCFBF1"/>
+          </a:solidFill>
+          <a:ln>
+            <a:solidFill>
+              <a:srgbClr val="CCFBF1"/>
+            </a:solidFill>
+          </a:ln>
+        </p:spPr>
+        <p:style>
+          <a:lnRef idx="1">
+            <a:schemeClr val="accent1"/>
+          </a:lnRef>
+          <a:fillRef idx="3">
+            <a:schemeClr val="accent1"/>
+          </a:fillRef>
+          <a:effectRef idx="2">
+            <a:schemeClr val="accent1"/>
+          </a:effectRef>
+          <a:fontRef idx="minor">
+            <a:schemeClr val="lt1"/>
+          </a:fontRef>
+        </p:style>
+        <p:txBody>
+          <a:bodyPr rtlCol="0" anchor="ctr"/>
+          <a:lstStyle/>
+          <a:p>
+            <a:pPr algn="ctr">
+              <a:defRPr sz="1000" b="1">
+                <a:solidFill>
+                  <a:srgbClr val="0F766E"/>
+                </a:solidFill>
+                <a:latin typeface="Aptos"/>
+              </a:defRPr>
+            </a:pPr>
+            <a:r>
+              <a:t>消息</a:t>
+            </a:r>
+          </a:p>
+        </p:txBody>
+      </p:sp>
+      <p:sp>
+        <p:nvSpPr>
+          <p:cNvPr id="4" name="Rounded Rectangle 3"/>
+          <p:cNvSpPr/>
+          <p:nvPr/>
+        </p:nvSpPr>
+        <p:spPr>
+          <a:xfrm>
+            <a:off x="685800" y="1417320"/>
+            <a:ext cx="3429000" cy="2880360"/>
+          </a:xfrm>
+          <a:prstGeom prst="roundRect">
+            <a:avLst/>
+          </a:prstGeom>
+          <a:solidFill>
+            <a:srgbClr val="FFFFFF"/>
+          </a:solidFill>
+          <a:ln w="12700">
+            <a:solidFill>
+              <a:srgbClr val="94A3B8"/>
+            </a:solidFill>
+          </a:ln>
+        </p:spPr>
+        <p:style>
+          <a:lnRef idx="1">
+            <a:schemeClr val="accent1"/>
+          </a:lnRef>
+          <a:fillRef idx="3">
+            <a:schemeClr val="accent1"/>
+          </a:fillRef>
+          <a:effectRef idx="2">
+            <a:schemeClr val="accent1"/>
+          </a:effectRef>
+          <a:fontRef idx="minor">
+            <a:schemeClr val="lt1"/>
+          </a:fontRef>
+        </p:style>
+        <p:txBody>
+          <a:bodyPr rtlCol="0" anchor="ctr"/>
+          <a:lstStyle/>
+          <a:p>
+            <a:pPr algn="ctr"/>
+          </a:p>
+        </p:txBody>
+      </p:sp>
+      <p:sp>
+        <p:nvSpPr>
+          <p:cNvPr id="5" name="Rectangle 4"/>
+          <p:cNvSpPr/>
+          <p:nvPr/>
+        </p:nvSpPr>
+        <p:spPr>
+          <a:xfrm>
+            <a:off x="685800" y="1417320"/>
+            <a:ext cx="73152" cy="2880360"/>
+          </a:xfrm>
+          <a:prstGeom prst="rect">
+            <a:avLst/>
+          </a:prstGeom>
+          <a:solidFill>
+            <a:srgbClr val="0F766E"/>
+          </a:solidFill>
+          <a:ln>
+            <a:solidFill>
+              <a:srgbClr val="0F766E"/>
+            </a:solidFill>
+          </a:ln>
+        </p:spPr>
+        <p:style>
+          <a:lnRef idx="1">
+            <a:schemeClr val="accent1"/>
+          </a:lnRef>
+          <a:fillRef idx="3">
+            <a:schemeClr val="accent1"/>
+          </a:fillRef>
+          <a:effectRef idx="2">
+            <a:schemeClr val="accent1"/>
+          </a:effectRef>
+          <a:fontRef idx="minor">
+            <a:schemeClr val="lt1"/>
+          </a:fontRef>
+        </p:style>
+        <p:txBody>
+          <a:bodyPr rtlCol="0" anchor="ctr"/>
+          <a:lstStyle/>
+          <a:p>
+            <a:pPr algn="ctr"/>
+          </a:p>
+        </p:txBody>
+      </p:sp>
+      <p:sp>
+        <p:nvSpPr>
+          <p:cNvPr id="6" name="TextBox 5"/>
+          <p:cNvSpPr txBox="1"/>
+          <p:nvPr/>
+        </p:nvSpPr>
+        <p:spPr>
+          <a:xfrm>
+            <a:off x="886968" y="1581912"/>
+            <a:ext cx="3044952" cy="274320"/>
+          </a:xfrm>
+          <a:prstGeom prst="rect">
+            <a:avLst/>
+          </a:prstGeom>
+          <a:noFill/>
+        </p:spPr>
+        <p:txBody>
+          <a:bodyPr wrap="none">
+            <a:spAutoFit/>
+          </a:bodyPr>
+          <a:lstStyle/>
+          <a:p>
+            <a:pPr>
+              <a:defRPr sz="1600" b="1">
+                <a:solidFill>
+                  <a:srgbClr val="0F172A"/>
+                </a:solidFill>
+                <a:latin typeface="Aptos"/>
+              </a:defRPr>
+            </a:pPr>
+            <a:r>
+              <a:t>instance-announce</a:t>
+            </a:r>
+          </a:p>
+        </p:txBody>
+      </p:sp>
+      <p:sp>
+        <p:nvSpPr>
+          <p:cNvPr id="7" name="TextBox 6"/>
+          <p:cNvSpPr txBox="1"/>
+          <p:nvPr/>
+        </p:nvSpPr>
+        <p:spPr>
+          <a:xfrm>
+            <a:off x="886968" y="1947672"/>
+            <a:ext cx="3044952" cy="2194560"/>
+          </a:xfrm>
+          <a:prstGeom prst="rect">
+            <a:avLst/>
+          </a:prstGeom>
+          <a:noFill/>
+        </p:spPr>
+        <p:txBody>
+          <a:bodyPr wrap="square">
+            <a:spAutoFit/>
+          </a:bodyPr>
+          <a:lstStyle/>
+          <a:p>
+            <a:pPr>
+              <a:spcAft>
+                <a:spcPts val="500"/>
+              </a:spcAft>
+              <a:defRPr sz="1200">
+                <a:solidFill>
+                  <a:srgbClr val="475569"/>
+                </a:solidFill>
+                <a:latin typeface="Aptos"/>
+              </a:defRPr>
+            </a:pPr>
+            <a:r>
+              <a:t>路由公告</a:t>
+            </a:r>
+          </a:p>
+          <a:p>
+            <a:pPr>
+              <a:spcAft>
+                <a:spcPts val="500"/>
+              </a:spcAft>
+              <a:defRPr sz="1200">
+                <a:solidFill>
+                  <a:srgbClr val="475569"/>
+                </a:solidFill>
+                <a:latin typeface="Aptos"/>
+              </a:defRPr>
+            </a:pPr>
+            <a:r>
+              <a:t>instanceId / peerId</a:t>
+            </a:r>
+          </a:p>
+          <a:p>
+            <a:pPr>
+              <a:spcAft>
+                <a:spcPts val="500"/>
+              </a:spcAft>
+              <a:defRPr sz="1200">
+                <a:solidFill>
+                  <a:srgbClr val="475569"/>
+                </a:solidFill>
+                <a:latin typeface="Aptos"/>
+              </a:defRPr>
+            </a:pPr>
+            <a:r>
+              <a:t>multiaddrs / pubkey</a:t>
+            </a:r>
+          </a:p>
+        </p:txBody>
+      </p:sp>
+      <p:sp>
+        <p:nvSpPr>
+          <p:cNvPr id="8" name="Rounded Rectangle 7"/>
+          <p:cNvSpPr/>
+          <p:nvPr/>
+        </p:nvSpPr>
+        <p:spPr>
+          <a:xfrm>
+            <a:off x="4389120" y="1417320"/>
+            <a:ext cx="3429000" cy="2880360"/>
+          </a:xfrm>
+          <a:prstGeom prst="roundRect">
+            <a:avLst/>
+          </a:prstGeom>
+          <a:solidFill>
+            <a:srgbClr val="FFFFFF"/>
+          </a:solidFill>
+          <a:ln w="12700">
+            <a:solidFill>
+              <a:srgbClr val="94A3B8"/>
+            </a:solidFill>
+          </a:ln>
+        </p:spPr>
+        <p:style>
+          <a:lnRef idx="1">
+            <a:schemeClr val="accent1"/>
+          </a:lnRef>
+          <a:fillRef idx="3">
+            <a:schemeClr val="accent1"/>
+          </a:fillRef>
+          <a:effectRef idx="2">
+            <a:schemeClr val="accent1"/>
+          </a:effectRef>
+          <a:fontRef idx="minor">
+            <a:schemeClr val="lt1"/>
+          </a:fontRef>
+        </p:style>
+        <p:txBody>
+          <a:bodyPr rtlCol="0" anchor="ctr"/>
+          <a:lstStyle/>
+          <a:p>
+            <a:pPr algn="ctr"/>
+          </a:p>
+        </p:txBody>
+      </p:sp>
+      <p:sp>
+        <p:nvSpPr>
+          <p:cNvPr id="9" name="Rectangle 8"/>
+          <p:cNvSpPr/>
+          <p:nvPr/>
+        </p:nvSpPr>
+        <p:spPr>
+          <a:xfrm>
+            <a:off x="4389120" y="1417320"/>
+            <a:ext cx="73152" cy="2880360"/>
+          </a:xfrm>
+          <a:prstGeom prst="rect">
+            <a:avLst/>
+          </a:prstGeom>
+          <a:solidFill>
+            <a:srgbClr val="0F766E"/>
+          </a:solidFill>
+          <a:ln>
+            <a:solidFill>
+              <a:srgbClr val="0F766E"/>
+            </a:solidFill>
+          </a:ln>
+        </p:spPr>
+        <p:style>
+          <a:lnRef idx="1">
+            <a:schemeClr val="accent1"/>
+          </a:lnRef>
+          <a:fillRef idx="3">
+            <a:schemeClr val="accent1"/>
+          </a:fillRef>
+          <a:effectRef idx="2">
+            <a:schemeClr val="accent1"/>
+          </a:effectRef>
+          <a:fontRef idx="minor">
+            <a:schemeClr val="lt1"/>
+          </a:fontRef>
+        </p:style>
+        <p:txBody>
+          <a:bodyPr rtlCol="0" anchor="ctr"/>
+          <a:lstStyle/>
+          <a:p>
+            <a:pPr algn="ctr"/>
+          </a:p>
+        </p:txBody>
+      </p:sp>
+      <p:sp>
+        <p:nvSpPr>
+          <p:cNvPr id="10" name="TextBox 9"/>
+          <p:cNvSpPr txBox="1"/>
+          <p:nvPr/>
+        </p:nvSpPr>
+        <p:spPr>
+          <a:xfrm>
+            <a:off x="4590288" y="1581912"/>
+            <a:ext cx="3044952" cy="274320"/>
+          </a:xfrm>
+          <a:prstGeom prst="rect">
+            <a:avLst/>
+          </a:prstGeom>
+          <a:noFill/>
+        </p:spPr>
+        <p:txBody>
+          <a:bodyPr wrap="none">
+            <a:spAutoFit/>
+          </a:bodyPr>
+          <a:lstStyle/>
+          <a:p>
+            <a:pPr>
+              <a:defRPr sz="1600" b="1">
+                <a:solidFill>
+                  <a:srgbClr val="0F172A"/>
+                </a:solidFill>
+                <a:latin typeface="Aptos"/>
+              </a:defRPr>
+            </a:pPr>
+            <a:r>
+              <a:t>user-message</a:t>
+            </a:r>
+          </a:p>
+        </p:txBody>
+      </p:sp>
+      <p:sp>
+        <p:nvSpPr>
+          <p:cNvPr id="11" name="TextBox 10"/>
+          <p:cNvSpPr txBox="1"/>
+          <p:nvPr/>
+        </p:nvSpPr>
+        <p:spPr>
+          <a:xfrm>
+            <a:off x="4590288" y="1947672"/>
+            <a:ext cx="3044952" cy="2194560"/>
+          </a:xfrm>
+          <a:prstGeom prst="rect">
+            <a:avLst/>
+          </a:prstGeom>
+          <a:noFill/>
+        </p:spPr>
+        <p:txBody>
+          <a:bodyPr wrap="square">
+            <a:spAutoFit/>
+          </a:bodyPr>
+          <a:lstStyle/>
+          <a:p>
+            <a:pPr>
+              <a:spcAft>
+                <a:spcPts val="500"/>
+              </a:spcAft>
+              <a:defRPr sz="1200">
+                <a:solidFill>
+                  <a:srgbClr val="475569"/>
+                </a:solidFill>
+                <a:latin typeface="Aptos"/>
+              </a:defRPr>
+            </a:pPr>
+            <a:r>
+              <a:t>messageId</a:t>
+            </a:r>
+          </a:p>
+          <a:p>
+            <a:pPr>
+              <a:spcAft>
+                <a:spcPts val="500"/>
+              </a:spcAft>
+              <a:defRPr sz="1200">
+                <a:solidFill>
+                  <a:srgbClr val="475569"/>
+                </a:solidFill>
+                <a:latin typeface="Aptos"/>
+              </a:defRPr>
+            </a:pPr>
+            <a:r>
+              <a:t>fromInstanceId / toInstanceId</a:t>
+            </a:r>
+          </a:p>
+          <a:p>
+            <a:pPr>
+              <a:spcAft>
+                <a:spcPts val="500"/>
+              </a:spcAft>
+              <a:defRPr sz="1200">
+                <a:solidFill>
+                  <a:srgbClr val="475569"/>
+                </a:solidFill>
+                <a:latin typeface="Aptos"/>
+              </a:defRPr>
+            </a:pPr>
+            <a:r>
+              <a:t>text + reply metadata</a:t>
+            </a:r>
+          </a:p>
+        </p:txBody>
+      </p:sp>
+      <p:sp>
+        <p:nvSpPr>
+          <p:cNvPr id="12" name="Rounded Rectangle 11"/>
+          <p:cNvSpPr/>
+          <p:nvPr/>
+        </p:nvSpPr>
+        <p:spPr>
+          <a:xfrm>
+            <a:off x="8092440" y="1417320"/>
+            <a:ext cx="3429000" cy="2880360"/>
+          </a:xfrm>
+          <a:prstGeom prst="roundRect">
+            <a:avLst/>
+          </a:prstGeom>
+          <a:solidFill>
+            <a:srgbClr val="FFFFFF"/>
+          </a:solidFill>
+          <a:ln w="12700">
+            <a:solidFill>
+              <a:srgbClr val="94A3B8"/>
+            </a:solidFill>
+          </a:ln>
+        </p:spPr>
+        <p:style>
+          <a:lnRef idx="1">
+            <a:schemeClr val="accent1"/>
+          </a:lnRef>
+          <a:fillRef idx="3">
+            <a:schemeClr val="accent1"/>
+          </a:fillRef>
+          <a:effectRef idx="2">
+            <a:schemeClr val="accent1"/>
+          </a:effectRef>
+          <a:fontRef idx="minor">
+            <a:schemeClr val="lt1"/>
+          </a:fontRef>
+        </p:style>
+        <p:txBody>
+          <a:bodyPr rtlCol="0" anchor="ctr"/>
+          <a:lstStyle/>
+          <a:p>
+            <a:pPr algn="ctr"/>
+          </a:p>
+        </p:txBody>
+      </p:sp>
+      <p:sp>
+        <p:nvSpPr>
+          <p:cNvPr id="13" name="Rectangle 12"/>
+          <p:cNvSpPr/>
+          <p:nvPr/>
+        </p:nvSpPr>
+        <p:spPr>
+          <a:xfrm>
+            <a:off x="8092440" y="1417320"/>
+            <a:ext cx="73152" cy="2880360"/>
+          </a:xfrm>
+          <a:prstGeom prst="rect">
+            <a:avLst/>
+          </a:prstGeom>
+          <a:solidFill>
+            <a:srgbClr val="16A34A"/>
+          </a:solidFill>
+          <a:ln>
+            <a:solidFill>
+              <a:srgbClr val="16A34A"/>
+            </a:solidFill>
+          </a:ln>
+        </p:spPr>
+        <p:style>
+          <a:lnRef idx="1">
+            <a:schemeClr val="accent1"/>
+          </a:lnRef>
+          <a:fillRef idx="3">
+            <a:schemeClr val="accent1"/>
+          </a:fillRef>
+          <a:effectRef idx="2">
+            <a:schemeClr val="accent1"/>
+          </a:effectRef>
+          <a:fontRef idx="minor">
+            <a:schemeClr val="lt1"/>
+          </a:fontRef>
+        </p:style>
+        <p:txBody>
+          <a:bodyPr rtlCol="0" anchor="ctr"/>
+          <a:lstStyle/>
+          <a:p>
+            <a:pPr algn="ctr"/>
+          </a:p>
+        </p:txBody>
+      </p:sp>
+      <p:sp>
+        <p:nvSpPr>
+          <p:cNvPr id="14" name="TextBox 13"/>
+          <p:cNvSpPr txBox="1"/>
+          <p:nvPr/>
+        </p:nvSpPr>
+        <p:spPr>
+          <a:xfrm>
+            <a:off x="8293608" y="1581912"/>
+            <a:ext cx="3044952" cy="274320"/>
+          </a:xfrm>
+          <a:prstGeom prst="rect">
+            <a:avLst/>
+          </a:prstGeom>
+          <a:noFill/>
+        </p:spPr>
+        <p:txBody>
+          <a:bodyPr wrap="none">
+            <a:spAutoFit/>
+          </a:bodyPr>
+          <a:lstStyle/>
+          <a:p>
+            <a:pPr>
+              <a:defRPr sz="1600" b="1">
+                <a:solidFill>
+                  <a:srgbClr val="0F172A"/>
+                </a:solidFill>
+                <a:latin typeface="Aptos"/>
+              </a:defRPr>
+            </a:pPr>
+            <a:r>
+              <a:t>delivery-ack</a:t>
+            </a:r>
+          </a:p>
+        </p:txBody>
+      </p:sp>
+      <p:sp>
+        <p:nvSpPr>
+          <p:cNvPr id="15" name="TextBox 14"/>
+          <p:cNvSpPr txBox="1"/>
+          <p:nvPr/>
+        </p:nvSpPr>
+        <p:spPr>
+          <a:xfrm>
+            <a:off x="8293608" y="1947672"/>
+            <a:ext cx="3044952" cy="2194560"/>
+          </a:xfrm>
+          <a:prstGeom prst="rect">
+            <a:avLst/>
+          </a:prstGeom>
+          <a:noFill/>
+        </p:spPr>
+        <p:txBody>
+          <a:bodyPr wrap="square">
+            <a:spAutoFit/>
+          </a:bodyPr>
+          <a:lstStyle/>
+          <a:p>
+            <a:pPr>
+              <a:spcAft>
+                <a:spcPts val="500"/>
+              </a:spcAft>
+              <a:defRPr sz="1200">
+                <a:solidFill>
+                  <a:srgbClr val="475569"/>
+                </a:solidFill>
+                <a:latin typeface="Aptos"/>
+              </a:defRPr>
+            </a:pPr>
+            <a:r>
+              <a:t>ackFor</a:t>
+            </a:r>
+          </a:p>
+          <a:p>
+            <a:pPr>
+              <a:spcAft>
+                <a:spcPts val="500"/>
+              </a:spcAft>
+              <a:defRPr sz="1200">
+                <a:solidFill>
+                  <a:srgbClr val="475569"/>
+                </a:solidFill>
+                <a:latin typeface="Aptos"/>
+              </a:defRPr>
+            </a:pPr>
+            <a:r>
+              <a:t>ok true/false</a:t>
+            </a:r>
+          </a:p>
+          <a:p>
+            <a:pPr>
+              <a:spcAft>
+                <a:spcPts val="500"/>
+              </a:spcAft>
+              <a:defRPr sz="1200">
+                <a:solidFill>
+                  <a:srgbClr val="475569"/>
+                </a:solidFill>
+                <a:latin typeface="Aptos"/>
+              </a:defRPr>
+            </a:pPr>
+            <a:r>
+              <a:t>error / inboundChannel</a:t>
+            </a:r>
+          </a:p>
+        </p:txBody>
+      </p:sp>
+      <p:sp>
+        <p:nvSpPr>
+          <p:cNvPr id="16" name="TextBox 15"/>
+          <p:cNvSpPr txBox="1"/>
+          <p:nvPr/>
+        </p:nvSpPr>
+        <p:spPr>
+          <a:xfrm>
+            <a:off x="960120" y="4892040"/>
+            <a:ext cx="10058400" cy="502920"/>
+          </a:xfrm>
+          <a:prstGeom prst="rect">
+            <a:avLst/>
+          </a:prstGeom>
+          <a:noFill/>
+        </p:spPr>
+        <p:txBody>
+          <a:bodyPr wrap="none">
+            <a:spAutoFit/>
+          </a:bodyPr>
+          <a:lstStyle/>
+          <a:p>
+            <a:pPr>
+              <a:spcAft>
+                <a:spcPts val="800"/>
+              </a:spcAft>
+              <a:defRPr sz="1900">
+                <a:solidFill>
+                  <a:srgbClr val="0F172A"/>
+                </a:solidFill>
+                <a:latin typeface="Aptos"/>
+              </a:defRPr>
+            </a:pPr>
+            <a:r>
+              <a:t>这三类消息把“发现、发送、确认”拆成清晰协议边界。</a:t>
+            </a:r>
+          </a:p>
+        </p:txBody>
+      </p:sp>
+      <p:sp>
+        <p:nvSpPr>
+          <p:cNvPr id="17" name="TextBox 16"/>
+          <p:cNvSpPr txBox="1"/>
+          <p:nvPr/>
+        </p:nvSpPr>
+        <p:spPr>
+          <a:xfrm>
+            <a:off x="502920" y="6473952"/>
+            <a:ext cx="7315200" cy="228600"/>
+          </a:xfrm>
+          <a:prstGeom prst="rect">
+            <a:avLst/>
+          </a:prstGeom>
+          <a:noFill/>
+        </p:spPr>
+        <p:txBody>
+          <a:bodyPr wrap="none">
+            <a:spAutoFit/>
+          </a:bodyPr>
+          <a:lstStyle/>
+          <a:p>
+            <a:pPr>
+              <a:defRPr sz="900">
+                <a:solidFill>
+                  <a:srgbClr val="475569"/>
+                </a:solidFill>
+                <a:latin typeface="Aptos"/>
+              </a:defRPr>
+            </a:pPr>
+            <a:r>
+              <a:t>消息 / 06</a:t>
+            </a:r>
+          </a:p>
+        </p:txBody>
+      </p:sp>
+    </p:spTree>
+  </p:cSld>
+  <p:clrMapOvr>
+    <a:masterClrMapping/>
+  </p:clrMapOvr>
+</p:sld>
+</file>
+
+<file path=ppt/slides/slide7.xml><?xml version="1.0" encoding="utf-8"?>
+<p:sld xmlns:a="http://schemas.openxmlformats.org/drawingml/2006/main" xmlns:p="http://schemas.openxmlformats.org/presentationml/2006/main" xmlns:r="http://schemas.openxmlformats.org/officeDocument/2006/relationships">
+  <p:cSld>
+    <p:bg>
+      <p:bgPr>
+        <a:solidFill>
+          <a:srgbClr val="F8FAFC"/>
+        </a:solidFill>
+        <a:effectLst/>
+      </p:bgPr>
+    </p:bg>
+    <p:spTree>
+      <p:nvGrpSpPr>
+        <p:cNvPr id="1" name=""/>
+        <p:cNvGrpSpPr/>
+        <p:nvPr/>
+      </p:nvGrpSpPr>
+      <p:grpSpPr/>
+      <p:sp>
+        <p:nvSpPr>
+          <p:cNvPr id="2" name="TextBox 1"/>
+          <p:cNvSpPr txBox="1"/>
+          <p:nvPr/>
+        </p:nvSpPr>
+        <p:spPr>
+          <a:xfrm>
+            <a:off x="502920" y="292608"/>
+            <a:ext cx="7772400" cy="502920"/>
+          </a:xfrm>
+          <a:prstGeom prst="rect">
+            <a:avLst/>
+          </a:prstGeom>
+          <a:noFill/>
+        </p:spPr>
+        <p:txBody>
+          <a:bodyPr wrap="none">
+            <a:spAutoFit/>
+          </a:bodyPr>
+          <a:lstStyle/>
+          <a:p>
+            <a:pPr>
+              <a:defRPr sz="3000" b="1">
+                <a:solidFill>
+                  <a:srgbClr val="0F172A"/>
+                </a:solidFill>
+                <a:latin typeface="Aptos"/>
+              </a:defRPr>
+            </a:pPr>
+            <a:r>
+              <a:t>用户如何看见 P2P 消息</a:t>
+            </a:r>
+          </a:p>
+        </p:txBody>
+      </p:sp>
+      <p:sp>
+        <p:nvSpPr>
+          <p:cNvPr id="3" name="Rounded Rectangle 2"/>
+          <p:cNvSpPr/>
+          <p:nvPr/>
+        </p:nvSpPr>
+        <p:spPr>
+          <a:xfrm>
+            <a:off x="9326880" y="384048"/>
+            <a:ext cx="2240280" cy="310896"/>
+          </a:xfrm>
+          <a:prstGeom prst="roundRect">
+            <a:avLst/>
+          </a:prstGeom>
+          <a:solidFill>
+            <a:srgbClr val="CCFBF1"/>
+          </a:solidFill>
+          <a:ln>
+            <a:solidFill>
+              <a:srgbClr val="CCFBF1"/>
+            </a:solidFill>
+          </a:ln>
+        </p:spPr>
+        <p:style>
+          <a:lnRef idx="1">
+            <a:schemeClr val="accent1"/>
+          </a:lnRef>
+          <a:fillRef idx="3">
+            <a:schemeClr val="accent1"/>
+          </a:fillRef>
+          <a:effectRef idx="2">
+            <a:schemeClr val="accent1"/>
+          </a:effectRef>
+          <a:fontRef idx="minor">
+            <a:schemeClr val="lt1"/>
+          </a:fontRef>
+        </p:style>
+        <p:txBody>
+          <a:bodyPr rtlCol="0" anchor="ctr"/>
+          <a:lstStyle/>
+          <a:p>
+            <a:pPr algn="ctr">
+              <a:defRPr sz="1000" b="1">
+                <a:solidFill>
+                  <a:srgbClr val="0F766E"/>
+                </a:solidFill>
+                <a:latin typeface="Aptos"/>
+              </a:defRPr>
+            </a:pPr>
+            <a:r>
+              <a:t>投递</a:t>
+            </a:r>
+          </a:p>
+        </p:txBody>
+      </p:sp>
+      <p:sp>
+        <p:nvSpPr>
+          <p:cNvPr id="4" name="Rounded Rectangle 3"/>
+          <p:cNvSpPr/>
+          <p:nvPr/>
+        </p:nvSpPr>
+        <p:spPr>
+          <a:xfrm>
+            <a:off x="731520" y="1417320"/>
+            <a:ext cx="2377440" cy="1143000"/>
+          </a:xfrm>
+          <a:prstGeom prst="roundRect">
+            <a:avLst/>
+          </a:prstGeom>
+          <a:solidFill>
+            <a:srgbClr val="FFFFFF"/>
+          </a:solidFill>
+          <a:ln w="12700">
+            <a:solidFill>
+              <a:srgbClr val="94A3B8"/>
+            </a:solidFill>
+          </a:ln>
+        </p:spPr>
+        <p:style>
+          <a:lnRef idx="1">
+            <a:schemeClr val="accent1"/>
+          </a:lnRef>
+          <a:fillRef idx="3">
+            <a:schemeClr val="accent1"/>
+          </a:fillRef>
+          <a:effectRef idx="2">
+            <a:schemeClr val="accent1"/>
+          </a:effectRef>
+          <a:fontRef idx="minor">
+            <a:schemeClr val="lt1"/>
+          </a:fontRef>
+        </p:style>
+        <p:txBody>
+          <a:bodyPr rtlCol="0" anchor="ctr"/>
+          <a:lstStyle/>
+          <a:p>
+            <a:pPr algn="ctr"/>
+          </a:p>
+        </p:txBody>
+      </p:sp>
+      <p:sp>
+        <p:nvSpPr>
+          <p:cNvPr id="5" name="Rectangle 4"/>
+          <p:cNvSpPr/>
+          <p:nvPr/>
+        </p:nvSpPr>
+        <p:spPr>
+          <a:xfrm>
+            <a:off x="731520" y="1417320"/>
+            <a:ext cx="73152" cy="1143000"/>
+          </a:xfrm>
+          <a:prstGeom prst="rect">
+            <a:avLst/>
+          </a:prstGeom>
+          <a:solidFill>
+            <a:srgbClr val="0F766E"/>
+          </a:solidFill>
+          <a:ln>
+            <a:solidFill>
+              <a:srgbClr val="0F766E"/>
+            </a:solidFill>
+          </a:ln>
+        </p:spPr>
+        <p:style>
+          <a:lnRef idx="1">
+            <a:schemeClr val="accent1"/>
+          </a:lnRef>
+          <a:fillRef idx="3">
+            <a:schemeClr val="accent1"/>
+          </a:fillRef>
+          <a:effectRef idx="2">
+            <a:schemeClr val="accent1"/>
+          </a:effectRef>
+          <a:fontRef idx="minor">
+            <a:schemeClr val="lt1"/>
+          </a:fontRef>
+        </p:style>
+        <p:txBody>
+          <a:bodyPr rtlCol="0" anchor="ctr"/>
+          <a:lstStyle/>
+          <a:p>
+            <a:pPr algn="ctr"/>
+          </a:p>
+        </p:txBody>
+      </p:sp>
+      <p:sp>
+        <p:nvSpPr>
+          <p:cNvPr id="6" name="TextBox 5"/>
+          <p:cNvSpPr txBox="1"/>
+          <p:nvPr/>
+        </p:nvSpPr>
+        <p:spPr>
+          <a:xfrm>
+            <a:off x="932688" y="1581912"/>
+            <a:ext cx="1993392" cy="274320"/>
+          </a:xfrm>
+          <a:prstGeom prst="rect">
+            <a:avLst/>
+          </a:prstGeom>
+          <a:noFill/>
+        </p:spPr>
+        <p:txBody>
+          <a:bodyPr wrap="none">
+            <a:spAutoFit/>
+          </a:bodyPr>
+          <a:lstStyle/>
+          <a:p>
+            <a:pPr>
+              <a:defRPr sz="1600" b="1">
+                <a:solidFill>
+                  <a:srgbClr val="0F172A"/>
+                </a:solidFill>
+                <a:latin typeface="Aptos"/>
+              </a:defRPr>
+            </a:pPr>
+            <a:r>
+              <a:t>远端收到 user-message</a:t>
+            </a:r>
+          </a:p>
+        </p:txBody>
+      </p:sp>
+      <p:sp>
+        <p:nvSpPr>
+          <p:cNvPr id="7" name="TextBox 6"/>
+          <p:cNvSpPr txBox="1"/>
+          <p:nvPr/>
+        </p:nvSpPr>
+        <p:spPr>
+          <a:xfrm>
+            <a:off x="932688" y="1947672"/>
+            <a:ext cx="1993392" cy="457200"/>
+          </a:xfrm>
+          <a:prstGeom prst="rect">
+            <a:avLst/>
+          </a:prstGeom>
+          <a:noFill/>
+        </p:spPr>
+        <p:txBody>
+          <a:bodyPr wrap="square">
+            <a:spAutoFit/>
+          </a:bodyPr>
+          <a:lstStyle/>
+          <a:p>
+            <a:pPr>
+              <a:spcAft>
+                <a:spcPts val="500"/>
+              </a:spcAft>
+              <a:defRPr sz="1200">
+                <a:solidFill>
+                  <a:srgbClr val="475569"/>
+                </a:solidFill>
+                <a:latin typeface="Aptos"/>
+              </a:defRPr>
+            </a:pPr>
+            <a:r>
+              <a:t>校验目标 instanceId</a:t>
+            </a:r>
+          </a:p>
+        </p:txBody>
+      </p:sp>
+      <p:sp>
+        <p:nvSpPr>
+          <p:cNvPr id="8" name="Rounded Rectangle 7"/>
+          <p:cNvSpPr/>
+          <p:nvPr/>
+        </p:nvSpPr>
+        <p:spPr>
+          <a:xfrm>
+            <a:off x="3657600" y="1417320"/>
+            <a:ext cx="2377440" cy="1143000"/>
+          </a:xfrm>
+          <a:prstGeom prst="roundRect">
+            <a:avLst/>
+          </a:prstGeom>
+          <a:solidFill>
+            <a:srgbClr val="FFFFFF"/>
+          </a:solidFill>
+          <a:ln w="12700">
+            <a:solidFill>
+              <a:srgbClr val="94A3B8"/>
+            </a:solidFill>
+          </a:ln>
+        </p:spPr>
+        <p:style>
+          <a:lnRef idx="1">
+            <a:schemeClr val="accent1"/>
+          </a:lnRef>
+          <a:fillRef idx="3">
+            <a:schemeClr val="accent1"/>
+          </a:fillRef>
+          <a:effectRef idx="2">
+            <a:schemeClr val="accent1"/>
+          </a:effectRef>
+          <a:fontRef idx="minor">
+            <a:schemeClr val="lt1"/>
+          </a:fontRef>
+        </p:style>
+        <p:txBody>
+          <a:bodyPr rtlCol="0" anchor="ctr"/>
+          <a:lstStyle/>
+          <a:p>
+            <a:pPr algn="ctr"/>
+          </a:p>
+        </p:txBody>
+      </p:sp>
+      <p:sp>
+        <p:nvSpPr>
+          <p:cNvPr id="9" name="Rectangle 8"/>
+          <p:cNvSpPr/>
+          <p:nvPr/>
+        </p:nvSpPr>
+        <p:spPr>
+          <a:xfrm>
+            <a:off x="3657600" y="1417320"/>
+            <a:ext cx="73152" cy="1143000"/>
+          </a:xfrm>
+          <a:prstGeom prst="rect">
+            <a:avLst/>
+          </a:prstGeom>
+          <a:solidFill>
+            <a:srgbClr val="0F766E"/>
+          </a:solidFill>
+          <a:ln>
+            <a:solidFill>
+              <a:srgbClr val="0F766E"/>
+            </a:solidFill>
+          </a:ln>
+        </p:spPr>
+        <p:style>
+          <a:lnRef idx="1">
+            <a:schemeClr val="accent1"/>
+          </a:lnRef>
+          <a:fillRef idx="3">
+            <a:schemeClr val="accent1"/>
+          </a:fillRef>
+          <a:effectRef idx="2">
+            <a:schemeClr val="accent1"/>
+          </a:effectRef>
+          <a:fontRef idx="minor">
+            <a:schemeClr val="lt1"/>
+          </a:fontRef>
+        </p:style>
+        <p:txBody>
+          <a:bodyPr rtlCol="0" anchor="ctr"/>
+          <a:lstStyle/>
+          <a:p>
+            <a:pPr algn="ctr"/>
+          </a:p>
+        </p:txBody>
+      </p:sp>
+      <p:sp>
+        <p:nvSpPr>
+          <p:cNvPr id="10" name="TextBox 9"/>
+          <p:cNvSpPr txBox="1"/>
+          <p:nvPr/>
+        </p:nvSpPr>
+        <p:spPr>
+          <a:xfrm>
+            <a:off x="3858768" y="1581912"/>
+            <a:ext cx="1993392" cy="274320"/>
+          </a:xfrm>
+          <a:prstGeom prst="rect">
+            <a:avLst/>
+          </a:prstGeom>
+          <a:noFill/>
+        </p:spPr>
+        <p:txBody>
+          <a:bodyPr wrap="none">
+            <a:spAutoFit/>
+          </a:bodyPr>
+          <a:lstStyle/>
+          <a:p>
+            <a:pPr>
+              <a:defRPr sz="1600" b="1">
+                <a:solidFill>
+                  <a:srgbClr val="0F172A"/>
+                </a:solidFill>
+                <a:latin typeface="Aptos"/>
+              </a:defRPr>
+            </a:pPr>
+            <a:r>
+              <a:t>读取配置</a:t>
+            </a:r>
+          </a:p>
+        </p:txBody>
+      </p:sp>
+      <p:sp>
+        <p:nvSpPr>
+          <p:cNvPr id="11" name="TextBox 10"/>
+          <p:cNvSpPr txBox="1"/>
+          <p:nvPr/>
+        </p:nvSpPr>
+        <p:spPr>
+          <a:xfrm>
+            <a:off x="3858768" y="1947672"/>
+            <a:ext cx="1993392" cy="457200"/>
+          </a:xfrm>
+          <a:prstGeom prst="rect">
+            <a:avLst/>
+          </a:prstGeom>
+          <a:noFill/>
+        </p:spPr>
+        <p:txBody>
+          <a:bodyPr wrap="square">
+            <a:spAutoFit/>
+          </a:bodyPr>
+          <a:lstStyle/>
+          <a:p>
+            <a:pPr>
+              <a:spcAft>
+                <a:spcPts val="500"/>
+              </a:spcAft>
+              <a:defRPr sz="1200">
+                <a:solidFill>
+                  <a:srgbClr val="475569"/>
+                </a:solidFill>
+                <a:latin typeface="Aptos"/>
+              </a:defRPr>
+            </a:pPr>
+            <a:r>
+              <a:t>inboundChannel</a:t>
+            </a:r>
+          </a:p>
+          <a:p>
+            <a:pPr>
+              <a:spcAft>
+                <a:spcPts val="500"/>
+              </a:spcAft>
+              <a:defRPr sz="1200">
+                <a:solidFill>
+                  <a:srgbClr val="475569"/>
+                </a:solidFill>
+                <a:latin typeface="Aptos"/>
+              </a:defRPr>
+            </a:pPr>
+            <a:r>
+              <a:t>inboundTarget</a:t>
+            </a:r>
+          </a:p>
+        </p:txBody>
+      </p:sp>
+      <p:sp>
+        <p:nvSpPr>
+          <p:cNvPr id="12" name="Rounded Rectangle 11"/>
+          <p:cNvSpPr/>
+          <p:nvPr/>
+        </p:nvSpPr>
+        <p:spPr>
+          <a:xfrm>
+            <a:off x="6583680" y="1417320"/>
+            <a:ext cx="2377440" cy="1143000"/>
+          </a:xfrm>
+          <a:prstGeom prst="roundRect">
+            <a:avLst/>
+          </a:prstGeom>
+          <a:solidFill>
+            <a:srgbClr val="FFFFFF"/>
+          </a:solidFill>
+          <a:ln w="12700">
+            <a:solidFill>
+              <a:srgbClr val="94A3B8"/>
+            </a:solidFill>
+          </a:ln>
+        </p:spPr>
+        <p:style>
+          <a:lnRef idx="1">
+            <a:schemeClr val="accent1"/>
+          </a:lnRef>
+          <a:fillRef idx="3">
+            <a:schemeClr val="accent1"/>
+          </a:fillRef>
+          <a:effectRef idx="2">
+            <a:schemeClr val="accent1"/>
+          </a:effectRef>
+          <a:fontRef idx="minor">
+            <a:schemeClr val="lt1"/>
+          </a:fontRef>
+        </p:style>
+        <p:txBody>
+          <a:bodyPr rtlCol="0" anchor="ctr"/>
+          <a:lstStyle/>
+          <a:p>
+            <a:pPr algn="ctr"/>
+          </a:p>
+        </p:txBody>
+      </p:sp>
+      <p:sp>
+        <p:nvSpPr>
+          <p:cNvPr id="13" name="Rectangle 12"/>
+          <p:cNvSpPr/>
+          <p:nvPr/>
+        </p:nvSpPr>
+        <p:spPr>
+          <a:xfrm>
+            <a:off x="6583680" y="1417320"/>
+            <a:ext cx="73152" cy="1143000"/>
+          </a:xfrm>
+          <a:prstGeom prst="rect">
+            <a:avLst/>
+          </a:prstGeom>
+          <a:solidFill>
+            <a:srgbClr val="0F766E"/>
+          </a:solidFill>
+          <a:ln>
+            <a:solidFill>
+              <a:srgbClr val="0F766E"/>
+            </a:solidFill>
+          </a:ln>
+        </p:spPr>
+        <p:style>
+          <a:lnRef idx="1">
+            <a:schemeClr val="accent1"/>
+          </a:lnRef>
+          <a:fillRef idx="3">
+            <a:schemeClr val="accent1"/>
+          </a:fillRef>
+          <a:effectRef idx="2">
+            <a:schemeClr val="accent1"/>
+          </a:effectRef>
+          <a:fontRef idx="minor">
+            <a:schemeClr val="lt1"/>
+          </a:fontRef>
+        </p:style>
+        <p:txBody>
+          <a:bodyPr rtlCol="0" anchor="ctr"/>
+          <a:lstStyle/>
+          <a:p>
+            <a:pPr algn="ctr"/>
+          </a:p>
+        </p:txBody>
+      </p:sp>
+      <p:sp>
+        <p:nvSpPr>
+          <p:cNvPr id="14" name="TextBox 13"/>
+          <p:cNvSpPr txBox="1"/>
+          <p:nvPr/>
+        </p:nvSpPr>
+        <p:spPr>
+          <a:xfrm>
+            <a:off x="6784848" y="1581912"/>
+            <a:ext cx="1993392" cy="274320"/>
+          </a:xfrm>
+          <a:prstGeom prst="rect">
+            <a:avLst/>
+          </a:prstGeom>
+          <a:noFill/>
+        </p:spPr>
+        <p:txBody>
+          <a:bodyPr wrap="none">
+            <a:spAutoFit/>
+          </a:bodyPr>
+          <a:lstStyle/>
+          <a:p>
+            <a:pPr>
+              <a:defRPr sz="1600" b="1">
+                <a:solidFill>
+                  <a:srgbClr val="0F172A"/>
+                </a:solidFill>
+                <a:latin typeface="Aptos"/>
+              </a:defRPr>
+            </a:pPr>
+            <a:r>
+              <a:t>runtime adapter</a:t>
+            </a:r>
+          </a:p>
+        </p:txBody>
+      </p:sp>
+      <p:sp>
+        <p:nvSpPr>
+          <p:cNvPr id="15" name="TextBox 14"/>
+          <p:cNvSpPr txBox="1"/>
+          <p:nvPr/>
+        </p:nvSpPr>
+        <p:spPr>
+          <a:xfrm>
+            <a:off x="6784848" y="1947672"/>
+            <a:ext cx="1993392" cy="457200"/>
+          </a:xfrm>
+          <a:prstGeom prst="rect">
+            <a:avLst/>
+          </a:prstGeom>
+          <a:noFill/>
+        </p:spPr>
+        <p:txBody>
+          <a:bodyPr wrap="square">
+            <a:spAutoFit/>
+          </a:bodyPr>
+          <a:lstStyle/>
+          <a:p>
+            <a:pPr>
+              <a:spcAft>
+                <a:spcPts val="500"/>
+              </a:spcAft>
+              <a:defRPr sz="1200">
+                <a:solidFill>
+                  <a:srgbClr val="475569"/>
+                </a:solidFill>
+                <a:latin typeface="Aptos"/>
+              </a:defRPr>
+            </a:pPr>
+            <a:r>
+              <a:t>Feishu sendText</a:t>
+            </a:r>
+          </a:p>
+        </p:txBody>
+      </p:sp>
+      <p:sp>
+        <p:nvSpPr>
+          <p:cNvPr id="16" name="Rounded Rectangle 15"/>
+          <p:cNvSpPr/>
+          <p:nvPr/>
+        </p:nvSpPr>
+        <p:spPr>
+          <a:xfrm>
+            <a:off x="9509760" y="1417320"/>
+            <a:ext cx="2011680" cy="1143000"/>
+          </a:xfrm>
+          <a:prstGeom prst="roundRect">
+            <a:avLst/>
+          </a:prstGeom>
+          <a:solidFill>
+            <a:srgbClr val="FFFFFF"/>
+          </a:solidFill>
+          <a:ln w="12700">
+            <a:solidFill>
+              <a:srgbClr val="94A3B8"/>
+            </a:solidFill>
+          </a:ln>
+        </p:spPr>
+        <p:style>
+          <a:lnRef idx="1">
+            <a:schemeClr val="accent1"/>
+          </a:lnRef>
+          <a:fillRef idx="3">
+            <a:schemeClr val="accent1"/>
+          </a:fillRef>
+          <a:effectRef idx="2">
+            <a:schemeClr val="accent1"/>
+          </a:effectRef>
+          <a:fontRef idx="minor">
+            <a:schemeClr val="lt1"/>
+          </a:fontRef>
+        </p:style>
+        <p:txBody>
+          <a:bodyPr rtlCol="0" anchor="ctr"/>
+          <a:lstStyle/>
+          <a:p>
+            <a:pPr algn="ctr"/>
+          </a:p>
+        </p:txBody>
+      </p:sp>
+      <p:sp>
+        <p:nvSpPr>
+          <p:cNvPr id="17" name="Rectangle 16"/>
+          <p:cNvSpPr/>
+          <p:nvPr/>
+        </p:nvSpPr>
+        <p:spPr>
+          <a:xfrm>
+            <a:off x="9509760" y="1417320"/>
+            <a:ext cx="73152" cy="1143000"/>
+          </a:xfrm>
+          <a:prstGeom prst="rect">
+            <a:avLst/>
+          </a:prstGeom>
+          <a:solidFill>
+            <a:srgbClr val="16A34A"/>
+          </a:solidFill>
+          <a:ln>
+            <a:solidFill>
+              <a:srgbClr val="16A34A"/>
+            </a:solidFill>
+          </a:ln>
+        </p:spPr>
+        <p:style>
+          <a:lnRef idx="1">
+            <a:schemeClr val="accent1"/>
+          </a:lnRef>
+          <a:fillRef idx="3">
+            <a:schemeClr val="accent1"/>
+          </a:fillRef>
+          <a:effectRef idx="2">
+            <a:schemeClr val="accent1"/>
+          </a:effectRef>
+          <a:fontRef idx="minor">
+            <a:schemeClr val="lt1"/>
+          </a:fontRef>
+        </p:style>
+        <p:txBody>
+          <a:bodyPr rtlCol="0" anchor="ctr"/>
+          <a:lstStyle/>
+          <a:p>
+            <a:pPr algn="ctr"/>
+          </a:p>
+        </p:txBody>
+      </p:sp>
+      <p:sp>
+        <p:nvSpPr>
+          <p:cNvPr id="18" name="TextBox 17"/>
+          <p:cNvSpPr txBox="1"/>
+          <p:nvPr/>
+        </p:nvSpPr>
+        <p:spPr>
+          <a:xfrm>
+            <a:off x="9710928" y="1581912"/>
+            <a:ext cx="1627632" cy="274320"/>
+          </a:xfrm>
+          <a:prstGeom prst="rect">
+            <a:avLst/>
+          </a:prstGeom>
+          <a:noFill/>
+        </p:spPr>
+        <p:txBody>
+          <a:bodyPr wrap="none">
+            <a:spAutoFit/>
+          </a:bodyPr>
+          <a:lstStyle/>
+          <a:p>
+            <a:pPr>
+              <a:defRPr sz="1600" b="1">
+                <a:solidFill>
+                  <a:srgbClr val="0F172A"/>
+                </a:solidFill>
+                <a:latin typeface="Aptos"/>
+              </a:defRPr>
+            </a:pPr>
+            <a:r>
+              <a:t>用户看见</a:t>
+            </a:r>
+          </a:p>
+        </p:txBody>
+      </p:sp>
+      <p:sp>
+        <p:nvSpPr>
+          <p:cNvPr id="19" name="TextBox 18"/>
+          <p:cNvSpPr txBox="1"/>
+          <p:nvPr/>
+        </p:nvSpPr>
+        <p:spPr>
+          <a:xfrm>
+            <a:off x="9710928" y="1947672"/>
+            <a:ext cx="1627632" cy="457200"/>
+          </a:xfrm>
+          <a:prstGeom prst="rect">
+            <a:avLst/>
+          </a:prstGeom>
+          <a:noFill/>
+        </p:spPr>
+        <p:txBody>
+          <a:bodyPr wrap="square">
+            <a:spAutoFit/>
+          </a:bodyPr>
+          <a:lstStyle/>
+          <a:p>
+            <a:pPr>
+              <a:spcAft>
+                <a:spcPts val="500"/>
+              </a:spcAft>
+              <a:defRPr sz="1200">
+                <a:solidFill>
+                  <a:srgbClr val="475569"/>
+                </a:solidFill>
+                <a:latin typeface="Aptos"/>
+              </a:defRPr>
+            </a:pPr>
+            <a:r>
+              <a:t>普通文本消息</a:t>
+            </a:r>
+          </a:p>
+        </p:txBody>
+      </p:sp>
+      <p:cxnSp>
+        <p:nvCxnSpPr>
+          <p:cNvPr id="20" name="Connector 19"/>
+          <p:cNvCxnSpPr/>
+          <p:nvPr/>
+        </p:nvCxnSpPr>
+        <p:spPr>
+          <a:xfrm>
+            <a:off x="3154680" y="1984248"/>
+            <a:ext cx="457200" cy="0"/>
+          </a:xfrm>
+          <a:prstGeom prst="line">
+            <a:avLst/>
+          </a:prstGeom>
+          <a:ln w="25400">
+            <a:solidFill>
+              <a:srgbClr val="94A3B8"/>
+            </a:solidFill>
+          </a:ln>
+        </p:spPr>
+        <p:style>
+          <a:lnRef idx="2">
+            <a:schemeClr val="accent1"/>
+          </a:lnRef>
+          <a:fillRef idx="0">
+            <a:schemeClr val="accent1"/>
+          </a:fillRef>
+          <a:effectRef idx="1">
+            <a:schemeClr val="accent1"/>
+          </a:effectRef>
+          <a:fontRef idx="minor">
+            <a:schemeClr val="tx1"/>
+          </a:fontRef>
+        </p:style>
+      </p:cxnSp>
+      <p:cxnSp>
+        <p:nvCxnSpPr>
+          <p:cNvPr id="21" name="Connector 20"/>
+          <p:cNvCxnSpPr/>
+          <p:nvPr/>
+        </p:nvCxnSpPr>
+        <p:spPr>
+          <a:xfrm>
+            <a:off x="6080760" y="1984248"/>
+            <a:ext cx="457200" cy="0"/>
+          </a:xfrm>
+          <a:prstGeom prst="line">
+            <a:avLst/>
+          </a:prstGeom>
+          <a:ln w="25400">
+            <a:solidFill>
+              <a:srgbClr val="94A3B8"/>
+            </a:solidFill>
+          </a:ln>
+        </p:spPr>
+        <p:style>
+          <a:lnRef idx="2">
+            <a:schemeClr val="accent1"/>
+          </a:lnRef>
+          <a:fillRef idx="0">
+            <a:schemeClr val="accent1"/>
+          </a:fillRef>
+          <a:effectRef idx="1">
+            <a:schemeClr val="accent1"/>
+          </a:effectRef>
+          <a:fontRef idx="minor">
+            <a:schemeClr val="tx1"/>
+          </a:fontRef>
+        </p:style>
+      </p:cxnSp>
+      <p:cxnSp>
+        <p:nvCxnSpPr>
+          <p:cNvPr id="22" name="Connector 21"/>
+          <p:cNvCxnSpPr/>
+          <p:nvPr/>
+        </p:nvCxnSpPr>
+        <p:spPr>
+          <a:xfrm>
+            <a:off x="9006840" y="1984248"/>
+            <a:ext cx="457200" cy="0"/>
+          </a:xfrm>
+          <a:prstGeom prst="line">
+            <a:avLst/>
+          </a:prstGeom>
+          <a:ln w="25400">
+            <a:solidFill>
+              <a:srgbClr val="94A3B8"/>
+            </a:solidFill>
+          </a:ln>
+        </p:spPr>
+        <p:style>
+          <a:lnRef idx="2">
+            <a:schemeClr val="accent1"/>
+          </a:lnRef>
+          <a:fillRef idx="0">
+            <a:schemeClr val="accent1"/>
+          </a:fillRef>
+          <a:effectRef idx="1">
+            <a:schemeClr val="accent1"/>
+          </a:effectRef>
+          <a:fontRef idx="minor">
+            <a:schemeClr val="tx1"/>
+          </a:fontRef>
+        </p:style>
+      </p:cxnSp>
+      <p:sp>
+        <p:nvSpPr>
+          <p:cNvPr id="23" name="TextBox 22"/>
+          <p:cNvSpPr txBox="1"/>
+          <p:nvPr/>
+        </p:nvSpPr>
+        <p:spPr>
+          <a:xfrm>
+            <a:off x="914400" y="3703320"/>
+            <a:ext cx="9875520" cy="914400"/>
+          </a:xfrm>
+          <a:prstGeom prst="rect">
+            <a:avLst/>
+          </a:prstGeom>
+          <a:noFill/>
+        </p:spPr>
+        <p:txBody>
+          <a:bodyPr wrap="none">
+            <a:spAutoFit/>
+          </a:bodyPr>
+          <a:lstStyle/>
+          <a:p>
+            <a:pPr>
+              <a:spcAft>
+                <a:spcPts val="800"/>
+              </a:spcAft>
+              <a:defRPr sz="1900">
+                <a:solidFill>
+                  <a:srgbClr val="0F172A"/>
+                </a:solidFill>
+                <a:latin typeface="Aptos"/>
+              </a:defRPr>
+            </a:pPr>
+            <a:r>
+              <a:t>当前实现不再 shell out 调 CLI，而是使用 OpenClaw runtime channel outbound adapter 完成投递。</a:t>
+            </a:r>
+          </a:p>
+        </p:txBody>
+      </p:sp>
+      <p:sp>
+        <p:nvSpPr>
+          <p:cNvPr id="24" name="TextBox 23"/>
+          <p:cNvSpPr txBox="1"/>
+          <p:nvPr/>
+        </p:nvSpPr>
+        <p:spPr>
+          <a:xfrm>
+            <a:off x="502920" y="6473952"/>
+            <a:ext cx="7315200" cy="228600"/>
+          </a:xfrm>
+          <a:prstGeom prst="rect">
+            <a:avLst/>
+          </a:prstGeom>
+          <a:noFill/>
+        </p:spPr>
+        <p:txBody>
+          <a:bodyPr wrap="none">
+            <a:spAutoFit/>
+          </a:bodyPr>
+          <a:lstStyle/>
+          <a:p>
+            <a:pPr>
+              <a:defRPr sz="900">
+                <a:solidFill>
+                  <a:srgbClr val="475569"/>
+                </a:solidFill>
+                <a:latin typeface="Aptos"/>
+              </a:defRPr>
+            </a:pPr>
+            <a:r>
+              <a:t>投递 / 07</a:t>
+            </a:r>
+          </a:p>
+        </p:txBody>
+      </p:sp>
+    </p:spTree>
+  </p:cSld>
+  <p:clrMapOvr>
+    <a:masterClrMapping/>
+  </p:clrMapOvr>
+</p:sld>
+</file>
+
+<file path=ppt/slides/slide8.xml><?xml version="1.0" encoding="utf-8"?>
+<p:sld xmlns:a="http://schemas.openxmlformats.org/drawingml/2006/main" xmlns:p="http://schemas.openxmlformats.org/presentationml/2006/main" xmlns:r="http://schemas.openxmlformats.org/officeDocument/2006/relationships">
+  <p:cSld>
+    <p:bg>
+      <p:bgPr>
+        <a:solidFill>
+          <a:srgbClr val="F8FAFC"/>
+        </a:solidFill>
+        <a:effectLst/>
+      </p:bgPr>
+    </p:bg>
+    <p:spTree>
+      <p:nvGrpSpPr>
+        <p:cNvPr id="1" name=""/>
+        <p:cNvGrpSpPr/>
+        <p:nvPr/>
+      </p:nvGrpSpPr>
+      <p:grpSpPr/>
+      <p:sp>
+        <p:nvSpPr>
+          <p:cNvPr id="2" name="TextBox 1"/>
+          <p:cNvSpPr txBox="1"/>
+          <p:nvPr/>
+        </p:nvSpPr>
+        <p:spPr>
+          <a:xfrm>
+            <a:off x="502920" y="292608"/>
+            <a:ext cx="7772400" cy="502920"/>
+          </a:xfrm>
+          <a:prstGeom prst="rect">
+            <a:avLst/>
+          </a:prstGeom>
+          <a:noFill/>
+        </p:spPr>
+        <p:txBody>
+          <a:bodyPr wrap="none">
+            <a:spAutoFit/>
+          </a:bodyPr>
+          <a:lstStyle/>
+          <a:p>
+            <a:pPr>
+              <a:defRPr sz="3000" b="1">
+                <a:solidFill>
+                  <a:srgbClr val="0F172A"/>
+                </a:solidFill>
+                <a:latin typeface="Aptos"/>
+              </a:defRPr>
+            </a:pPr>
+            <a:r>
+              <a:t>可靠投递：ACK、失败和超时</a:t>
+            </a:r>
+          </a:p>
+        </p:txBody>
+      </p:sp>
+      <p:sp>
+        <p:nvSpPr>
+          <p:cNvPr id="3" name="Rounded Rectangle 2"/>
+          <p:cNvSpPr/>
+          <p:nvPr/>
+        </p:nvSpPr>
+        <p:spPr>
+          <a:xfrm>
+            <a:off x="9326880" y="384048"/>
+            <a:ext cx="2240280" cy="310896"/>
+          </a:xfrm>
+          <a:prstGeom prst="roundRect">
+            <a:avLst/>
+          </a:prstGeom>
+          <a:solidFill>
+            <a:srgbClr val="CCFBF1"/>
+          </a:solidFill>
+          <a:ln>
+            <a:solidFill>
+              <a:srgbClr val="CCFBF1"/>
+            </a:solidFill>
+          </a:ln>
+        </p:spPr>
+        <p:style>
+          <a:lnRef idx="1">
+            <a:schemeClr val="accent1"/>
+          </a:lnRef>
+          <a:fillRef idx="3">
+            <a:schemeClr val="accent1"/>
+          </a:fillRef>
+          <a:effectRef idx="2">
+            <a:schemeClr val="accent1"/>
+          </a:effectRef>
+          <a:fontRef idx="minor">
+            <a:schemeClr val="lt1"/>
+          </a:fontRef>
+        </p:style>
+        <p:txBody>
+          <a:bodyPr rtlCol="0" anchor="ctr"/>
+          <a:lstStyle/>
+          <a:p>
+            <a:pPr algn="ctr">
+              <a:defRPr sz="1000" b="1">
+                <a:solidFill>
+                  <a:srgbClr val="0F766E"/>
+                </a:solidFill>
+                <a:latin typeface="Aptos"/>
+              </a:defRPr>
+            </a:pPr>
+            <a:r>
+              <a:t>可靠性</a:t>
+            </a:r>
+          </a:p>
+        </p:txBody>
+      </p:sp>
+      <p:sp>
+        <p:nvSpPr>
+          <p:cNvPr id="4" name="Rounded Rectangle 3"/>
+          <p:cNvSpPr/>
+          <p:nvPr/>
+        </p:nvSpPr>
+        <p:spPr>
+          <a:xfrm>
+            <a:off x="777240" y="1325880"/>
+            <a:ext cx="3200400" cy="1463040"/>
+          </a:xfrm>
+          <a:prstGeom prst="roundRect">
+            <a:avLst/>
+          </a:prstGeom>
+          <a:solidFill>
+            <a:srgbClr val="FFFFFF"/>
+          </a:solidFill>
+          <a:ln w="12700">
+            <a:solidFill>
+              <a:srgbClr val="94A3B8"/>
+            </a:solidFill>
+          </a:ln>
+        </p:spPr>
+        <p:style>
+          <a:lnRef idx="1">
+            <a:schemeClr val="accent1"/>
+          </a:lnRef>
+          <a:fillRef idx="3">
+            <a:schemeClr val="accent1"/>
+          </a:fillRef>
+          <a:effectRef idx="2">
+            <a:schemeClr val="accent1"/>
+          </a:effectRef>
+          <a:fontRef idx="minor">
+            <a:schemeClr val="lt1"/>
+          </a:fontRef>
+        </p:style>
+        <p:txBody>
+          <a:bodyPr rtlCol="0" anchor="ctr"/>
+          <a:lstStyle/>
+          <a:p>
+            <a:pPr algn="ctr"/>
+          </a:p>
+        </p:txBody>
+      </p:sp>
+      <p:sp>
+        <p:nvSpPr>
+          <p:cNvPr id="5" name="Rectangle 4"/>
+          <p:cNvSpPr/>
+          <p:nvPr/>
+        </p:nvSpPr>
+        <p:spPr>
+          <a:xfrm>
+            <a:off x="777240" y="1325880"/>
+            <a:ext cx="73152" cy="1463040"/>
+          </a:xfrm>
+          <a:prstGeom prst="rect">
+            <a:avLst/>
+          </a:prstGeom>
+          <a:solidFill>
+            <a:srgbClr val="16A34A"/>
+          </a:solidFill>
+          <a:ln>
+            <a:solidFill>
+              <a:srgbClr val="16A34A"/>
+            </a:solidFill>
+          </a:ln>
+        </p:spPr>
+        <p:style>
+          <a:lnRef idx="1">
+            <a:schemeClr val="accent1"/>
+          </a:lnRef>
+          <a:fillRef idx="3">
+            <a:schemeClr val="accent1"/>
+          </a:fillRef>
+          <a:effectRef idx="2">
+            <a:schemeClr val="accent1"/>
+          </a:effectRef>
+          <a:fontRef idx="minor">
+            <a:schemeClr val="lt1"/>
+          </a:fontRef>
+        </p:style>
+        <p:txBody>
+          <a:bodyPr rtlCol="0" anchor="ctr"/>
+          <a:lstStyle/>
+          <a:p>
+            <a:pPr algn="ctr"/>
+          </a:p>
+        </p:txBody>
+      </p:sp>
+      <p:sp>
+        <p:nvSpPr>
+          <p:cNvPr id="6" name="TextBox 5"/>
+          <p:cNvSpPr txBox="1"/>
+          <p:nvPr/>
+        </p:nvSpPr>
+        <p:spPr>
+          <a:xfrm>
+            <a:off x="978408" y="1490472"/>
+            <a:ext cx="2816352" cy="274320"/>
+          </a:xfrm>
+          <a:prstGeom prst="rect">
+            <a:avLst/>
+          </a:prstGeom>
+          <a:noFill/>
+        </p:spPr>
+        <p:txBody>
+          <a:bodyPr wrap="none">
+            <a:spAutoFit/>
+          </a:bodyPr>
+          <a:lstStyle/>
+          <a:p>
+            <a:pPr>
+              <a:defRPr sz="1600" b="1">
+                <a:solidFill>
+                  <a:srgbClr val="0F172A"/>
+                </a:solidFill>
+                <a:latin typeface="Aptos"/>
+              </a:defRPr>
+            </a:pPr>
+            <a:r>
+              <a:t>成功</a:t>
+            </a:r>
+          </a:p>
+        </p:txBody>
+      </p:sp>
+      <p:sp>
+        <p:nvSpPr>
+          <p:cNvPr id="7" name="TextBox 6"/>
+          <p:cNvSpPr txBox="1"/>
+          <p:nvPr/>
+        </p:nvSpPr>
+        <p:spPr>
+          <a:xfrm>
+            <a:off x="978408" y="1856231"/>
+            <a:ext cx="2816352" cy="777240"/>
+          </a:xfrm>
+          <a:prstGeom prst="rect">
+            <a:avLst/>
+          </a:prstGeom>
+          <a:noFill/>
+        </p:spPr>
+        <p:txBody>
+          <a:bodyPr wrap="square">
+            <a:spAutoFit/>
+          </a:bodyPr>
+          <a:lstStyle/>
+          <a:p>
+            <a:pPr>
+              <a:spcAft>
+                <a:spcPts val="500"/>
+              </a:spcAft>
+              <a:defRPr sz="1200">
+                <a:solidFill>
+                  <a:srgbClr val="475569"/>
+                </a:solidFill>
+                <a:latin typeface="Aptos"/>
+              </a:defRPr>
+            </a:pPr>
+            <a:r>
+              <a:t>远端 channel 投递成功</a:t>
+            </a:r>
+          </a:p>
+          <a:p>
+            <a:pPr>
+              <a:spcAft>
+                <a:spcPts val="500"/>
+              </a:spcAft>
+              <a:defRPr sz="1200">
+                <a:solidFill>
+                  <a:srgbClr val="475569"/>
+                </a:solidFill>
+                <a:latin typeface="Aptos"/>
+              </a:defRPr>
+            </a:pPr>
+            <a:r>
+              <a:t>返回 ok: true</a:t>
+            </a:r>
+          </a:p>
+        </p:txBody>
+      </p:sp>
+      <p:sp>
+        <p:nvSpPr>
+          <p:cNvPr id="8" name="Rounded Rectangle 7"/>
+          <p:cNvSpPr/>
+          <p:nvPr/>
+        </p:nvSpPr>
+        <p:spPr>
+          <a:xfrm>
+            <a:off x="4480560" y="1325880"/>
+            <a:ext cx="3200400" cy="1463040"/>
+          </a:xfrm>
+          <a:prstGeom prst="roundRect">
+            <a:avLst/>
+          </a:prstGeom>
+          <a:solidFill>
+            <a:srgbClr val="FFFFFF"/>
+          </a:solidFill>
+          <a:ln w="12700">
+            <a:solidFill>
+              <a:srgbClr val="94A3B8"/>
+            </a:solidFill>
+          </a:ln>
+        </p:spPr>
+        <p:style>
+          <a:lnRef idx="1">
+            <a:schemeClr val="accent1"/>
+          </a:lnRef>
+          <a:fillRef idx="3">
+            <a:schemeClr val="accent1"/>
+          </a:fillRef>
+          <a:effectRef idx="2">
+            <a:schemeClr val="accent1"/>
+          </a:effectRef>
+          <a:fontRef idx="minor">
+            <a:schemeClr val="lt1"/>
+          </a:fontRef>
+        </p:style>
+        <p:txBody>
+          <a:bodyPr rtlCol="0" anchor="ctr"/>
+          <a:lstStyle/>
+          <a:p>
+            <a:pPr algn="ctr"/>
+          </a:p>
+        </p:txBody>
+      </p:sp>
+      <p:sp>
+        <p:nvSpPr>
+          <p:cNvPr id="9" name="Rectangle 8"/>
+          <p:cNvSpPr/>
+          <p:nvPr/>
+        </p:nvSpPr>
+        <p:spPr>
+          <a:xfrm>
+            <a:off x="4480560" y="1325880"/>
+            <a:ext cx="73152" cy="1463040"/>
+          </a:xfrm>
+          <a:prstGeom prst="rect">
+            <a:avLst/>
+          </a:prstGeom>
+          <a:solidFill>
+            <a:srgbClr val="DC2626"/>
+          </a:solidFill>
+          <a:ln>
+            <a:solidFill>
+              <a:srgbClr val="DC2626"/>
+            </a:solidFill>
+          </a:ln>
+        </p:spPr>
+        <p:style>
+          <a:lnRef idx="1">
+            <a:schemeClr val="accent1"/>
+          </a:lnRef>
+          <a:fillRef idx="3">
+            <a:schemeClr val="accent1"/>
+          </a:fillRef>
+          <a:effectRef idx="2">
+            <a:schemeClr val="accent1"/>
+          </a:effectRef>
+          <a:fontRef idx="minor">
+            <a:schemeClr val="lt1"/>
+          </a:fontRef>
+        </p:style>
+        <p:txBody>
+          <a:bodyPr rtlCol="0" anchor="ctr"/>
+          <a:lstStyle/>
+          <a:p>
+            <a:pPr algn="ctr"/>
+          </a:p>
+        </p:txBody>
+      </p:sp>
+      <p:sp>
+        <p:nvSpPr>
+          <p:cNvPr id="10" name="TextBox 9"/>
+          <p:cNvSpPr txBox="1"/>
+          <p:nvPr/>
+        </p:nvSpPr>
+        <p:spPr>
+          <a:xfrm>
+            <a:off x="4681728" y="1490472"/>
+            <a:ext cx="2816352" cy="274320"/>
+          </a:xfrm>
+          <a:prstGeom prst="rect">
+            <a:avLst/>
+          </a:prstGeom>
+          <a:noFill/>
+        </p:spPr>
+        <p:txBody>
+          <a:bodyPr wrap="none">
+            <a:spAutoFit/>
+          </a:bodyPr>
+          <a:lstStyle/>
+          <a:p>
+            <a:pPr>
+              <a:defRPr sz="1600" b="1">
+                <a:solidFill>
+                  <a:srgbClr val="0F172A"/>
+                </a:solidFill>
+                <a:latin typeface="Aptos"/>
+              </a:defRPr>
+            </a:pPr>
+            <a:r>
+              <a:t>远端失败</a:t>
+            </a:r>
+          </a:p>
+        </p:txBody>
+      </p:sp>
+      <p:sp>
+        <p:nvSpPr>
+          <p:cNvPr id="11" name="TextBox 10"/>
+          <p:cNvSpPr txBox="1"/>
+          <p:nvPr/>
+        </p:nvSpPr>
+        <p:spPr>
+          <a:xfrm>
+            <a:off x="4681728" y="1856231"/>
+            <a:ext cx="2816352" cy="777240"/>
+          </a:xfrm>
+          <a:prstGeom prst="rect">
+            <a:avLst/>
+          </a:prstGeom>
+          <a:noFill/>
+        </p:spPr>
+        <p:txBody>
+          <a:bodyPr wrap="square">
+            <a:spAutoFit/>
+          </a:bodyPr>
+          <a:lstStyle/>
+          <a:p>
+            <a:pPr>
+              <a:spcAft>
+                <a:spcPts val="500"/>
+              </a:spcAft>
+              <a:defRPr sz="1200">
+                <a:solidFill>
+                  <a:srgbClr val="475569"/>
+                </a:solidFill>
+                <a:latin typeface="Aptos"/>
+              </a:defRPr>
+            </a:pPr>
+            <a:r>
+              <a:t>配置缺失 / 权限失败</a:t>
+            </a:r>
+          </a:p>
+          <a:p>
+            <a:pPr>
+              <a:spcAft>
+                <a:spcPts val="500"/>
+              </a:spcAft>
+              <a:defRPr sz="1200">
+                <a:solidFill>
+                  <a:srgbClr val="475569"/>
+                </a:solidFill>
+                <a:latin typeface="Aptos"/>
+              </a:defRPr>
+            </a:pPr>
+            <a:r>
+              <a:t>返回 ok: false + error</a:t>
+            </a:r>
+          </a:p>
+        </p:txBody>
+      </p:sp>
+      <p:sp>
+        <p:nvSpPr>
+          <p:cNvPr id="12" name="Rounded Rectangle 11"/>
+          <p:cNvSpPr/>
+          <p:nvPr/>
+        </p:nvSpPr>
+        <p:spPr>
+          <a:xfrm>
+            <a:off x="8183879" y="1325880"/>
+            <a:ext cx="3200400" cy="1463040"/>
+          </a:xfrm>
+          <a:prstGeom prst="roundRect">
+            <a:avLst/>
+          </a:prstGeom>
+          <a:solidFill>
+            <a:srgbClr val="FFFFFF"/>
+          </a:solidFill>
+          <a:ln w="12700">
+            <a:solidFill>
+              <a:srgbClr val="94A3B8"/>
+            </a:solidFill>
+          </a:ln>
+        </p:spPr>
+        <p:style>
+          <a:lnRef idx="1">
+            <a:schemeClr val="accent1"/>
+          </a:lnRef>
+          <a:fillRef idx="3">
+            <a:schemeClr val="accent1"/>
+          </a:fillRef>
+          <a:effectRef idx="2">
+            <a:schemeClr val="accent1"/>
+          </a:effectRef>
+          <a:fontRef idx="minor">
+            <a:schemeClr val="lt1"/>
+          </a:fontRef>
+        </p:style>
+        <p:txBody>
+          <a:bodyPr rtlCol="0" anchor="ctr"/>
+          <a:lstStyle/>
+          <a:p>
+            <a:pPr algn="ctr"/>
+          </a:p>
+        </p:txBody>
+      </p:sp>
+      <p:sp>
+        <p:nvSpPr>
+          <p:cNvPr id="13" name="Rectangle 12"/>
+          <p:cNvSpPr/>
+          <p:nvPr/>
+        </p:nvSpPr>
+        <p:spPr>
+          <a:xfrm>
+            <a:off x="8183879" y="1325880"/>
+            <a:ext cx="73152" cy="1463040"/>
+          </a:xfrm>
+          <a:prstGeom prst="rect">
+            <a:avLst/>
+          </a:prstGeom>
+          <a:solidFill>
+            <a:srgbClr val="D97706"/>
+          </a:solidFill>
+          <a:ln>
+            <a:solidFill>
+              <a:srgbClr val="D97706"/>
+            </a:solidFill>
+          </a:ln>
+        </p:spPr>
+        <p:style>
+          <a:lnRef idx="1">
+            <a:schemeClr val="accent1"/>
+          </a:lnRef>
+          <a:fillRef idx="3">
+            <a:schemeClr val="accent1"/>
+          </a:fillRef>
+          <a:effectRef idx="2">
+            <a:schemeClr val="accent1"/>
+          </a:effectRef>
+          <a:fontRef idx="minor">
+            <a:schemeClr val="lt1"/>
+          </a:fontRef>
+        </p:style>
+        <p:txBody>
+          <a:bodyPr rtlCol="0" anchor="ctr"/>
+          <a:lstStyle/>
+          <a:p>
+            <a:pPr algn="ctr"/>
+          </a:p>
+        </p:txBody>
+      </p:sp>
+      <p:sp>
+        <p:nvSpPr>
+          <p:cNvPr id="14" name="TextBox 13"/>
+          <p:cNvSpPr txBox="1"/>
+          <p:nvPr/>
+        </p:nvSpPr>
+        <p:spPr>
+          <a:xfrm>
+            <a:off x="8385048" y="1490472"/>
+            <a:ext cx="2816352" cy="274320"/>
+          </a:xfrm>
+          <a:prstGeom prst="rect">
+            <a:avLst/>
+          </a:prstGeom>
+          <a:noFill/>
+        </p:spPr>
+        <p:txBody>
+          <a:bodyPr wrap="none">
+            <a:spAutoFit/>
+          </a:bodyPr>
+          <a:lstStyle/>
+          <a:p>
+            <a:pPr>
+              <a:defRPr sz="1600" b="1">
+                <a:solidFill>
+                  <a:srgbClr val="0F172A"/>
+                </a:solidFill>
+                <a:latin typeface="Aptos"/>
+              </a:defRPr>
+            </a:pPr>
+            <a:r>
+              <a:t>超时</a:t>
+            </a:r>
+          </a:p>
+        </p:txBody>
+      </p:sp>
+      <p:sp>
+        <p:nvSpPr>
+          <p:cNvPr id="15" name="TextBox 14"/>
+          <p:cNvSpPr txBox="1"/>
+          <p:nvPr/>
+        </p:nvSpPr>
+        <p:spPr>
+          <a:xfrm>
+            <a:off x="8385048" y="1856231"/>
+            <a:ext cx="2816352" cy="777240"/>
+          </a:xfrm>
+          <a:prstGeom prst="rect">
+            <a:avLst/>
+          </a:prstGeom>
+          <a:noFill/>
+        </p:spPr>
+        <p:txBody>
+          <a:bodyPr wrap="square">
+            <a:spAutoFit/>
+          </a:bodyPr>
+          <a:lstStyle/>
+          <a:p>
+            <a:pPr>
+              <a:spcAft>
+                <a:spcPts val="500"/>
+              </a:spcAft>
+              <a:defRPr sz="1200">
+                <a:solidFill>
+                  <a:srgbClr val="475569"/>
+                </a:solidFill>
+                <a:latin typeface="Aptos"/>
+              </a:defRPr>
+            </a:pPr>
+            <a:r>
+              <a:t>deliveryAckTimeoutMs</a:t>
+            </a:r>
+          </a:p>
+          <a:p>
+            <a:pPr>
+              <a:spcAft>
+                <a:spcPts val="500"/>
+              </a:spcAft>
+              <a:defRPr sz="1200">
+                <a:solidFill>
+                  <a:srgbClr val="475569"/>
+                </a:solidFill>
+                <a:latin typeface="Aptos"/>
+              </a:defRPr>
+            </a:pPr>
+            <a:r>
+              <a:t>返回 ACK timeout</a:t>
+            </a:r>
+          </a:p>
+        </p:txBody>
+      </p:sp>
+      <p:sp>
+        <p:nvSpPr>
+          <p:cNvPr id="16" name="TextBox 15"/>
+          <p:cNvSpPr txBox="1"/>
+          <p:nvPr/>
+        </p:nvSpPr>
+        <p:spPr>
+          <a:xfrm>
+            <a:off x="914400" y="3977639"/>
+            <a:ext cx="10058400" cy="822960"/>
+          </a:xfrm>
+          <a:prstGeom prst="rect">
+            <a:avLst/>
+          </a:prstGeom>
+          <a:noFill/>
+        </p:spPr>
+        <p:txBody>
+          <a:bodyPr wrap="none">
+            <a:spAutoFit/>
+          </a:bodyPr>
+          <a:lstStyle/>
+          <a:p>
+            <a:pPr>
+              <a:spcAft>
+                <a:spcPts val="800"/>
+              </a:spcAft>
+              <a:defRPr sz="1900">
+                <a:solidFill>
+                  <a:srgbClr val="0F172A"/>
+                </a:solidFill>
+                <a:latin typeface="Aptos"/>
+              </a:defRPr>
+            </a:pPr>
+            <a:r>
+              <a:t>发送方维护 pending ACK map，导师可以把它理解为跨实例投递的闭环确认机制。</a:t>
+            </a:r>
+          </a:p>
+        </p:txBody>
+      </p:sp>
+      <p:sp>
+        <p:nvSpPr>
+          <p:cNvPr id="17" name="TextBox 16"/>
+          <p:cNvSpPr txBox="1"/>
+          <p:nvPr/>
+        </p:nvSpPr>
+        <p:spPr>
+          <a:xfrm>
+            <a:off x="502920" y="6473952"/>
+            <a:ext cx="7315200" cy="228600"/>
+          </a:xfrm>
+          <a:prstGeom prst="rect">
+            <a:avLst/>
+          </a:prstGeom>
+          <a:noFill/>
+        </p:spPr>
+        <p:txBody>
+          <a:bodyPr wrap="none">
+            <a:spAutoFit/>
+          </a:bodyPr>
+          <a:lstStyle/>
+          <a:p>
+            <a:pPr>
+              <a:defRPr sz="900">
+                <a:solidFill>
+                  <a:srgbClr val="475569"/>
+                </a:solidFill>
+                <a:latin typeface="Aptos"/>
+              </a:defRPr>
+            </a:pPr>
+            <a:r>
+              <a:t>可靠性 / 08</a:t>
+            </a:r>
+          </a:p>
+        </p:txBody>
+      </p:sp>
+    </p:spTree>
+  </p:cSld>
+  <p:clrMapOvr>
+    <a:masterClrMapping/>
+  </p:clrMapOvr>
+</p:sld>
+</file>
+
+<file path=ppt/slides/slide9.xml><?xml version="1.0" encoding="utf-8"?>
+<p:sld xmlns:a="http://schemas.openxmlformats.org/drawingml/2006/main" xmlns:p="http://schemas.openxmlformats.org/presentationml/2006/main" xmlns:r="http://schemas.openxmlformats.org/officeDocument/2006/relationships">
+  <p:cSld>
+    <p:bg>
+      <p:bgPr>
+        <a:solidFill>
+          <a:srgbClr val="F8FAFC"/>
+        </a:solidFill>
+        <a:effectLst/>
+      </p:bgPr>
+    </p:bg>
+    <p:spTree>
+      <p:nvGrpSpPr>
+        <p:cNvPr id="1" name=""/>
+        <p:cNvGrpSpPr/>
+        <p:nvPr/>
+      </p:nvGrpSpPr>
+      <p:grpSpPr/>
+      <p:sp>
+        <p:nvSpPr>
+          <p:cNvPr id="2" name="TextBox 1"/>
+          <p:cNvSpPr txBox="1"/>
+          <p:nvPr/>
+        </p:nvSpPr>
+        <p:spPr>
+          <a:xfrm>
+            <a:off x="502920" y="292608"/>
+            <a:ext cx="7772400" cy="502920"/>
+          </a:xfrm>
+          <a:prstGeom prst="rect">
+            <a:avLst/>
+          </a:prstGeom>
+          <a:noFill/>
+        </p:spPr>
+        <p:txBody>
+          <a:bodyPr wrap="none">
+            <a:spAutoFit/>
+          </a:bodyPr>
+          <a:lstStyle/>
+          <a:p>
+            <a:pPr>
+              <a:defRPr sz="3000" b="1">
+                <a:solidFill>
+                  <a:srgbClr val="0F172A"/>
+                </a:solidFill>
+                <a:latin typeface="Aptos"/>
+              </a:defRPr>
+            </a:pPr>
+            <a:r>
+              <a:t>新增工具能力</a:t>
+            </a:r>
+          </a:p>
+        </p:txBody>
+      </p:sp>
+      <p:sp>
+        <p:nvSpPr>
+          <p:cNvPr id="3" name="Rounded Rectangle 2"/>
+          <p:cNvSpPr/>
+          <p:nvPr/>
+        </p:nvSpPr>
+        <p:spPr>
+          <a:xfrm>
+            <a:off x="9326880" y="384048"/>
+            <a:ext cx="2240280" cy="310896"/>
+          </a:xfrm>
+          <a:prstGeom prst="roundRect">
+            <a:avLst/>
+          </a:prstGeom>
+          <a:solidFill>
+            <a:srgbClr val="CCFBF1"/>
+          </a:solidFill>
+          <a:ln>
+            <a:solidFill>
+              <a:srgbClr val="CCFBF1"/>
+            </a:solidFill>
+          </a:ln>
+        </p:spPr>
+        <p:style>
+          <a:lnRef idx="1">
+            <a:schemeClr val="accent1"/>
+          </a:lnRef>
+          <a:fillRef idx="3">
+            <a:schemeClr val="accent1"/>
+          </a:fillRef>
+          <a:effectRef idx="2">
+            <a:schemeClr val="accent1"/>
+          </a:effectRef>
+          <a:fontRef idx="minor">
+            <a:schemeClr val="lt1"/>
+          </a:fontRef>
+        </p:style>
+        <p:txBody>
+          <a:bodyPr rtlCol="0" anchor="ctr"/>
+          <a:lstStyle/>
+          <a:p>
+            <a:pPr algn="ctr">
+              <a:defRPr sz="1000" b="1">
+                <a:solidFill>
+                  <a:srgbClr val="0F766E"/>
+                </a:solidFill>
+                <a:latin typeface="Aptos"/>
+              </a:defRPr>
+            </a:pPr>
+            <a:r>
+              <a:t>工具</a:t>
+            </a:r>
+          </a:p>
+        </p:txBody>
+      </p:sp>
+      <p:sp>
+        <p:nvSpPr>
+          <p:cNvPr id="4" name="TextBox 3"/>
+          <p:cNvSpPr txBox="1"/>
+          <p:nvPr/>
+        </p:nvSpPr>
+        <p:spPr>
+          <a:xfrm>
+            <a:off x="777240" y="1325880"/>
+            <a:ext cx="6766560" cy="4389120"/>
+          </a:xfrm>
+          <a:prstGeom prst="rect">
+            <a:avLst/>
+          </a:prstGeom>
+          <a:noFill/>
+        </p:spPr>
+        <p:txBody>
+          <a:bodyPr wrap="none">
+            <a:spAutoFit/>
+          </a:bodyPr>
+          <a:lstStyle/>
+          <a:p>
+            <a:pPr>
+              <a:spcAft>
+                <a:spcPts val="800"/>
+              </a:spcAft>
+              <a:defRPr sz="1900">
+                <a:solidFill>
+                  <a:srgbClr val="0F172A"/>
+                </a:solidFill>
+                <a:latin typeface="Aptos"/>
+              </a:defRPr>
+            </a:pPr>
+            <a:r>
+              <a:t>低层 peer：p2p_send_message / p2p_broadcast / p2p_list_peers</a:t>
+            </a:r>
+          </a:p>
+          <a:p>
+            <a:pPr>
+              <a:spcAft>
+                <a:spcPts val="800"/>
+              </a:spcAft>
+              <a:defRPr sz="1900">
+                <a:solidFill>
+                  <a:srgbClr val="0F172A"/>
+                </a:solidFill>
+                <a:latin typeface="Aptos"/>
+              </a:defRPr>
+            </a:pPr>
+            <a:r>
+              <a:t>身份与网络：p2p_get_instance_identity / p2p_get_network_info</a:t>
+            </a:r>
+          </a:p>
+          <a:p>
+            <a:pPr>
+              <a:spcAft>
+                <a:spcPts val="800"/>
+              </a:spcAft>
+              <a:defRPr sz="1900">
+                <a:solidFill>
+                  <a:srgbClr val="0F172A"/>
+                </a:solidFill>
+                <a:latin typeface="Aptos"/>
+              </a:defRPr>
+            </a:pPr>
+            <a:r>
+              <a:t>实例路由：p2p_list_instances / p2p_resolve_instance / p2p_send_instance_message</a:t>
+            </a:r>
+          </a:p>
+          <a:p>
+            <a:pPr>
+              <a:spcAft>
+                <a:spcPts val="800"/>
+              </a:spcAft>
+              <a:defRPr sz="1900">
+                <a:solidFill>
+                  <a:srgbClr val="0F172A"/>
+                </a:solidFill>
+                <a:latin typeface="Aptos"/>
+              </a:defRPr>
+            </a:pPr>
+            <a:r>
+              <a:t>普通用户通信优先走 instance 工具，peer 工具主要用于调试。</a:t>
+            </a:r>
+          </a:p>
+        </p:txBody>
+      </p:sp>
+      <p:sp>
+        <p:nvSpPr>
+          <p:cNvPr id="5" name="TextBox 4"/>
+          <p:cNvSpPr txBox="1"/>
+          <p:nvPr/>
+        </p:nvSpPr>
+        <p:spPr>
+          <a:xfrm>
+            <a:off x="502920" y="6473952"/>
+            <a:ext cx="7315200" cy="228600"/>
+          </a:xfrm>
+          <a:prstGeom prst="rect">
+            <a:avLst/>
+          </a:prstGeom>
+          <a:noFill/>
+        </p:spPr>
+        <p:txBody>
+          <a:bodyPr wrap="none">
+            <a:spAutoFit/>
+          </a:bodyPr>
+          <a:lstStyle/>
+          <a:p>
+            <a:pPr>
+              <a:defRPr sz="900">
+                <a:solidFill>
+                  <a:srgbClr val="475569"/>
+                </a:solidFill>
+                <a:latin typeface="Aptos"/>
+              </a:defRPr>
+            </a:pPr>
+            <a:r>
+              <a:t>工具 / 09</a:t>
             </a:r>
           </a:p>
         </p:txBody>

--- a/docs/presentations/p2p-mesh-mentor-2026-06-15.pptx
+++ b/docs/presentations/p2p-mesh-mentor-2026-06-15.pptx
@@ -4636,7 +4636,7 @@
               </a:defRPr>
             </a:pPr>
             <a:r>
-              <a:t>重复消息复用上次 ACK</a:t>
+              <a:t>重复 user-message 去重并复用上次 ACK</a:t>
             </a:r>
           </a:p>
           <a:p>
@@ -4833,7 +4833,7 @@
               </a:defRPr>
             </a:pPr>
             <a:r>
-              <a:t>不自动执行远端指令</a:t>
+              <a:t>防循环：ACK 不再作为普通消息转发</a:t>
             </a:r>
           </a:p>
           <a:p>

--- a/docs/presentations/p2p-mesh-mentor-2026-06-15.pptx
+++ b/docs/presentations/p2p-mesh-mentor-2026-06-15.pptx
@@ -3115,8 +3115,8 @@
         </p:nvSpPr>
         <p:spPr>
           <a:xfrm>
-            <a:off x="502920" y="292608"/>
-            <a:ext cx="7772400" cy="502920"/>
+            <a:off x="685800" y="292608"/>
+            <a:ext cx="8549640" cy="566928"/>
           </a:xfrm>
           <a:prstGeom prst="rect">
             <a:avLst/>
@@ -3124,13 +3124,13 @@
           <a:noFill/>
         </p:spPr>
         <p:txBody>
-          <a:bodyPr wrap="none">
+          <a:bodyPr wrap="square" lIns="54864" rIns="54864" tIns="18288" bIns="18288">
             <a:spAutoFit/>
           </a:bodyPr>
           <a:lstStyle/>
           <a:p>
             <a:pPr>
-              <a:defRPr sz="3000" b="1">
+              <a:defRPr sz="2700" b="1">
                 <a:solidFill>
                   <a:srgbClr val="0F172A"/>
                 </a:solidFill>
@@ -3151,8 +3151,8 @@
         </p:nvSpPr>
         <p:spPr>
           <a:xfrm>
-            <a:off x="530352" y="822960"/>
-            <a:ext cx="8046720" cy="292608"/>
+            <a:off x="713232" y="841248"/>
+            <a:ext cx="8321040" cy="310896"/>
           </a:xfrm>
           <a:prstGeom prst="rect">
             <a:avLst/>
@@ -3160,7 +3160,7 @@
           <a:noFill/>
         </p:spPr>
         <p:txBody>
-          <a:bodyPr wrap="none">
+          <a:bodyPr wrap="square" lIns="36576" rIns="36576">
             <a:spAutoFit/>
           </a:bodyPr>
           <a:lstStyle/>
@@ -3332,8 +3332,8 @@
         </p:nvSpPr>
         <p:spPr>
           <a:xfrm>
-            <a:off x="932688" y="1764792"/>
-            <a:ext cx="2359152" cy="274320"/>
+            <a:off x="932688" y="1746504"/>
+            <a:ext cx="2359152" cy="310896"/>
           </a:xfrm>
           <a:prstGeom prst="rect">
             <a:avLst/>
@@ -3341,7 +3341,7 @@
           <a:noFill/>
         </p:spPr>
         <p:txBody>
-          <a:bodyPr wrap="none">
+          <a:bodyPr wrap="square" lIns="27432" rIns="27432" tIns="18288" bIns="18288">
             <a:spAutoFit/>
           </a:bodyPr>
           <a:lstStyle/>
@@ -3369,7 +3369,7 @@
         <p:spPr>
           <a:xfrm>
             <a:off x="932688" y="2130552"/>
-            <a:ext cx="2359152" cy="548640"/>
+            <a:ext cx="2359152" cy="566928"/>
           </a:xfrm>
           <a:prstGeom prst="rect">
             <a:avLst/>
@@ -3377,7 +3377,7 @@
           <a:noFill/>
         </p:spPr>
         <p:txBody>
-          <a:bodyPr wrap="square">
+          <a:bodyPr wrap="square" lIns="27432" rIns="27432" tIns="18288" bIns="18288">
             <a:spAutoFit/>
           </a:bodyPr>
           <a:lstStyle/>
@@ -3497,8 +3497,8 @@
         </p:nvSpPr>
         <p:spPr>
           <a:xfrm>
-            <a:off x="4773168" y="1764792"/>
-            <a:ext cx="2359152" cy="274320"/>
+            <a:off x="4773168" y="1746504"/>
+            <a:ext cx="2359152" cy="310896"/>
           </a:xfrm>
           <a:prstGeom prst="rect">
             <a:avLst/>
@@ -3506,7 +3506,7 @@
           <a:noFill/>
         </p:spPr>
         <p:txBody>
-          <a:bodyPr wrap="none">
+          <a:bodyPr wrap="square" lIns="27432" rIns="27432" tIns="18288" bIns="18288">
             <a:spAutoFit/>
           </a:bodyPr>
           <a:lstStyle/>
@@ -3534,7 +3534,7 @@
         <p:spPr>
           <a:xfrm>
             <a:off x="4773168" y="2130552"/>
-            <a:ext cx="2359152" cy="548640"/>
+            <a:ext cx="2359152" cy="566928"/>
           </a:xfrm>
           <a:prstGeom prst="rect">
             <a:avLst/>
@@ -3542,7 +3542,7 @@
           <a:noFill/>
         </p:spPr>
         <p:txBody>
-          <a:bodyPr wrap="square">
+          <a:bodyPr wrap="square" lIns="27432" rIns="27432" tIns="18288" bIns="18288">
             <a:spAutoFit/>
           </a:bodyPr>
           <a:lstStyle/>
@@ -3662,8 +3662,8 @@
         </p:nvSpPr>
         <p:spPr>
           <a:xfrm>
-            <a:off x="8613648" y="1764792"/>
-            <a:ext cx="2359152" cy="274320"/>
+            <a:off x="8613648" y="1746504"/>
+            <a:ext cx="2359152" cy="310896"/>
           </a:xfrm>
           <a:prstGeom prst="rect">
             <a:avLst/>
@@ -3671,7 +3671,7 @@
           <a:noFill/>
         </p:spPr>
         <p:txBody>
-          <a:bodyPr wrap="none">
+          <a:bodyPr wrap="square" lIns="27432" rIns="27432" tIns="18288" bIns="18288">
             <a:spAutoFit/>
           </a:bodyPr>
           <a:lstStyle/>
@@ -3699,7 +3699,7 @@
         <p:spPr>
           <a:xfrm>
             <a:off x="8613648" y="2130552"/>
-            <a:ext cx="2359152" cy="548640"/>
+            <a:ext cx="2359152" cy="566928"/>
           </a:xfrm>
           <a:prstGeom prst="rect">
             <a:avLst/>
@@ -3707,7 +3707,7 @@
           <a:noFill/>
         </p:spPr>
         <p:txBody>
-          <a:bodyPr wrap="square">
+          <a:bodyPr wrap="square" lIns="27432" rIns="27432" tIns="18288" bIns="18288">
             <a:spAutoFit/>
           </a:bodyPr>
           <a:lstStyle/>
@@ -3816,7 +3816,7 @@
           <a:noFill/>
         </p:spPr>
         <p:txBody>
-          <a:bodyPr wrap="none">
+          <a:bodyPr wrap="square" lIns="73152" rIns="73152" tIns="27432" bIns="27432">
             <a:spAutoFit/>
           </a:bodyPr>
           <a:lstStyle/>
@@ -3924,8 +3924,8 @@
         </p:nvSpPr>
         <p:spPr>
           <a:xfrm>
-            <a:off x="502920" y="292608"/>
-            <a:ext cx="7772400" cy="502920"/>
+            <a:off x="685800" y="292608"/>
+            <a:ext cx="8549640" cy="566928"/>
           </a:xfrm>
           <a:prstGeom prst="rect">
             <a:avLst/>
@@ -3933,13 +3933,13 @@
           <a:noFill/>
         </p:spPr>
         <p:txBody>
-          <a:bodyPr wrap="none">
+          <a:bodyPr wrap="square" lIns="54864" rIns="54864" tIns="18288" bIns="18288">
             <a:spAutoFit/>
           </a:bodyPr>
           <a:lstStyle/>
           <a:p>
             <a:pPr>
-              <a:defRPr sz="3000" b="1">
+              <a:defRPr sz="2900" b="1">
                 <a:solidFill>
                   <a:srgbClr val="0F172A"/>
                 </a:solidFill>
@@ -4015,8 +4015,8 @@
         </p:nvSpPr>
         <p:spPr>
           <a:xfrm>
-            <a:off x="777240" y="1325880"/>
-            <a:ext cx="6766560" cy="4389120"/>
+            <a:off x="868680" y="1325880"/>
+            <a:ext cx="6217920" cy="4389120"/>
           </a:xfrm>
           <a:prstGeom prst="rect">
             <a:avLst/>
@@ -4024,7 +4024,7 @@
           <a:noFill/>
         </p:spPr>
         <p:txBody>
-          <a:bodyPr wrap="none">
+          <a:bodyPr wrap="square" lIns="73152" rIns="73152" tIns="27432" bIns="27432">
             <a:spAutoFit/>
           </a:bodyPr>
           <a:lstStyle/>
@@ -4228,8 +4228,8 @@
         </p:nvSpPr>
         <p:spPr>
           <a:xfrm>
-            <a:off x="7882128" y="1490472"/>
-            <a:ext cx="3273552" cy="274320"/>
+            <a:off x="7882128" y="1472184"/>
+            <a:ext cx="3273552" cy="402336"/>
           </a:xfrm>
           <a:prstGeom prst="rect">
             <a:avLst/>
@@ -4237,13 +4237,13 @@
           <a:noFill/>
         </p:spPr>
         <p:txBody>
-          <a:bodyPr wrap="none">
+          <a:bodyPr wrap="square" lIns="27432" rIns="27432" tIns="18288" bIns="18288">
             <a:spAutoFit/>
           </a:bodyPr>
           <a:lstStyle/>
           <a:p>
             <a:pPr>
-              <a:defRPr sz="1600" b="1">
+              <a:defRPr sz="1200" b="1">
                 <a:solidFill>
                   <a:srgbClr val="0F172A"/>
                 </a:solidFill>
@@ -4264,8 +4264,8 @@
         </p:nvSpPr>
         <p:spPr>
           <a:xfrm>
-            <a:off x="7882128" y="1856231"/>
-            <a:ext cx="3273552" cy="1508760"/>
+            <a:off x="7882128" y="1892807"/>
+            <a:ext cx="3273552" cy="1490472"/>
           </a:xfrm>
           <a:prstGeom prst="rect">
             <a:avLst/>
@@ -4273,7 +4273,7 @@
           <a:noFill/>
         </p:spPr>
         <p:txBody>
-          <a:bodyPr wrap="square">
+          <a:bodyPr wrap="square" lIns="27432" rIns="27432" tIns="18288" bIns="18288">
             <a:spAutoFit/>
           </a:bodyPr>
           <a:lstStyle/>
@@ -4377,8 +4377,8 @@
         </p:nvSpPr>
         <p:spPr>
           <a:xfrm>
-            <a:off x="502920" y="292608"/>
-            <a:ext cx="7772400" cy="502920"/>
+            <a:off x="685800" y="292608"/>
+            <a:ext cx="8549640" cy="566928"/>
           </a:xfrm>
           <a:prstGeom prst="rect">
             <a:avLst/>
@@ -4386,13 +4386,13 @@
           <a:noFill/>
         </p:spPr>
         <p:txBody>
-          <a:bodyPr wrap="none">
+          <a:bodyPr wrap="square" lIns="54864" rIns="54864" tIns="18288" bIns="18288">
             <a:spAutoFit/>
           </a:bodyPr>
           <a:lstStyle/>
           <a:p>
             <a:pPr>
-              <a:defRPr sz="3000" b="1">
+              <a:defRPr sz="2900" b="1">
                 <a:solidFill>
                   <a:srgbClr val="0F172A"/>
                 </a:solidFill>
@@ -4558,8 +4558,8 @@
         </p:nvSpPr>
         <p:spPr>
           <a:xfrm>
-            <a:off x="978408" y="1399032"/>
-            <a:ext cx="4599432" cy="274320"/>
+            <a:off x="978408" y="1380744"/>
+            <a:ext cx="4599432" cy="310896"/>
           </a:xfrm>
           <a:prstGeom prst="rect">
             <a:avLst/>
@@ -4567,7 +4567,7 @@
           <a:noFill/>
         </p:spPr>
         <p:txBody>
-          <a:bodyPr wrap="none">
+          <a:bodyPr wrap="square" lIns="27432" rIns="27432" tIns="18288" bIns="18288">
             <a:spAutoFit/>
           </a:bodyPr>
           <a:lstStyle/>
@@ -4595,7 +4595,7 @@
         <p:spPr>
           <a:xfrm>
             <a:off x="978408" y="1764792"/>
-            <a:ext cx="4599432" cy="2880360"/>
+            <a:ext cx="4599432" cy="2898648"/>
           </a:xfrm>
           <a:prstGeom prst="rect">
             <a:avLst/>
@@ -4603,7 +4603,7 @@
           <a:noFill/>
         </p:spPr>
         <p:txBody>
-          <a:bodyPr wrap="square">
+          <a:bodyPr wrap="square" lIns="27432" rIns="27432" tIns="18288" bIns="18288">
             <a:spAutoFit/>
           </a:bodyPr>
           <a:lstStyle/>
@@ -4755,8 +4755,8 @@
         </p:nvSpPr>
         <p:spPr>
           <a:xfrm>
-            <a:off x="6647688" y="1399032"/>
-            <a:ext cx="4599432" cy="274320"/>
+            <a:off x="6647688" y="1380744"/>
+            <a:ext cx="4599432" cy="310896"/>
           </a:xfrm>
           <a:prstGeom prst="rect">
             <a:avLst/>
@@ -4764,7 +4764,7 @@
           <a:noFill/>
         </p:spPr>
         <p:txBody>
-          <a:bodyPr wrap="none">
+          <a:bodyPr wrap="square" lIns="27432" rIns="27432" tIns="18288" bIns="18288">
             <a:spAutoFit/>
           </a:bodyPr>
           <a:lstStyle/>
@@ -4792,7 +4792,7 @@
         <p:spPr>
           <a:xfrm>
             <a:off x="6647688" y="1764792"/>
-            <a:ext cx="4599432" cy="2880360"/>
+            <a:ext cx="4599432" cy="2898648"/>
           </a:xfrm>
           <a:prstGeom prst="rect">
             <a:avLst/>
@@ -4800,7 +4800,7 @@
           <a:noFill/>
         </p:spPr>
         <p:txBody>
-          <a:bodyPr wrap="square">
+          <a:bodyPr wrap="square" lIns="27432" rIns="27432" tIns="18288" bIns="18288">
             <a:spAutoFit/>
           </a:bodyPr>
           <a:lstStyle/>
@@ -4924,8 +4924,8 @@
         </p:nvSpPr>
         <p:spPr>
           <a:xfrm>
-            <a:off x="502920" y="292608"/>
-            <a:ext cx="7772400" cy="502920"/>
+            <a:off x="685800" y="292608"/>
+            <a:ext cx="8549640" cy="566928"/>
           </a:xfrm>
           <a:prstGeom prst="rect">
             <a:avLst/>
@@ -4933,13 +4933,13 @@
           <a:noFill/>
         </p:spPr>
         <p:txBody>
-          <a:bodyPr wrap="none">
+          <a:bodyPr wrap="square" lIns="54864" rIns="54864" tIns="18288" bIns="18288">
             <a:spAutoFit/>
           </a:bodyPr>
           <a:lstStyle/>
           <a:p>
             <a:pPr>
-              <a:defRPr sz="3000" b="1">
+              <a:defRPr sz="2900" b="1">
                 <a:solidFill>
                   <a:srgbClr val="0F172A"/>
                 </a:solidFill>
@@ -5105,8 +5105,8 @@
         </p:nvSpPr>
         <p:spPr>
           <a:xfrm>
-            <a:off x="978408" y="1581912"/>
-            <a:ext cx="2862072" cy="274320"/>
+            <a:off x="978408" y="1563624"/>
+            <a:ext cx="2862072" cy="310896"/>
           </a:xfrm>
           <a:prstGeom prst="rect">
             <a:avLst/>
@@ -5114,7 +5114,7 @@
           <a:noFill/>
         </p:spPr>
         <p:txBody>
-          <a:bodyPr wrap="none">
+          <a:bodyPr wrap="square" lIns="27432" rIns="27432" tIns="18288" bIns="18288">
             <a:spAutoFit/>
           </a:bodyPr>
           <a:lstStyle/>
@@ -5142,7 +5142,7 @@
         <p:spPr>
           <a:xfrm>
             <a:off x="978408" y="1947672"/>
-            <a:ext cx="2862072" cy="1463040"/>
+            <a:ext cx="2862072" cy="1481328"/>
           </a:xfrm>
           <a:prstGeom prst="rect">
             <a:avLst/>
@@ -5150,7 +5150,7 @@
           <a:noFill/>
         </p:spPr>
         <p:txBody>
-          <a:bodyPr wrap="square">
+          <a:bodyPr wrap="square" lIns="27432" rIns="27432" tIns="18288" bIns="18288">
             <a:spAutoFit/>
           </a:bodyPr>
           <a:lstStyle/>
@@ -5286,8 +5286,8 @@
         </p:nvSpPr>
         <p:spPr>
           <a:xfrm>
-            <a:off x="4681728" y="1581912"/>
-            <a:ext cx="2862072" cy="274320"/>
+            <a:off x="4681728" y="1563624"/>
+            <a:ext cx="2862072" cy="310896"/>
           </a:xfrm>
           <a:prstGeom prst="rect">
             <a:avLst/>
@@ -5295,7 +5295,7 @@
           <a:noFill/>
         </p:spPr>
         <p:txBody>
-          <a:bodyPr wrap="none">
+          <a:bodyPr wrap="square" lIns="27432" rIns="27432" tIns="18288" bIns="18288">
             <a:spAutoFit/>
           </a:bodyPr>
           <a:lstStyle/>
@@ -5323,7 +5323,7 @@
         <p:spPr>
           <a:xfrm>
             <a:off x="4681728" y="1947672"/>
-            <a:ext cx="2862072" cy="1463040"/>
+            <a:ext cx="2862072" cy="1481328"/>
           </a:xfrm>
           <a:prstGeom prst="rect">
             <a:avLst/>
@@ -5331,7 +5331,7 @@
           <a:noFill/>
         </p:spPr>
         <p:txBody>
-          <a:bodyPr wrap="square">
+          <a:bodyPr wrap="square" lIns="27432" rIns="27432" tIns="18288" bIns="18288">
             <a:spAutoFit/>
           </a:bodyPr>
           <a:lstStyle/>
@@ -5467,8 +5467,8 @@
         </p:nvSpPr>
         <p:spPr>
           <a:xfrm>
-            <a:off x="8385048" y="1581912"/>
-            <a:ext cx="2862072" cy="274320"/>
+            <a:off x="8385048" y="1563624"/>
+            <a:ext cx="2862072" cy="310896"/>
           </a:xfrm>
           <a:prstGeom prst="rect">
             <a:avLst/>
@@ -5476,7 +5476,7 @@
           <a:noFill/>
         </p:spPr>
         <p:txBody>
-          <a:bodyPr wrap="none">
+          <a:bodyPr wrap="square" lIns="27432" rIns="27432" tIns="18288" bIns="18288">
             <a:spAutoFit/>
           </a:bodyPr>
           <a:lstStyle/>
@@ -5504,7 +5504,7 @@
         <p:spPr>
           <a:xfrm>
             <a:off x="8385048" y="1947672"/>
-            <a:ext cx="2862072" cy="1463040"/>
+            <a:ext cx="2862072" cy="1481328"/>
           </a:xfrm>
           <a:prstGeom prst="rect">
             <a:avLst/>
@@ -5512,7 +5512,7 @@
           <a:noFill/>
         </p:spPr>
         <p:txBody>
-          <a:bodyPr wrap="square">
+          <a:bodyPr wrap="square" lIns="27432" rIns="27432" tIns="18288" bIns="18288">
             <a:spAutoFit/>
           </a:bodyPr>
           <a:lstStyle/>
@@ -5567,7 +5567,7 @@
           <a:noFill/>
         </p:spPr>
         <p:txBody>
-          <a:bodyPr wrap="none">
+          <a:bodyPr wrap="square" lIns="73152" rIns="73152" tIns="27432" bIns="27432">
             <a:spAutoFit/>
           </a:bodyPr>
           <a:lstStyle/>
@@ -5659,8 +5659,8 @@
         </p:nvSpPr>
         <p:spPr>
           <a:xfrm>
-            <a:off x="502920" y="292608"/>
-            <a:ext cx="7772400" cy="502920"/>
+            <a:off x="685800" y="292608"/>
+            <a:ext cx="8549640" cy="566928"/>
           </a:xfrm>
           <a:prstGeom prst="rect">
             <a:avLst/>
@@ -5668,13 +5668,13 @@
           <a:noFill/>
         </p:spPr>
         <p:txBody>
-          <a:bodyPr wrap="none">
+          <a:bodyPr wrap="square" lIns="54864" rIns="54864" tIns="18288" bIns="18288">
             <a:spAutoFit/>
           </a:bodyPr>
           <a:lstStyle/>
           <a:p>
             <a:pPr>
-              <a:defRPr sz="3000" b="1">
+              <a:defRPr sz="2700" b="1">
                 <a:solidFill>
                   <a:srgbClr val="0F172A"/>
                 </a:solidFill>
@@ -5750,8 +5750,8 @@
         </p:nvSpPr>
         <p:spPr>
           <a:xfrm>
-            <a:off x="777240" y="1325880"/>
-            <a:ext cx="6766560" cy="4389120"/>
+            <a:off x="868680" y="1325880"/>
+            <a:ext cx="6217920" cy="4389120"/>
           </a:xfrm>
           <a:prstGeom prst="rect">
             <a:avLst/>
@@ -5759,7 +5759,7 @@
           <a:noFill/>
         </p:spPr>
         <p:txBody>
-          <a:bodyPr wrap="none">
+          <a:bodyPr wrap="square" lIns="73152" rIns="73152" tIns="27432" bIns="27432">
             <a:spAutoFit/>
           </a:bodyPr>
           <a:lstStyle/>
@@ -5947,8 +5947,8 @@
         </p:nvSpPr>
         <p:spPr>
           <a:xfrm>
-            <a:off x="8202168" y="1581912"/>
-            <a:ext cx="1353312" cy="274320"/>
+            <a:off x="8202168" y="1563624"/>
+            <a:ext cx="1353312" cy="310896"/>
           </a:xfrm>
           <a:prstGeom prst="rect">
             <a:avLst/>
@@ -5956,7 +5956,7 @@
           <a:noFill/>
         </p:spPr>
         <p:txBody>
-          <a:bodyPr wrap="none">
+          <a:bodyPr wrap="square" lIns="27432" rIns="27432" tIns="18288" bIns="18288">
             <a:spAutoFit/>
           </a:bodyPr>
           <a:lstStyle/>
@@ -5984,7 +5984,7 @@
         <p:spPr>
           <a:xfrm>
             <a:off x="8202168" y="1947672"/>
-            <a:ext cx="1353312" cy="457200"/>
+            <a:ext cx="1353312" cy="475488"/>
           </a:xfrm>
           <a:prstGeom prst="rect">
             <a:avLst/>
@@ -5992,7 +5992,7 @@
           <a:noFill/>
         </p:spPr>
         <p:txBody>
-          <a:bodyPr wrap="square">
+          <a:bodyPr wrap="square" lIns="27432" rIns="27432" tIns="18288" bIns="18288">
             <a:spAutoFit/>
           </a:bodyPr>
           <a:lstStyle/>
@@ -6128,8 +6128,8 @@
         </p:nvSpPr>
         <p:spPr>
           <a:xfrm>
-            <a:off x="10030968" y="1581912"/>
-            <a:ext cx="1353312" cy="274320"/>
+            <a:off x="10030968" y="1563624"/>
+            <a:ext cx="1353312" cy="310896"/>
           </a:xfrm>
           <a:prstGeom prst="rect">
             <a:avLst/>
@@ -6137,7 +6137,7 @@
           <a:noFill/>
         </p:spPr>
         <p:txBody>
-          <a:bodyPr wrap="none">
+          <a:bodyPr wrap="square" lIns="27432" rIns="27432" tIns="18288" bIns="18288">
             <a:spAutoFit/>
           </a:bodyPr>
           <a:lstStyle/>
@@ -6165,7 +6165,7 @@
         <p:spPr>
           <a:xfrm>
             <a:off x="10030968" y="1947672"/>
-            <a:ext cx="1353312" cy="457200"/>
+            <a:ext cx="1353312" cy="475488"/>
           </a:xfrm>
           <a:prstGeom prst="rect">
             <a:avLst/>
@@ -6173,7 +6173,7 @@
           <a:noFill/>
         </p:spPr>
         <p:txBody>
-          <a:bodyPr wrap="square">
+          <a:bodyPr wrap="square" lIns="27432" rIns="27432" tIns="18288" bIns="18288">
             <a:spAutoFit/>
           </a:bodyPr>
           <a:lstStyle/>
@@ -6245,8 +6245,8 @@
         </p:nvSpPr>
         <p:spPr>
           <a:xfrm>
-            <a:off x="502920" y="292608"/>
-            <a:ext cx="7772400" cy="502920"/>
+            <a:off x="685800" y="292608"/>
+            <a:ext cx="8549640" cy="566928"/>
           </a:xfrm>
           <a:prstGeom prst="rect">
             <a:avLst/>
@@ -6254,13 +6254,13 @@
           <a:noFill/>
         </p:spPr>
         <p:txBody>
-          <a:bodyPr wrap="none">
+          <a:bodyPr wrap="square" lIns="54864" rIns="54864" tIns="18288" bIns="18288">
             <a:spAutoFit/>
           </a:bodyPr>
           <a:lstStyle/>
           <a:p>
             <a:pPr>
-              <a:defRPr sz="3000" b="1">
+              <a:defRPr sz="2900" b="1">
                 <a:solidFill>
                   <a:srgbClr val="0F172A"/>
                 </a:solidFill>
@@ -6426,8 +6426,8 @@
         </p:nvSpPr>
         <p:spPr>
           <a:xfrm>
-            <a:off x="612648" y="2039112"/>
-            <a:ext cx="850392" cy="274320"/>
+            <a:off x="612648" y="2020824"/>
+            <a:ext cx="850392" cy="402336"/>
           </a:xfrm>
           <a:prstGeom prst="rect">
             <a:avLst/>
@@ -6435,13 +6435,13 @@
           <a:noFill/>
         </p:spPr>
         <p:txBody>
-          <a:bodyPr wrap="none">
+          <a:bodyPr wrap="square" lIns="27432" rIns="27432" tIns="18288" bIns="18288">
             <a:spAutoFit/>
           </a:bodyPr>
           <a:lstStyle/>
           <a:p>
             <a:pPr>
-              <a:defRPr sz="1600" b="1">
+              <a:defRPr sz="1200" b="1">
                 <a:solidFill>
                   <a:srgbClr val="0F172A"/>
                 </a:solidFill>
@@ -6462,8 +6462,8 @@
         </p:nvSpPr>
         <p:spPr>
           <a:xfrm>
-            <a:off x="612648" y="2404872"/>
-            <a:ext cx="850392" cy="274320"/>
+            <a:off x="612648" y="2441448"/>
+            <a:ext cx="850392" cy="256031"/>
           </a:xfrm>
           <a:prstGeom prst="rect">
             <a:avLst/>
@@ -6471,7 +6471,7 @@
           <a:noFill/>
         </p:spPr>
         <p:txBody>
-          <a:bodyPr wrap="square">
+          <a:bodyPr wrap="square" lIns="27432" rIns="27432" tIns="18288" bIns="18288">
             <a:spAutoFit/>
           </a:bodyPr>
           <a:lstStyle/>
@@ -6626,8 +6626,8 @@
         </p:nvSpPr>
         <p:spPr>
           <a:xfrm>
-            <a:off x="2240280" y="2039112"/>
-            <a:ext cx="850392" cy="274320"/>
+            <a:off x="2240280" y="2020824"/>
+            <a:ext cx="850392" cy="402336"/>
           </a:xfrm>
           <a:prstGeom prst="rect">
             <a:avLst/>
@@ -6635,13 +6635,13 @@
           <a:noFill/>
         </p:spPr>
         <p:txBody>
-          <a:bodyPr wrap="none">
+          <a:bodyPr wrap="square" lIns="27432" rIns="27432" tIns="18288" bIns="18288">
             <a:spAutoFit/>
           </a:bodyPr>
           <a:lstStyle/>
           <a:p>
             <a:pPr>
-              <a:defRPr sz="1600" b="1">
+              <a:defRPr sz="1200" b="1">
                 <a:solidFill>
                   <a:srgbClr val="0F172A"/>
                 </a:solidFill>
@@ -6662,8 +6662,8 @@
         </p:nvSpPr>
         <p:spPr>
           <a:xfrm>
-            <a:off x="2240280" y="2404872"/>
-            <a:ext cx="850392" cy="274320"/>
+            <a:off x="2240280" y="2441448"/>
+            <a:ext cx="850392" cy="256031"/>
           </a:xfrm>
           <a:prstGeom prst="rect">
             <a:avLst/>
@@ -6671,7 +6671,7 @@
           <a:noFill/>
         </p:spPr>
         <p:txBody>
-          <a:bodyPr wrap="square">
+          <a:bodyPr wrap="square" lIns="27432" rIns="27432" tIns="18288" bIns="18288">
             <a:spAutoFit/>
           </a:bodyPr>
           <a:lstStyle/>
@@ -6826,8 +6826,8 @@
         </p:nvSpPr>
         <p:spPr>
           <a:xfrm>
-            <a:off x="3867911" y="2039112"/>
-            <a:ext cx="850392" cy="274320"/>
+            <a:off x="3867911" y="2020824"/>
+            <a:ext cx="850392" cy="402336"/>
           </a:xfrm>
           <a:prstGeom prst="rect">
             <a:avLst/>
@@ -6835,13 +6835,13 @@
           <a:noFill/>
         </p:spPr>
         <p:txBody>
-          <a:bodyPr wrap="none">
+          <a:bodyPr wrap="square" lIns="27432" rIns="27432" tIns="18288" bIns="18288">
             <a:spAutoFit/>
           </a:bodyPr>
           <a:lstStyle/>
           <a:p>
             <a:pPr>
-              <a:defRPr sz="1600" b="1">
+              <a:defRPr sz="1200" b="1">
                 <a:solidFill>
                   <a:srgbClr val="0F172A"/>
                 </a:solidFill>
@@ -6862,8 +6862,8 @@
         </p:nvSpPr>
         <p:spPr>
           <a:xfrm>
-            <a:off x="3867911" y="2404872"/>
-            <a:ext cx="850392" cy="274320"/>
+            <a:off x="3867911" y="2441448"/>
+            <a:ext cx="850392" cy="256031"/>
           </a:xfrm>
           <a:prstGeom prst="rect">
             <a:avLst/>
@@ -6871,7 +6871,7 @@
           <a:noFill/>
         </p:spPr>
         <p:txBody>
-          <a:bodyPr wrap="square">
+          <a:bodyPr wrap="square" lIns="27432" rIns="27432" tIns="18288" bIns="18288">
             <a:spAutoFit/>
           </a:bodyPr>
           <a:lstStyle/>
@@ -7026,8 +7026,8 @@
         </p:nvSpPr>
         <p:spPr>
           <a:xfrm>
-            <a:off x="5495544" y="2039112"/>
-            <a:ext cx="850392" cy="274320"/>
+            <a:off x="5495544" y="2020824"/>
+            <a:ext cx="850392" cy="402336"/>
           </a:xfrm>
           <a:prstGeom prst="rect">
             <a:avLst/>
@@ -7035,13 +7035,13 @@
           <a:noFill/>
         </p:spPr>
         <p:txBody>
-          <a:bodyPr wrap="none">
+          <a:bodyPr wrap="square" lIns="27432" rIns="27432" tIns="18288" bIns="18288">
             <a:spAutoFit/>
           </a:bodyPr>
           <a:lstStyle/>
           <a:p>
             <a:pPr>
-              <a:defRPr sz="1600" b="1">
+              <a:defRPr sz="1200" b="1">
                 <a:solidFill>
                   <a:srgbClr val="0F172A"/>
                 </a:solidFill>
@@ -7062,8 +7062,8 @@
         </p:nvSpPr>
         <p:spPr>
           <a:xfrm>
-            <a:off x="5495544" y="2404872"/>
-            <a:ext cx="850392" cy="274320"/>
+            <a:off x="5495544" y="2441448"/>
+            <a:ext cx="850392" cy="256031"/>
           </a:xfrm>
           <a:prstGeom prst="rect">
             <a:avLst/>
@@ -7071,7 +7071,7 @@
           <a:noFill/>
         </p:spPr>
         <p:txBody>
-          <a:bodyPr wrap="square">
+          <a:bodyPr wrap="square" lIns="27432" rIns="27432" tIns="18288" bIns="18288">
             <a:spAutoFit/>
           </a:bodyPr>
           <a:lstStyle/>
@@ -7226,8 +7226,8 @@
         </p:nvSpPr>
         <p:spPr>
           <a:xfrm>
-            <a:off x="7123176" y="2039112"/>
-            <a:ext cx="850392" cy="274320"/>
+            <a:off x="7123176" y="2020824"/>
+            <a:ext cx="850392" cy="402336"/>
           </a:xfrm>
           <a:prstGeom prst="rect">
             <a:avLst/>
@@ -7235,13 +7235,13 @@
           <a:noFill/>
         </p:spPr>
         <p:txBody>
-          <a:bodyPr wrap="none">
+          <a:bodyPr wrap="square" lIns="27432" rIns="27432" tIns="18288" bIns="18288">
             <a:spAutoFit/>
           </a:bodyPr>
           <a:lstStyle/>
           <a:p>
             <a:pPr>
-              <a:defRPr sz="1600" b="1">
+              <a:defRPr sz="1200" b="1">
                 <a:solidFill>
                   <a:srgbClr val="0F172A"/>
                 </a:solidFill>
@@ -7262,8 +7262,8 @@
         </p:nvSpPr>
         <p:spPr>
           <a:xfrm>
-            <a:off x="7123176" y="2404872"/>
-            <a:ext cx="850392" cy="274320"/>
+            <a:off x="7123176" y="2441448"/>
+            <a:ext cx="850392" cy="256031"/>
           </a:xfrm>
           <a:prstGeom prst="rect">
             <a:avLst/>
@@ -7271,7 +7271,7 @@
           <a:noFill/>
         </p:spPr>
         <p:txBody>
-          <a:bodyPr wrap="square">
+          <a:bodyPr wrap="square" lIns="27432" rIns="27432" tIns="18288" bIns="18288">
             <a:spAutoFit/>
           </a:bodyPr>
           <a:lstStyle/>
@@ -7426,8 +7426,8 @@
         </p:nvSpPr>
         <p:spPr>
           <a:xfrm>
-            <a:off x="8750808" y="2039112"/>
-            <a:ext cx="850392" cy="274320"/>
+            <a:off x="8750808" y="2020824"/>
+            <a:ext cx="850392" cy="402336"/>
           </a:xfrm>
           <a:prstGeom prst="rect">
             <a:avLst/>
@@ -7435,13 +7435,13 @@
           <a:noFill/>
         </p:spPr>
         <p:txBody>
-          <a:bodyPr wrap="none">
+          <a:bodyPr wrap="square" lIns="27432" rIns="27432" tIns="18288" bIns="18288">
             <a:spAutoFit/>
           </a:bodyPr>
           <a:lstStyle/>
           <a:p>
             <a:pPr>
-              <a:defRPr sz="1600" b="1">
+              <a:defRPr sz="1200" b="1">
                 <a:solidFill>
                   <a:srgbClr val="0F172A"/>
                 </a:solidFill>
@@ -7462,8 +7462,8 @@
         </p:nvSpPr>
         <p:spPr>
           <a:xfrm>
-            <a:off x="8750808" y="2404872"/>
-            <a:ext cx="850392" cy="274320"/>
+            <a:off x="8750808" y="2441448"/>
+            <a:ext cx="850392" cy="256031"/>
           </a:xfrm>
           <a:prstGeom prst="rect">
             <a:avLst/>
@@ -7471,7 +7471,7 @@
           <a:noFill/>
         </p:spPr>
         <p:txBody>
-          <a:bodyPr wrap="square">
+          <a:bodyPr wrap="square" lIns="27432" rIns="27432" tIns="18288" bIns="18288">
             <a:spAutoFit/>
           </a:bodyPr>
           <a:lstStyle/>
@@ -7626,8 +7626,8 @@
         </p:nvSpPr>
         <p:spPr>
           <a:xfrm>
-            <a:off x="10378440" y="2039112"/>
-            <a:ext cx="850392" cy="274320"/>
+            <a:off x="10378440" y="2020824"/>
+            <a:ext cx="850392" cy="402336"/>
           </a:xfrm>
           <a:prstGeom prst="rect">
             <a:avLst/>
@@ -7635,13 +7635,13 @@
           <a:noFill/>
         </p:spPr>
         <p:txBody>
-          <a:bodyPr wrap="none">
+          <a:bodyPr wrap="square" lIns="27432" rIns="27432" tIns="18288" bIns="18288">
             <a:spAutoFit/>
           </a:bodyPr>
           <a:lstStyle/>
           <a:p>
             <a:pPr>
-              <a:defRPr sz="1600" b="1">
+              <a:defRPr sz="1200" b="1">
                 <a:solidFill>
                   <a:srgbClr val="0F172A"/>
                 </a:solidFill>
@@ -7662,8 +7662,8 @@
         </p:nvSpPr>
         <p:spPr>
           <a:xfrm>
-            <a:off x="10378440" y="2404872"/>
-            <a:ext cx="850392" cy="274320"/>
+            <a:off x="10378440" y="2441448"/>
+            <a:ext cx="850392" cy="256031"/>
           </a:xfrm>
           <a:prstGeom prst="rect">
             <a:avLst/>
@@ -7671,7 +7671,7 @@
           <a:noFill/>
         </p:spPr>
         <p:txBody>
-          <a:bodyPr wrap="square">
+          <a:bodyPr wrap="square" lIns="27432" rIns="27432" tIns="18288" bIns="18288">
             <a:spAutoFit/>
           </a:bodyPr>
           <a:lstStyle/>
@@ -7800,7 +7800,7 @@
           <a:noFill/>
         </p:spPr>
         <p:txBody>
-          <a:bodyPr wrap="none">
+          <a:bodyPr wrap="square" lIns="73152" rIns="73152" tIns="27432" bIns="27432">
             <a:spAutoFit/>
           </a:bodyPr>
           <a:lstStyle/>
@@ -7892,8 +7892,8 @@
         </p:nvSpPr>
         <p:spPr>
           <a:xfrm>
-            <a:off x="502920" y="292608"/>
-            <a:ext cx="7772400" cy="502920"/>
+            <a:off x="685800" y="292608"/>
+            <a:ext cx="8549640" cy="566928"/>
           </a:xfrm>
           <a:prstGeom prst="rect">
             <a:avLst/>
@@ -7901,13 +7901,13 @@
           <a:noFill/>
         </p:spPr>
         <p:txBody>
-          <a:bodyPr wrap="none">
+          <a:bodyPr wrap="square" lIns="54864" rIns="54864" tIns="18288" bIns="18288">
             <a:spAutoFit/>
           </a:bodyPr>
           <a:lstStyle/>
           <a:p>
             <a:pPr>
-              <a:defRPr sz="3000" b="1">
+              <a:defRPr sz="2900" b="1">
                 <a:solidFill>
                   <a:srgbClr val="0F172A"/>
                 </a:solidFill>
@@ -7983,8 +7983,8 @@
         </p:nvSpPr>
         <p:spPr>
           <a:xfrm>
-            <a:off x="777240" y="1325880"/>
-            <a:ext cx="6766560" cy="4389120"/>
+            <a:off x="868680" y="1325880"/>
+            <a:ext cx="6217920" cy="4389120"/>
           </a:xfrm>
           <a:prstGeom prst="rect">
             <a:avLst/>
@@ -7992,7 +7992,7 @@
           <a:noFill/>
         </p:spPr>
         <p:txBody>
-          <a:bodyPr wrap="none">
+          <a:bodyPr wrap="square" lIns="73152" rIns="73152" tIns="27432" bIns="27432">
             <a:spAutoFit/>
           </a:bodyPr>
           <a:lstStyle/>
@@ -8025,7 +8025,23 @@
               </a:defRPr>
             </a:pPr>
             <a:r>
-              <a:t>Agent 主路径调用 p2p_send_instance_message({ instanceId, message })。</a:t>
+              <a:t>Agent 主路径调用实例发送工具。</a:t>
+            </a:r>
+          </a:p>
+          <a:p>
+            <a:pPr>
+              <a:spcAft>
+                <a:spcPts val="800"/>
+              </a:spcAft>
+              <a:defRPr sz="1900">
+                <a:solidFill>
+                  <a:srgbClr val="0F172A"/>
+                </a:solidFill>
+                <a:latin typeface="Aptos"/>
+              </a:defRPr>
+            </a:pPr>
+            <a:r>
+              <a:t>工具参数：p2p_send_instance_message({ instanceId, message })。</a:t>
             </a:r>
           </a:p>
           <a:p>
@@ -8196,8 +8212,8 @@
         </p:nvSpPr>
         <p:spPr>
           <a:xfrm>
-            <a:off x="7836408" y="1490472"/>
-            <a:ext cx="3364991" cy="274320"/>
+            <a:off x="7836408" y="1472184"/>
+            <a:ext cx="3364991" cy="310896"/>
           </a:xfrm>
           <a:prstGeom prst="rect">
             <a:avLst/>
@@ -8205,7 +8221,7 @@
           <a:noFill/>
         </p:spPr>
         <p:txBody>
-          <a:bodyPr wrap="none">
+          <a:bodyPr wrap="square" lIns="27432" rIns="27432" tIns="18288" bIns="18288">
             <a:spAutoFit/>
           </a:bodyPr>
           <a:lstStyle/>
@@ -8233,7 +8249,7 @@
         <p:spPr>
           <a:xfrm>
             <a:off x="7836408" y="1856231"/>
-            <a:ext cx="3364991" cy="320040"/>
+            <a:ext cx="3364991" cy="338328"/>
           </a:xfrm>
           <a:prstGeom prst="rect">
             <a:avLst/>
@@ -8241,7 +8257,7 @@
           <a:noFill/>
         </p:spPr>
         <p:txBody>
-          <a:bodyPr wrap="square">
+          <a:bodyPr wrap="square" lIns="27432" rIns="27432" tIns="18288" bIns="18288">
             <a:spAutoFit/>
           </a:bodyPr>
           <a:lstStyle/>
@@ -8361,8 +8377,8 @@
         </p:nvSpPr>
         <p:spPr>
           <a:xfrm>
-            <a:off x="7836408" y="2907792"/>
-            <a:ext cx="3364991" cy="274320"/>
+            <a:off x="7836408" y="2889504"/>
+            <a:ext cx="3364991" cy="310896"/>
           </a:xfrm>
           <a:prstGeom prst="rect">
             <a:avLst/>
@@ -8370,7 +8386,7 @@
           <a:noFill/>
         </p:spPr>
         <p:txBody>
-          <a:bodyPr wrap="none">
+          <a:bodyPr wrap="square" lIns="27432" rIns="27432" tIns="18288" bIns="18288">
             <a:spAutoFit/>
           </a:bodyPr>
           <a:lstStyle/>
@@ -8398,7 +8414,7 @@
         <p:spPr>
           <a:xfrm>
             <a:off x="7836408" y="3273552"/>
-            <a:ext cx="3364991" cy="548640"/>
+            <a:ext cx="3364991" cy="566928"/>
           </a:xfrm>
           <a:prstGeom prst="rect">
             <a:avLst/>
@@ -8406,7 +8422,7 @@
           <a:noFill/>
         </p:spPr>
         <p:txBody>
-          <a:bodyPr wrap="square">
+          <a:bodyPr wrap="square" lIns="27432" rIns="27432" tIns="18288" bIns="18288">
             <a:spAutoFit/>
           </a:bodyPr>
           <a:lstStyle/>
@@ -8513,8 +8529,8 @@
         </p:nvSpPr>
         <p:spPr>
           <a:xfrm>
-            <a:off x="502920" y="292608"/>
-            <a:ext cx="7772400" cy="502920"/>
+            <a:off x="685800" y="292608"/>
+            <a:ext cx="8549640" cy="566928"/>
           </a:xfrm>
           <a:prstGeom prst="rect">
             <a:avLst/>
@@ -8522,13 +8538,13 @@
           <a:noFill/>
         </p:spPr>
         <p:txBody>
-          <a:bodyPr wrap="none">
+          <a:bodyPr wrap="square" lIns="54864" rIns="54864" tIns="18288" bIns="18288">
             <a:spAutoFit/>
           </a:bodyPr>
           <a:lstStyle/>
           <a:p>
             <a:pPr>
-              <a:defRPr sz="3000" b="1">
+              <a:defRPr sz="2900" b="1">
                 <a:solidFill>
                   <a:srgbClr val="0F172A"/>
                 </a:solidFill>
@@ -8694,8 +8710,8 @@
         </p:nvSpPr>
         <p:spPr>
           <a:xfrm>
-            <a:off x="932688" y="1490472"/>
-            <a:ext cx="2359152" cy="274320"/>
+            <a:off x="932688" y="1472184"/>
+            <a:ext cx="2359152" cy="402336"/>
           </a:xfrm>
           <a:prstGeom prst="rect">
             <a:avLst/>
@@ -8703,13 +8719,13 @@
           <a:noFill/>
         </p:spPr>
         <p:txBody>
-          <a:bodyPr wrap="none">
+          <a:bodyPr wrap="square" lIns="27432" rIns="27432" tIns="18288" bIns="18288">
             <a:spAutoFit/>
           </a:bodyPr>
           <a:lstStyle/>
           <a:p>
             <a:pPr>
-              <a:defRPr sz="1600" b="1">
+              <a:defRPr sz="1200" b="1">
                 <a:solidFill>
                   <a:srgbClr val="0F172A"/>
                 </a:solidFill>
@@ -8730,8 +8746,8 @@
         </p:nvSpPr>
         <p:spPr>
           <a:xfrm>
-            <a:off x="932688" y="1856231"/>
-            <a:ext cx="2359152" cy="457200"/>
+            <a:off x="932688" y="1892807"/>
+            <a:ext cx="2359152" cy="438912"/>
           </a:xfrm>
           <a:prstGeom prst="rect">
             <a:avLst/>
@@ -8739,7 +8755,7 @@
           <a:noFill/>
         </p:spPr>
         <p:txBody>
-          <a:bodyPr wrap="square">
+          <a:bodyPr wrap="square" lIns="27432" rIns="27432" tIns="18288" bIns="18288">
             <a:spAutoFit/>
           </a:bodyPr>
           <a:lstStyle/>
@@ -8859,8 +8875,8 @@
         </p:nvSpPr>
         <p:spPr>
           <a:xfrm>
-            <a:off x="4773168" y="1490472"/>
-            <a:ext cx="2359152" cy="274320"/>
+            <a:off x="4773168" y="1472184"/>
+            <a:ext cx="2359152" cy="310896"/>
           </a:xfrm>
           <a:prstGeom prst="rect">
             <a:avLst/>
@@ -8868,7 +8884,7 @@
           <a:noFill/>
         </p:spPr>
         <p:txBody>
-          <a:bodyPr wrap="none">
+          <a:bodyPr wrap="square" lIns="27432" rIns="27432" tIns="18288" bIns="18288">
             <a:spAutoFit/>
           </a:bodyPr>
           <a:lstStyle/>
@@ -8896,7 +8912,7 @@
         <p:spPr>
           <a:xfrm>
             <a:off x="4773168" y="1856231"/>
-            <a:ext cx="2359152" cy="457200"/>
+            <a:ext cx="2359152" cy="475488"/>
           </a:xfrm>
           <a:prstGeom prst="rect">
             <a:avLst/>
@@ -8904,7 +8920,7 @@
           <a:noFill/>
         </p:spPr>
         <p:txBody>
-          <a:bodyPr wrap="square">
+          <a:bodyPr wrap="square" lIns="27432" rIns="27432" tIns="18288" bIns="18288">
             <a:spAutoFit/>
           </a:bodyPr>
           <a:lstStyle/>
@@ -9024,8 +9040,8 @@
         </p:nvSpPr>
         <p:spPr>
           <a:xfrm>
-            <a:off x="8613648" y="1490472"/>
-            <a:ext cx="2359152" cy="274320"/>
+            <a:off x="8613648" y="1472184"/>
+            <a:ext cx="2359152" cy="310896"/>
           </a:xfrm>
           <a:prstGeom prst="rect">
             <a:avLst/>
@@ -9033,7 +9049,7 @@
           <a:noFill/>
         </p:spPr>
         <p:txBody>
-          <a:bodyPr wrap="none">
+          <a:bodyPr wrap="square" lIns="27432" rIns="27432" tIns="18288" bIns="18288">
             <a:spAutoFit/>
           </a:bodyPr>
           <a:lstStyle/>
@@ -9061,7 +9077,7 @@
         <p:spPr>
           <a:xfrm>
             <a:off x="8613648" y="1856231"/>
-            <a:ext cx="2359152" cy="457200"/>
+            <a:ext cx="2359152" cy="475488"/>
           </a:xfrm>
           <a:prstGeom prst="rect">
             <a:avLst/>
@@ -9069,7 +9085,7 @@
           <a:noFill/>
         </p:spPr>
         <p:txBody>
-          <a:bodyPr wrap="square">
+          <a:bodyPr wrap="square" lIns="27432" rIns="27432" tIns="18288" bIns="18288">
             <a:spAutoFit/>
           </a:bodyPr>
           <a:lstStyle/>
@@ -9178,7 +9194,7 @@
           <a:noFill/>
         </p:spPr>
         <p:txBody>
-          <a:bodyPr wrap="none">
+          <a:bodyPr wrap="square" lIns="73152" rIns="73152" tIns="27432" bIns="27432">
             <a:spAutoFit/>
           </a:bodyPr>
           <a:lstStyle/>
@@ -9302,8 +9318,8 @@
         </p:nvSpPr>
         <p:spPr>
           <a:xfrm>
-            <a:off x="502920" y="292608"/>
-            <a:ext cx="7772400" cy="502920"/>
+            <a:off x="685800" y="292608"/>
+            <a:ext cx="8549640" cy="566928"/>
           </a:xfrm>
           <a:prstGeom prst="rect">
             <a:avLst/>
@@ -9311,13 +9327,13 @@
           <a:noFill/>
         </p:spPr>
         <p:txBody>
-          <a:bodyPr wrap="none">
+          <a:bodyPr wrap="square" lIns="54864" rIns="54864" tIns="18288" bIns="18288">
             <a:spAutoFit/>
           </a:bodyPr>
           <a:lstStyle/>
           <a:p>
             <a:pPr>
-              <a:defRPr sz="3000" b="1">
+              <a:defRPr sz="2900" b="1">
                 <a:solidFill>
                   <a:srgbClr val="0F172A"/>
                 </a:solidFill>
@@ -9483,8 +9499,8 @@
         </p:nvSpPr>
         <p:spPr>
           <a:xfrm>
-            <a:off x="886968" y="1581912"/>
-            <a:ext cx="3044952" cy="274320"/>
+            <a:off x="886968" y="1563624"/>
+            <a:ext cx="3044952" cy="402336"/>
           </a:xfrm>
           <a:prstGeom prst="rect">
             <a:avLst/>
@@ -9492,13 +9508,13 @@
           <a:noFill/>
         </p:spPr>
         <p:txBody>
-          <a:bodyPr wrap="none">
+          <a:bodyPr wrap="square" lIns="27432" rIns="27432" tIns="18288" bIns="18288">
             <a:spAutoFit/>
           </a:bodyPr>
           <a:lstStyle/>
           <a:p>
             <a:pPr>
-              <a:defRPr sz="1600" b="1">
+              <a:defRPr sz="1200" b="1">
                 <a:solidFill>
                   <a:srgbClr val="0F172A"/>
                 </a:solidFill>
@@ -9519,8 +9535,8 @@
         </p:nvSpPr>
         <p:spPr>
           <a:xfrm>
-            <a:off x="886968" y="1947672"/>
-            <a:ext cx="3044952" cy="2194560"/>
+            <a:off x="886968" y="1984248"/>
+            <a:ext cx="3044952" cy="2176272"/>
           </a:xfrm>
           <a:prstGeom prst="rect">
             <a:avLst/>
@@ -9528,7 +9544,7 @@
           <a:noFill/>
         </p:spPr>
         <p:txBody>
-          <a:bodyPr wrap="square">
+          <a:bodyPr wrap="square" lIns="27432" rIns="27432" tIns="18288" bIns="18288">
             <a:spAutoFit/>
           </a:bodyPr>
           <a:lstStyle/>
@@ -9680,8 +9696,8 @@
         </p:nvSpPr>
         <p:spPr>
           <a:xfrm>
-            <a:off x="4590288" y="1581912"/>
-            <a:ext cx="3044952" cy="274320"/>
+            <a:off x="4590288" y="1563624"/>
+            <a:ext cx="3044952" cy="402336"/>
           </a:xfrm>
           <a:prstGeom prst="rect">
             <a:avLst/>
@@ -9689,13 +9705,13 @@
           <a:noFill/>
         </p:spPr>
         <p:txBody>
-          <a:bodyPr wrap="none">
+          <a:bodyPr wrap="square" lIns="27432" rIns="27432" tIns="18288" bIns="18288">
             <a:spAutoFit/>
           </a:bodyPr>
           <a:lstStyle/>
           <a:p>
             <a:pPr>
-              <a:defRPr sz="1600" b="1">
+              <a:defRPr sz="1200" b="1">
                 <a:solidFill>
                   <a:srgbClr val="0F172A"/>
                 </a:solidFill>
@@ -9716,8 +9732,8 @@
         </p:nvSpPr>
         <p:spPr>
           <a:xfrm>
-            <a:off x="4590288" y="1947672"/>
-            <a:ext cx="3044952" cy="2194560"/>
+            <a:off x="4590288" y="1984248"/>
+            <a:ext cx="3044952" cy="2176272"/>
           </a:xfrm>
           <a:prstGeom prst="rect">
             <a:avLst/>
@@ -9725,7 +9741,7 @@
           <a:noFill/>
         </p:spPr>
         <p:txBody>
-          <a:bodyPr wrap="square">
+          <a:bodyPr wrap="square" lIns="27432" rIns="27432" tIns="18288" bIns="18288">
             <a:spAutoFit/>
           </a:bodyPr>
           <a:lstStyle/>
@@ -9877,8 +9893,8 @@
         </p:nvSpPr>
         <p:spPr>
           <a:xfrm>
-            <a:off x="8293608" y="1581912"/>
-            <a:ext cx="3044952" cy="274320"/>
+            <a:off x="8293608" y="1563624"/>
+            <a:ext cx="3044952" cy="402336"/>
           </a:xfrm>
           <a:prstGeom prst="rect">
             <a:avLst/>
@@ -9886,13 +9902,13 @@
           <a:noFill/>
         </p:spPr>
         <p:txBody>
-          <a:bodyPr wrap="none">
+          <a:bodyPr wrap="square" lIns="27432" rIns="27432" tIns="18288" bIns="18288">
             <a:spAutoFit/>
           </a:bodyPr>
           <a:lstStyle/>
           <a:p>
             <a:pPr>
-              <a:defRPr sz="1600" b="1">
+              <a:defRPr sz="1200" b="1">
                 <a:solidFill>
                   <a:srgbClr val="0F172A"/>
                 </a:solidFill>
@@ -9913,8 +9929,8 @@
         </p:nvSpPr>
         <p:spPr>
           <a:xfrm>
-            <a:off x="8293608" y="1947672"/>
-            <a:ext cx="3044952" cy="2194560"/>
+            <a:off x="8293608" y="1984248"/>
+            <a:ext cx="3044952" cy="2176272"/>
           </a:xfrm>
           <a:prstGeom prst="rect">
             <a:avLst/>
@@ -9922,7 +9938,7 @@
           <a:noFill/>
         </p:spPr>
         <p:txBody>
-          <a:bodyPr wrap="square">
+          <a:bodyPr wrap="square" lIns="27432" rIns="27432" tIns="18288" bIns="18288">
             <a:spAutoFit/>
           </a:bodyPr>
           <a:lstStyle/>
@@ -9993,7 +10009,7 @@
           <a:noFill/>
         </p:spPr>
         <p:txBody>
-          <a:bodyPr wrap="none">
+          <a:bodyPr wrap="square" lIns="73152" rIns="73152" tIns="27432" bIns="27432">
             <a:spAutoFit/>
           </a:bodyPr>
           <a:lstStyle/>
@@ -10085,8 +10101,8 @@
         </p:nvSpPr>
         <p:spPr>
           <a:xfrm>
-            <a:off x="502920" y="292608"/>
-            <a:ext cx="7772400" cy="502920"/>
+            <a:off x="685800" y="292608"/>
+            <a:ext cx="8549640" cy="566928"/>
           </a:xfrm>
           <a:prstGeom prst="rect">
             <a:avLst/>
@@ -10094,13 +10110,13 @@
           <a:noFill/>
         </p:spPr>
         <p:txBody>
-          <a:bodyPr wrap="none">
+          <a:bodyPr wrap="square" lIns="54864" rIns="54864" tIns="18288" bIns="18288">
             <a:spAutoFit/>
           </a:bodyPr>
           <a:lstStyle/>
           <a:p>
             <a:pPr>
-              <a:defRPr sz="3000" b="1">
+              <a:defRPr sz="2900" b="1">
                 <a:solidFill>
                   <a:srgbClr val="0F172A"/>
                 </a:solidFill>
@@ -10266,8 +10282,8 @@
         </p:nvSpPr>
         <p:spPr>
           <a:xfrm>
-            <a:off x="932688" y="1581912"/>
-            <a:ext cx="1993392" cy="274320"/>
+            <a:off x="932688" y="1563624"/>
+            <a:ext cx="1993392" cy="402336"/>
           </a:xfrm>
           <a:prstGeom prst="rect">
             <a:avLst/>
@@ -10275,13 +10291,13 @@
           <a:noFill/>
         </p:spPr>
         <p:txBody>
-          <a:bodyPr wrap="none">
+          <a:bodyPr wrap="square" lIns="27432" rIns="27432" tIns="18288" bIns="18288">
             <a:spAutoFit/>
           </a:bodyPr>
           <a:lstStyle/>
           <a:p>
             <a:pPr>
-              <a:defRPr sz="1600" b="1">
+              <a:defRPr sz="1200" b="1">
                 <a:solidFill>
                   <a:srgbClr val="0F172A"/>
                 </a:solidFill>
@@ -10302,8 +10318,8 @@
         </p:nvSpPr>
         <p:spPr>
           <a:xfrm>
-            <a:off x="932688" y="1947672"/>
-            <a:ext cx="1993392" cy="457200"/>
+            <a:off x="932688" y="1984248"/>
+            <a:ext cx="1993392" cy="438912"/>
           </a:xfrm>
           <a:prstGeom prst="rect">
             <a:avLst/>
@@ -10311,7 +10327,7 @@
           <a:noFill/>
         </p:spPr>
         <p:txBody>
-          <a:bodyPr wrap="square">
+          <a:bodyPr wrap="square" lIns="27432" rIns="27432" tIns="18288" bIns="18288">
             <a:spAutoFit/>
           </a:bodyPr>
           <a:lstStyle/>
@@ -10431,8 +10447,8 @@
         </p:nvSpPr>
         <p:spPr>
           <a:xfrm>
-            <a:off x="3858768" y="1581912"/>
-            <a:ext cx="1993392" cy="274320"/>
+            <a:off x="3858768" y="1563624"/>
+            <a:ext cx="1993392" cy="310896"/>
           </a:xfrm>
           <a:prstGeom prst="rect">
             <a:avLst/>
@@ -10440,7 +10456,7 @@
           <a:noFill/>
         </p:spPr>
         <p:txBody>
-          <a:bodyPr wrap="none">
+          <a:bodyPr wrap="square" lIns="27432" rIns="27432" tIns="18288" bIns="18288">
             <a:spAutoFit/>
           </a:bodyPr>
           <a:lstStyle/>
@@ -10468,7 +10484,7 @@
         <p:spPr>
           <a:xfrm>
             <a:off x="3858768" y="1947672"/>
-            <a:ext cx="1993392" cy="457200"/>
+            <a:ext cx="1993392" cy="475488"/>
           </a:xfrm>
           <a:prstGeom prst="rect">
             <a:avLst/>
@@ -10476,7 +10492,7 @@
           <a:noFill/>
         </p:spPr>
         <p:txBody>
-          <a:bodyPr wrap="square">
+          <a:bodyPr wrap="square" lIns="27432" rIns="27432" tIns="18288" bIns="18288">
             <a:spAutoFit/>
           </a:bodyPr>
           <a:lstStyle/>
@@ -10612,8 +10628,8 @@
         </p:nvSpPr>
         <p:spPr>
           <a:xfrm>
-            <a:off x="6784848" y="1581912"/>
-            <a:ext cx="1993392" cy="274320"/>
+            <a:off x="6784848" y="1563624"/>
+            <a:ext cx="1993392" cy="402336"/>
           </a:xfrm>
           <a:prstGeom prst="rect">
             <a:avLst/>
@@ -10621,13 +10637,13 @@
           <a:noFill/>
         </p:spPr>
         <p:txBody>
-          <a:bodyPr wrap="none">
+          <a:bodyPr wrap="square" lIns="27432" rIns="27432" tIns="18288" bIns="18288">
             <a:spAutoFit/>
           </a:bodyPr>
           <a:lstStyle/>
           <a:p>
             <a:pPr>
-              <a:defRPr sz="1600" b="1">
+              <a:defRPr sz="1200" b="1">
                 <a:solidFill>
                   <a:srgbClr val="0F172A"/>
                 </a:solidFill>
@@ -10648,8 +10664,8 @@
         </p:nvSpPr>
         <p:spPr>
           <a:xfrm>
-            <a:off x="6784848" y="1947672"/>
-            <a:ext cx="1993392" cy="457200"/>
+            <a:off x="6784848" y="1984248"/>
+            <a:ext cx="1993392" cy="438912"/>
           </a:xfrm>
           <a:prstGeom prst="rect">
             <a:avLst/>
@@ -10657,7 +10673,7 @@
           <a:noFill/>
         </p:spPr>
         <p:txBody>
-          <a:bodyPr wrap="square">
+          <a:bodyPr wrap="square" lIns="27432" rIns="27432" tIns="18288" bIns="18288">
             <a:spAutoFit/>
           </a:bodyPr>
           <a:lstStyle/>
@@ -10777,8 +10793,8 @@
         </p:nvSpPr>
         <p:spPr>
           <a:xfrm>
-            <a:off x="9710928" y="1581912"/>
-            <a:ext cx="1627632" cy="274320"/>
+            <a:off x="9710928" y="1563624"/>
+            <a:ext cx="1627632" cy="310896"/>
           </a:xfrm>
           <a:prstGeom prst="rect">
             <a:avLst/>
@@ -10786,7 +10802,7 @@
           <a:noFill/>
         </p:spPr>
         <p:txBody>
-          <a:bodyPr wrap="none">
+          <a:bodyPr wrap="square" lIns="27432" rIns="27432" tIns="18288" bIns="18288">
             <a:spAutoFit/>
           </a:bodyPr>
           <a:lstStyle/>
@@ -10814,7 +10830,7 @@
         <p:spPr>
           <a:xfrm>
             <a:off x="9710928" y="1947672"/>
-            <a:ext cx="1627632" cy="457200"/>
+            <a:ext cx="1627632" cy="475488"/>
           </a:xfrm>
           <a:prstGeom prst="rect">
             <a:avLst/>
@@ -10822,7 +10838,7 @@
           <a:noFill/>
         </p:spPr>
         <p:txBody>
-          <a:bodyPr wrap="square">
+          <a:bodyPr wrap="square" lIns="27432" rIns="27432" tIns="18288" bIns="18288">
             <a:spAutoFit/>
           </a:bodyPr>
           <a:lstStyle/>
@@ -10966,7 +10982,7 @@
           <a:noFill/>
         </p:spPr>
         <p:txBody>
-          <a:bodyPr wrap="none">
+          <a:bodyPr wrap="square" lIns="73152" rIns="73152" tIns="27432" bIns="27432">
             <a:spAutoFit/>
           </a:bodyPr>
           <a:lstStyle/>
@@ -11058,8 +11074,8 @@
         </p:nvSpPr>
         <p:spPr>
           <a:xfrm>
-            <a:off x="502920" y="292608"/>
-            <a:ext cx="7772400" cy="502920"/>
+            <a:off x="685800" y="292608"/>
+            <a:ext cx="8549640" cy="566928"/>
           </a:xfrm>
           <a:prstGeom prst="rect">
             <a:avLst/>
@@ -11067,13 +11083,13 @@
           <a:noFill/>
         </p:spPr>
         <p:txBody>
-          <a:bodyPr wrap="none">
+          <a:bodyPr wrap="square" lIns="54864" rIns="54864" tIns="18288" bIns="18288">
             <a:spAutoFit/>
           </a:bodyPr>
           <a:lstStyle/>
           <a:p>
             <a:pPr>
-              <a:defRPr sz="3000" b="1">
+              <a:defRPr sz="2900" b="1">
                 <a:solidFill>
                   <a:srgbClr val="0F172A"/>
                 </a:solidFill>
@@ -11239,8 +11255,8 @@
         </p:nvSpPr>
         <p:spPr>
           <a:xfrm>
-            <a:off x="978408" y="1490472"/>
-            <a:ext cx="2816352" cy="274320"/>
+            <a:off x="978408" y="1472184"/>
+            <a:ext cx="2816352" cy="310896"/>
           </a:xfrm>
           <a:prstGeom prst="rect">
             <a:avLst/>
@@ -11248,7 +11264,7 @@
           <a:noFill/>
         </p:spPr>
         <p:txBody>
-          <a:bodyPr wrap="none">
+          <a:bodyPr wrap="square" lIns="27432" rIns="27432" tIns="18288" bIns="18288">
             <a:spAutoFit/>
           </a:bodyPr>
           <a:lstStyle/>
@@ -11276,7 +11292,7 @@
         <p:spPr>
           <a:xfrm>
             <a:off x="978408" y="1856231"/>
-            <a:ext cx="2816352" cy="777240"/>
+            <a:ext cx="2816352" cy="795528"/>
           </a:xfrm>
           <a:prstGeom prst="rect">
             <a:avLst/>
@@ -11284,7 +11300,7 @@
           <a:noFill/>
         </p:spPr>
         <p:txBody>
-          <a:bodyPr wrap="square">
+          <a:bodyPr wrap="square" lIns="27432" rIns="27432" tIns="18288" bIns="18288">
             <a:spAutoFit/>
           </a:bodyPr>
           <a:lstStyle/>
@@ -11420,8 +11436,8 @@
         </p:nvSpPr>
         <p:spPr>
           <a:xfrm>
-            <a:off x="4681728" y="1490472"/>
-            <a:ext cx="2816352" cy="274320"/>
+            <a:off x="4681728" y="1472184"/>
+            <a:ext cx="2816352" cy="310896"/>
           </a:xfrm>
           <a:prstGeom prst="rect">
             <a:avLst/>
@@ -11429,7 +11445,7 @@
           <a:noFill/>
         </p:spPr>
         <p:txBody>
-          <a:bodyPr wrap="none">
+          <a:bodyPr wrap="square" lIns="27432" rIns="27432" tIns="18288" bIns="18288">
             <a:spAutoFit/>
           </a:bodyPr>
           <a:lstStyle/>
@@ -11457,7 +11473,7 @@
         <p:spPr>
           <a:xfrm>
             <a:off x="4681728" y="1856231"/>
-            <a:ext cx="2816352" cy="777240"/>
+            <a:ext cx="2816352" cy="795528"/>
           </a:xfrm>
           <a:prstGeom prst="rect">
             <a:avLst/>
@@ -11465,7 +11481,7 @@
           <a:noFill/>
         </p:spPr>
         <p:txBody>
-          <a:bodyPr wrap="square">
+          <a:bodyPr wrap="square" lIns="27432" rIns="27432" tIns="18288" bIns="18288">
             <a:spAutoFit/>
           </a:bodyPr>
           <a:lstStyle/>
@@ -11601,8 +11617,8 @@
         </p:nvSpPr>
         <p:spPr>
           <a:xfrm>
-            <a:off x="8385048" y="1490472"/>
-            <a:ext cx="2816352" cy="274320"/>
+            <a:off x="8385048" y="1472184"/>
+            <a:ext cx="2816352" cy="310896"/>
           </a:xfrm>
           <a:prstGeom prst="rect">
             <a:avLst/>
@@ -11610,7 +11626,7 @@
           <a:noFill/>
         </p:spPr>
         <p:txBody>
-          <a:bodyPr wrap="none">
+          <a:bodyPr wrap="square" lIns="27432" rIns="27432" tIns="18288" bIns="18288">
             <a:spAutoFit/>
           </a:bodyPr>
           <a:lstStyle/>
@@ -11638,7 +11654,7 @@
         <p:spPr>
           <a:xfrm>
             <a:off x="8385048" y="1856231"/>
-            <a:ext cx="2816352" cy="777240"/>
+            <a:ext cx="2816352" cy="795528"/>
           </a:xfrm>
           <a:prstGeom prst="rect">
             <a:avLst/>
@@ -11646,7 +11662,7 @@
           <a:noFill/>
         </p:spPr>
         <p:txBody>
-          <a:bodyPr wrap="square">
+          <a:bodyPr wrap="square" lIns="27432" rIns="27432" tIns="18288" bIns="18288">
             <a:spAutoFit/>
           </a:bodyPr>
           <a:lstStyle/>
@@ -11701,7 +11717,7 @@
           <a:noFill/>
         </p:spPr>
         <p:txBody>
-          <a:bodyPr wrap="none">
+          <a:bodyPr wrap="square" lIns="73152" rIns="73152" tIns="27432" bIns="27432">
             <a:spAutoFit/>
           </a:bodyPr>
           <a:lstStyle/>
@@ -11793,8 +11809,8 @@
         </p:nvSpPr>
         <p:spPr>
           <a:xfrm>
-            <a:off x="502920" y="292608"/>
-            <a:ext cx="7772400" cy="502920"/>
+            <a:off x="685800" y="292608"/>
+            <a:ext cx="8549640" cy="566928"/>
           </a:xfrm>
           <a:prstGeom prst="rect">
             <a:avLst/>
@@ -11802,13 +11818,13 @@
           <a:noFill/>
         </p:spPr>
         <p:txBody>
-          <a:bodyPr wrap="none">
+          <a:bodyPr wrap="square" lIns="54864" rIns="54864" tIns="18288" bIns="18288">
             <a:spAutoFit/>
           </a:bodyPr>
           <a:lstStyle/>
           <a:p>
             <a:pPr>
-              <a:defRPr sz="3000" b="1">
+              <a:defRPr sz="2900" b="1">
                 <a:solidFill>
                   <a:srgbClr val="0F172A"/>
                 </a:solidFill>
@@ -11884,8 +11900,8 @@
         </p:nvSpPr>
         <p:spPr>
           <a:xfrm>
-            <a:off x="777240" y="1325880"/>
-            <a:ext cx="6766560" cy="4389120"/>
+            <a:off x="868680" y="1325880"/>
+            <a:ext cx="6217920" cy="4389120"/>
           </a:xfrm>
           <a:prstGeom prst="rect">
             <a:avLst/>
@@ -11893,7 +11909,7 @@
           <a:noFill/>
         </p:spPr>
         <p:txBody>
-          <a:bodyPr wrap="none">
+          <a:bodyPr wrap="square" lIns="73152" rIns="73152" tIns="27432" bIns="27432">
             <a:spAutoFit/>
           </a:bodyPr>
           <a:lstStyle/>
